--- a/DAK_POC_Proposal_v2.pptx
+++ b/DAK_POC_Proposal_v2.pptx
@@ -5,11 +5,11 @@
     <p:sldMasterId id="2147483648" r:id="rId1"/>
   </p:sldMasterIdLst>
   <p:sldIdLst>
-    <p:sldId id="256" r:id="rId7"/>
-    <p:sldId id="257" r:id="rId8"/>
-    <p:sldId id="258" r:id="rId9"/>
+    <p:sldId id="256" r:id="rId2"/>
+    <p:sldId id="257" r:id="rId3"/>
+    <p:sldId id="258" r:id="rId4"/>
   </p:sldIdLst>
-  <p:sldSz cx="12191695" cy="6858000" type="screen4x3"/>
+  <p:sldSz cx="12192000" cy="6858000"/>
   <p:notesSz cx="6858000" cy="9144000"/>
   <p:defaultTextStyle>
     <a:defPPr>
@@ -106,6 +106,22 @@
       </a:defRPr>
     </a:lvl9pPr>
   </p:defaultTextStyle>
+  <p:extLst>
+    <p:ext uri="{EFAFB233-063F-42B5-8137-9DF3F51BA10A}">
+      <p15:sldGuideLst xmlns:p15="http://schemas.microsoft.com/office/powerpoint/2012/main">
+        <p15:guide id="1" orient="horz" pos="2160">
+          <p15:clr>
+            <a:srgbClr val="A4A3A4"/>
+          </p15:clr>
+        </p15:guide>
+        <p15:guide id="2" pos="2880">
+          <p15:clr>
+            <a:srgbClr val="A4A3A4"/>
+          </p15:clr>
+        </p15:guide>
+      </p15:sldGuideLst>
+    </p:ext>
+  </p:extLst>
 </p:presentation>
 </file>
 
@@ -147,10 +163,9 @@
           <a:lstStyle/>
           <a:p>
             <a:r>
-              <a:rPr lang="en-US" smtClean="0"/>
+              <a:rPr lang="en-US"/>
               <a:t>Click to edit Master title style</a:t>
             </a:r>
-            <a:endParaRPr lang="en-US"/>
           </a:p>
         </p:txBody>
       </p:sp>
@@ -266,10 +281,9 @@
           </a:lstStyle>
           <a:p>
             <a:r>
-              <a:rPr lang="en-US" smtClean="0"/>
+              <a:rPr lang="en-US"/>
               <a:t>Click to edit Master subtitle style</a:t>
             </a:r>
-            <a:endParaRPr lang="en-US"/>
           </a:p>
         </p:txBody>
       </p:sp>
@@ -290,7 +304,7 @@
           <a:p>
             <a:fld id="{5BCAD085-E8A6-8845-BD4E-CB4CCA059FC4}" type="datetimeFigureOut">
               <a:rPr lang="en-US" smtClean="0"/>
-              <a:t>1/27/13</a:t>
+              <a:t>2/13/2026</a:t>
             </a:fld>
             <a:endParaRPr lang="en-US"/>
           </a:p>
@@ -384,10 +398,9 @@
           <a:lstStyle/>
           <a:p>
             <a:r>
-              <a:rPr lang="en-US" smtClean="0"/>
+              <a:rPr lang="en-US"/>
               <a:t>Click to edit Master title style</a:t>
             </a:r>
-            <a:endParaRPr lang="en-US"/>
           </a:p>
         </p:txBody>
       </p:sp>
@@ -408,38 +421,37 @@
           <a:p>
             <a:pPr lvl="0"/>
             <a:r>
-              <a:rPr lang="en-US" smtClean="0"/>
+              <a:rPr lang="en-US"/>
               <a:t>Click to edit Master text styles</a:t>
             </a:r>
           </a:p>
           <a:p>
             <a:pPr lvl="1"/>
             <a:r>
-              <a:rPr lang="en-US" smtClean="0"/>
+              <a:rPr lang="en-US"/>
               <a:t>Second level</a:t>
             </a:r>
           </a:p>
           <a:p>
             <a:pPr lvl="2"/>
             <a:r>
-              <a:rPr lang="en-US" smtClean="0"/>
+              <a:rPr lang="en-US"/>
               <a:t>Third level</a:t>
             </a:r>
           </a:p>
           <a:p>
             <a:pPr lvl="3"/>
             <a:r>
-              <a:rPr lang="en-US" smtClean="0"/>
+              <a:rPr lang="en-US"/>
               <a:t>Fourth level</a:t>
             </a:r>
           </a:p>
           <a:p>
             <a:pPr lvl="4"/>
             <a:r>
-              <a:rPr lang="en-US" smtClean="0"/>
+              <a:rPr lang="en-US"/>
               <a:t>Fifth level</a:t>
             </a:r>
-            <a:endParaRPr lang="en-US"/>
           </a:p>
         </p:txBody>
       </p:sp>
@@ -460,7 +472,7 @@
           <a:p>
             <a:fld id="{5BCAD085-E8A6-8845-BD4E-CB4CCA059FC4}" type="datetimeFigureOut">
               <a:rPr lang="en-US" smtClean="0"/>
-              <a:t>1/27/13</a:t>
+              <a:t>2/13/2026</a:t>
             </a:fld>
             <a:endParaRPr lang="en-US"/>
           </a:p>
@@ -559,10 +571,9 @@
           <a:lstStyle/>
           <a:p>
             <a:r>
-              <a:rPr lang="en-US" smtClean="0"/>
+              <a:rPr lang="en-US"/>
               <a:t>Click to edit Master title style</a:t>
             </a:r>
-            <a:endParaRPr lang="en-US"/>
           </a:p>
         </p:txBody>
       </p:sp>
@@ -588,38 +599,37 @@
           <a:p>
             <a:pPr lvl="0"/>
             <a:r>
-              <a:rPr lang="en-US" smtClean="0"/>
+              <a:rPr lang="en-US"/>
               <a:t>Click to edit Master text styles</a:t>
             </a:r>
           </a:p>
           <a:p>
             <a:pPr lvl="1"/>
             <a:r>
-              <a:rPr lang="en-US" smtClean="0"/>
+              <a:rPr lang="en-US"/>
               <a:t>Second level</a:t>
             </a:r>
           </a:p>
           <a:p>
             <a:pPr lvl="2"/>
             <a:r>
-              <a:rPr lang="en-US" smtClean="0"/>
+              <a:rPr lang="en-US"/>
               <a:t>Third level</a:t>
             </a:r>
           </a:p>
           <a:p>
             <a:pPr lvl="3"/>
             <a:r>
-              <a:rPr lang="en-US" smtClean="0"/>
+              <a:rPr lang="en-US"/>
               <a:t>Fourth level</a:t>
             </a:r>
           </a:p>
           <a:p>
             <a:pPr lvl="4"/>
             <a:r>
-              <a:rPr lang="en-US" smtClean="0"/>
+              <a:rPr lang="en-US"/>
               <a:t>Fifth level</a:t>
             </a:r>
-            <a:endParaRPr lang="en-US"/>
           </a:p>
         </p:txBody>
       </p:sp>
@@ -640,7 +650,7 @@
           <a:p>
             <a:fld id="{5BCAD085-E8A6-8845-BD4E-CB4CCA059FC4}" type="datetimeFigureOut">
               <a:rPr lang="en-US" smtClean="0"/>
-              <a:t>1/27/13</a:t>
+              <a:t>2/13/2026</a:t>
             </a:fld>
             <a:endParaRPr lang="en-US"/>
           </a:p>
@@ -734,10 +744,9 @@
           <a:lstStyle/>
           <a:p>
             <a:r>
-              <a:rPr lang="en-US" smtClean="0"/>
+              <a:rPr lang="en-US"/>
               <a:t>Click to edit Master title style</a:t>
             </a:r>
-            <a:endParaRPr lang="en-US"/>
           </a:p>
         </p:txBody>
       </p:sp>
@@ -758,38 +767,37 @@
           <a:p>
             <a:pPr lvl="0"/>
             <a:r>
-              <a:rPr lang="en-US" smtClean="0"/>
+              <a:rPr lang="en-US"/>
               <a:t>Click to edit Master text styles</a:t>
             </a:r>
           </a:p>
           <a:p>
             <a:pPr lvl="1"/>
             <a:r>
-              <a:rPr lang="en-US" smtClean="0"/>
+              <a:rPr lang="en-US"/>
               <a:t>Second level</a:t>
             </a:r>
           </a:p>
           <a:p>
             <a:pPr lvl="2"/>
             <a:r>
-              <a:rPr lang="en-US" smtClean="0"/>
+              <a:rPr lang="en-US"/>
               <a:t>Third level</a:t>
             </a:r>
           </a:p>
           <a:p>
             <a:pPr lvl="3"/>
             <a:r>
-              <a:rPr lang="en-US" smtClean="0"/>
+              <a:rPr lang="en-US"/>
               <a:t>Fourth level</a:t>
             </a:r>
           </a:p>
           <a:p>
             <a:pPr lvl="4"/>
             <a:r>
-              <a:rPr lang="en-US" smtClean="0"/>
+              <a:rPr lang="en-US"/>
               <a:t>Fifth level</a:t>
             </a:r>
-            <a:endParaRPr lang="en-US"/>
           </a:p>
         </p:txBody>
       </p:sp>
@@ -810,7 +818,7 @@
           <a:p>
             <a:fld id="{5BCAD085-E8A6-8845-BD4E-CB4CCA059FC4}" type="datetimeFigureOut">
               <a:rPr lang="en-US" smtClean="0"/>
-              <a:t>1/27/13</a:t>
+              <a:t>2/13/2026</a:t>
             </a:fld>
             <a:endParaRPr lang="en-US"/>
           </a:p>
@@ -913,10 +921,9 @@
           </a:lstStyle>
           <a:p>
             <a:r>
-              <a:rPr lang="en-US" smtClean="0"/>
+              <a:rPr lang="en-US"/>
               <a:t>Click to edit Master title style</a:t>
             </a:r>
-            <a:endParaRPr lang="en-US"/>
           </a:p>
         </p:txBody>
       </p:sp>
@@ -1033,7 +1040,7 @@
           <a:p>
             <a:pPr lvl="0"/>
             <a:r>
-              <a:rPr lang="en-US" smtClean="0"/>
+              <a:rPr lang="en-US"/>
               <a:t>Click to edit Master text styles</a:t>
             </a:r>
           </a:p>
@@ -1056,7 +1063,7 @@
           <a:p>
             <a:fld id="{5BCAD085-E8A6-8845-BD4E-CB4CCA059FC4}" type="datetimeFigureOut">
               <a:rPr lang="en-US" smtClean="0"/>
-              <a:t>1/27/13</a:t>
+              <a:t>2/13/2026</a:t>
             </a:fld>
             <a:endParaRPr lang="en-US"/>
           </a:p>
@@ -1150,10 +1157,9 @@
           <a:lstStyle/>
           <a:p>
             <a:r>
-              <a:rPr lang="en-US" smtClean="0"/>
+              <a:rPr lang="en-US"/>
               <a:t>Click to edit Master title style</a:t>
             </a:r>
-            <a:endParaRPr lang="en-US"/>
           </a:p>
         </p:txBody>
       </p:sp>
@@ -1207,38 +1213,37 @@
           <a:p>
             <a:pPr lvl="0"/>
             <a:r>
-              <a:rPr lang="en-US" smtClean="0"/>
+              <a:rPr lang="en-US"/>
               <a:t>Click to edit Master text styles</a:t>
             </a:r>
           </a:p>
           <a:p>
             <a:pPr lvl="1"/>
             <a:r>
-              <a:rPr lang="en-US" smtClean="0"/>
+              <a:rPr lang="en-US"/>
               <a:t>Second level</a:t>
             </a:r>
           </a:p>
           <a:p>
             <a:pPr lvl="2"/>
             <a:r>
-              <a:rPr lang="en-US" smtClean="0"/>
+              <a:rPr lang="en-US"/>
               <a:t>Third level</a:t>
             </a:r>
           </a:p>
           <a:p>
             <a:pPr lvl="3"/>
             <a:r>
-              <a:rPr lang="en-US" smtClean="0"/>
+              <a:rPr lang="en-US"/>
               <a:t>Fourth level</a:t>
             </a:r>
           </a:p>
           <a:p>
             <a:pPr lvl="4"/>
             <a:r>
-              <a:rPr lang="en-US" smtClean="0"/>
+              <a:rPr lang="en-US"/>
               <a:t>Fifth level</a:t>
             </a:r>
-            <a:endParaRPr lang="en-US"/>
           </a:p>
         </p:txBody>
       </p:sp>
@@ -1292,38 +1297,37 @@
           <a:p>
             <a:pPr lvl="0"/>
             <a:r>
-              <a:rPr lang="en-US" smtClean="0"/>
+              <a:rPr lang="en-US"/>
               <a:t>Click to edit Master text styles</a:t>
             </a:r>
           </a:p>
           <a:p>
             <a:pPr lvl="1"/>
             <a:r>
-              <a:rPr lang="en-US" smtClean="0"/>
+              <a:rPr lang="en-US"/>
               <a:t>Second level</a:t>
             </a:r>
           </a:p>
           <a:p>
             <a:pPr lvl="2"/>
             <a:r>
-              <a:rPr lang="en-US" smtClean="0"/>
+              <a:rPr lang="en-US"/>
               <a:t>Third level</a:t>
             </a:r>
           </a:p>
           <a:p>
             <a:pPr lvl="3"/>
             <a:r>
-              <a:rPr lang="en-US" smtClean="0"/>
+              <a:rPr lang="en-US"/>
               <a:t>Fourth level</a:t>
             </a:r>
           </a:p>
           <a:p>
             <a:pPr lvl="4"/>
             <a:r>
-              <a:rPr lang="en-US" smtClean="0"/>
+              <a:rPr lang="en-US"/>
               <a:t>Fifth level</a:t>
             </a:r>
-            <a:endParaRPr lang="en-US"/>
           </a:p>
         </p:txBody>
       </p:sp>
@@ -1344,7 +1348,7 @@
           <a:p>
             <a:fld id="{5BCAD085-E8A6-8845-BD4E-CB4CCA059FC4}" type="datetimeFigureOut">
               <a:rPr lang="en-US" smtClean="0"/>
-              <a:t>1/27/13</a:t>
+              <a:t>2/13/2026</a:t>
             </a:fld>
             <a:endParaRPr lang="en-US"/>
           </a:p>
@@ -1442,10 +1446,9 @@
           </a:lstStyle>
           <a:p>
             <a:r>
-              <a:rPr lang="en-US" smtClean="0"/>
+              <a:rPr lang="en-US"/>
               <a:t>Click to edit Master title style</a:t>
             </a:r>
-            <a:endParaRPr lang="en-US"/>
           </a:p>
         </p:txBody>
       </p:sp>
@@ -1508,7 +1511,7 @@
           <a:p>
             <a:pPr lvl="0"/>
             <a:r>
-              <a:rPr lang="en-US" smtClean="0"/>
+              <a:rPr lang="en-US"/>
               <a:t>Click to edit Master text styles</a:t>
             </a:r>
           </a:p>
@@ -1564,38 +1567,37 @@
           <a:p>
             <a:pPr lvl="0"/>
             <a:r>
-              <a:rPr lang="en-US" smtClean="0"/>
+              <a:rPr lang="en-US"/>
               <a:t>Click to edit Master text styles</a:t>
             </a:r>
           </a:p>
           <a:p>
             <a:pPr lvl="1"/>
             <a:r>
-              <a:rPr lang="en-US" smtClean="0"/>
+              <a:rPr lang="en-US"/>
               <a:t>Second level</a:t>
             </a:r>
           </a:p>
           <a:p>
             <a:pPr lvl="2"/>
             <a:r>
-              <a:rPr lang="en-US" smtClean="0"/>
+              <a:rPr lang="en-US"/>
               <a:t>Third level</a:t>
             </a:r>
           </a:p>
           <a:p>
             <a:pPr lvl="3"/>
             <a:r>
-              <a:rPr lang="en-US" smtClean="0"/>
+              <a:rPr lang="en-US"/>
               <a:t>Fourth level</a:t>
             </a:r>
           </a:p>
           <a:p>
             <a:pPr lvl="4"/>
             <a:r>
-              <a:rPr lang="en-US" smtClean="0"/>
+              <a:rPr lang="en-US"/>
               <a:t>Fifth level</a:t>
             </a:r>
-            <a:endParaRPr lang="en-US"/>
           </a:p>
         </p:txBody>
       </p:sp>
@@ -1658,7 +1660,7 @@
           <a:p>
             <a:pPr lvl="0"/>
             <a:r>
-              <a:rPr lang="en-US" smtClean="0"/>
+              <a:rPr lang="en-US"/>
               <a:t>Click to edit Master text styles</a:t>
             </a:r>
           </a:p>
@@ -1714,38 +1716,37 @@
           <a:p>
             <a:pPr lvl="0"/>
             <a:r>
-              <a:rPr lang="en-US" smtClean="0"/>
+              <a:rPr lang="en-US"/>
               <a:t>Click to edit Master text styles</a:t>
             </a:r>
           </a:p>
           <a:p>
             <a:pPr lvl="1"/>
             <a:r>
-              <a:rPr lang="en-US" smtClean="0"/>
+              <a:rPr lang="en-US"/>
               <a:t>Second level</a:t>
             </a:r>
           </a:p>
           <a:p>
             <a:pPr lvl="2"/>
             <a:r>
-              <a:rPr lang="en-US" smtClean="0"/>
+              <a:rPr lang="en-US"/>
               <a:t>Third level</a:t>
             </a:r>
           </a:p>
           <a:p>
             <a:pPr lvl="3"/>
             <a:r>
-              <a:rPr lang="en-US" smtClean="0"/>
+              <a:rPr lang="en-US"/>
               <a:t>Fourth level</a:t>
             </a:r>
           </a:p>
           <a:p>
             <a:pPr lvl="4"/>
             <a:r>
-              <a:rPr lang="en-US" smtClean="0"/>
+              <a:rPr lang="en-US"/>
               <a:t>Fifth level</a:t>
             </a:r>
-            <a:endParaRPr lang="en-US"/>
           </a:p>
         </p:txBody>
       </p:sp>
@@ -1766,7 +1767,7 @@
           <a:p>
             <a:fld id="{5BCAD085-E8A6-8845-BD4E-CB4CCA059FC4}" type="datetimeFigureOut">
               <a:rPr lang="en-US" smtClean="0"/>
-              <a:t>1/27/13</a:t>
+              <a:t>2/13/2026</a:t>
             </a:fld>
             <a:endParaRPr lang="en-US"/>
           </a:p>
@@ -1860,10 +1861,9 @@
           <a:lstStyle/>
           <a:p>
             <a:r>
-              <a:rPr lang="en-US" smtClean="0"/>
+              <a:rPr lang="en-US"/>
               <a:t>Click to edit Master title style</a:t>
             </a:r>
-            <a:endParaRPr lang="en-US"/>
           </a:p>
         </p:txBody>
       </p:sp>
@@ -1884,7 +1884,7 @@
           <a:p>
             <a:fld id="{5BCAD085-E8A6-8845-BD4E-CB4CCA059FC4}" type="datetimeFigureOut">
               <a:rPr lang="en-US" smtClean="0"/>
-              <a:t>1/27/13</a:t>
+              <a:t>2/13/2026</a:t>
             </a:fld>
             <a:endParaRPr lang="en-US"/>
           </a:p>
@@ -1979,7 +1979,7 @@
           <a:p>
             <a:fld id="{5BCAD085-E8A6-8845-BD4E-CB4CCA059FC4}" type="datetimeFigureOut">
               <a:rPr lang="en-US" smtClean="0"/>
-              <a:t>1/27/13</a:t>
+              <a:t>2/13/2026</a:t>
             </a:fld>
             <a:endParaRPr lang="en-US"/>
           </a:p>
@@ -2082,10 +2082,9 @@
           </a:lstStyle>
           <a:p>
             <a:r>
-              <a:rPr lang="en-US" smtClean="0"/>
+              <a:rPr lang="en-US"/>
               <a:t>Click to edit Master title style</a:t>
             </a:r>
-            <a:endParaRPr lang="en-US"/>
           </a:p>
         </p:txBody>
       </p:sp>
@@ -2139,38 +2138,37 @@
           <a:p>
             <a:pPr lvl="0"/>
             <a:r>
-              <a:rPr lang="en-US" smtClean="0"/>
+              <a:rPr lang="en-US"/>
               <a:t>Click to edit Master text styles</a:t>
             </a:r>
           </a:p>
           <a:p>
             <a:pPr lvl="1"/>
             <a:r>
-              <a:rPr lang="en-US" smtClean="0"/>
+              <a:rPr lang="en-US"/>
               <a:t>Second level</a:t>
             </a:r>
           </a:p>
           <a:p>
             <a:pPr lvl="2"/>
             <a:r>
-              <a:rPr lang="en-US" smtClean="0"/>
+              <a:rPr lang="en-US"/>
               <a:t>Third level</a:t>
             </a:r>
           </a:p>
           <a:p>
             <a:pPr lvl="3"/>
             <a:r>
-              <a:rPr lang="en-US" smtClean="0"/>
+              <a:rPr lang="en-US"/>
               <a:t>Fourth level</a:t>
             </a:r>
           </a:p>
           <a:p>
             <a:pPr lvl="4"/>
             <a:r>
-              <a:rPr lang="en-US" smtClean="0"/>
+              <a:rPr lang="en-US"/>
               <a:t>Fifth level</a:t>
             </a:r>
-            <a:endParaRPr lang="en-US"/>
           </a:p>
         </p:txBody>
       </p:sp>
@@ -2233,7 +2231,7 @@
           <a:p>
             <a:pPr lvl="0"/>
             <a:r>
-              <a:rPr lang="en-US" smtClean="0"/>
+              <a:rPr lang="en-US"/>
               <a:t>Click to edit Master text styles</a:t>
             </a:r>
           </a:p>
@@ -2256,7 +2254,7 @@
           <a:p>
             <a:fld id="{5BCAD085-E8A6-8845-BD4E-CB4CCA059FC4}" type="datetimeFigureOut">
               <a:rPr lang="en-US" smtClean="0"/>
-              <a:t>1/27/13</a:t>
+              <a:t>2/13/2026</a:t>
             </a:fld>
             <a:endParaRPr lang="en-US"/>
           </a:p>
@@ -2359,10 +2357,9 @@
           </a:lstStyle>
           <a:p>
             <a:r>
-              <a:rPr lang="en-US" smtClean="0"/>
+              <a:rPr lang="en-US"/>
               <a:t>Click to edit Master title style</a:t>
             </a:r>
-            <a:endParaRPr lang="en-US"/>
           </a:p>
         </p:txBody>
       </p:sp>
@@ -2486,7 +2483,7 @@
           <a:p>
             <a:pPr lvl="0"/>
             <a:r>
-              <a:rPr lang="en-US" smtClean="0"/>
+              <a:rPr lang="en-US"/>
               <a:t>Click to edit Master text styles</a:t>
             </a:r>
           </a:p>
@@ -2509,7 +2506,7 @@
           <a:p>
             <a:fld id="{5BCAD085-E8A6-8845-BD4E-CB4CCA059FC4}" type="datetimeFigureOut">
               <a:rPr lang="en-US" smtClean="0"/>
-              <a:t>1/27/13</a:t>
+              <a:t>2/13/2026</a:t>
             </a:fld>
             <a:endParaRPr lang="en-US"/>
           </a:p>
@@ -2618,10 +2615,9 @@
           <a:lstStyle/>
           <a:p>
             <a:r>
-              <a:rPr lang="en-US" smtClean="0"/>
+              <a:rPr lang="en-US"/>
               <a:t>Click to edit Master title style</a:t>
             </a:r>
-            <a:endParaRPr lang="en-US"/>
           </a:p>
         </p:txBody>
       </p:sp>
@@ -2652,38 +2648,37 @@
           <a:p>
             <a:pPr lvl="0"/>
             <a:r>
-              <a:rPr lang="en-US" smtClean="0"/>
+              <a:rPr lang="en-US"/>
               <a:t>Click to edit Master text styles</a:t>
             </a:r>
           </a:p>
           <a:p>
             <a:pPr lvl="1"/>
             <a:r>
-              <a:rPr lang="en-US" smtClean="0"/>
+              <a:rPr lang="en-US"/>
               <a:t>Second level</a:t>
             </a:r>
           </a:p>
           <a:p>
             <a:pPr lvl="2"/>
             <a:r>
-              <a:rPr lang="en-US" smtClean="0"/>
+              <a:rPr lang="en-US"/>
               <a:t>Third level</a:t>
             </a:r>
           </a:p>
           <a:p>
             <a:pPr lvl="3"/>
             <a:r>
-              <a:rPr lang="en-US" smtClean="0"/>
+              <a:rPr lang="en-US"/>
               <a:t>Fourth level</a:t>
             </a:r>
           </a:p>
           <a:p>
             <a:pPr lvl="4"/>
             <a:r>
-              <a:rPr lang="en-US" smtClean="0"/>
+              <a:rPr lang="en-US"/>
               <a:t>Fifth level</a:t>
             </a:r>
-            <a:endParaRPr lang="en-US"/>
           </a:p>
         </p:txBody>
       </p:sp>
@@ -2722,7 +2717,7 @@
           <a:p>
             <a:fld id="{5BCAD085-E8A6-8845-BD4E-CB4CCA059FC4}" type="datetimeFigureOut">
               <a:rPr lang="en-US" smtClean="0"/>
-              <a:t>1/27/13</a:t>
+              <a:t>2/13/2026</a:t>
             </a:fld>
             <a:endParaRPr lang="en-US"/>
           </a:p>
@@ -3081,7 +3076,7 @@
 </file>
 
 <file path=ppt/slides/slide1.xml><?xml version="1.0" encoding="utf-8"?>
-<p:sld xmlns:a="http://schemas.openxmlformats.org/drawingml/2006/main" xmlns:p="http://schemas.openxmlformats.org/presentationml/2006/main" xmlns:r="http://schemas.openxmlformats.org/officeDocument/2006/relationships">
+<p:sld xmlns:a="http://schemas.openxmlformats.org/drawingml/2006/main" xmlns:r="http://schemas.openxmlformats.org/officeDocument/2006/relationships" xmlns:p="http://schemas.openxmlformats.org/presentationml/2006/main">
   <p:cSld>
     <p:bg>
       <p:bgPr>
@@ -3097,7 +3092,14 @@
         <p:cNvGrpSpPr/>
         <p:nvPr/>
       </p:nvGrpSpPr>
-      <p:grpSpPr/>
+      <p:grpSpPr>
+        <a:xfrm>
+          <a:off x="0" y="0"/>
+          <a:ext cx="0" cy="0"/>
+          <a:chOff x="0" y="0"/>
+          <a:chExt cx="0" cy="0"/>
+        </a:xfrm>
+      </p:grpSpPr>
       <p:sp>
         <p:nvSpPr>
           <p:cNvPr id="2" name="Rounded Rectangle 1"/>
@@ -3140,6 +3142,7 @@
           <a:lstStyle/>
           <a:p>
             <a:pPr algn="ctr"/>
+            <a:endParaRPr/>
           </a:p>
         </p:txBody>
       </p:sp>
@@ -3327,6 +3330,7 @@
           <a:lstStyle/>
           <a:p>
             <a:pPr algn="ctr"/>
+            <a:endParaRPr/>
           </a:p>
         </p:txBody>
       </p:sp>
@@ -3408,6 +3412,7 @@
           <a:lstStyle/>
           <a:p>
             <a:pPr algn="ctr"/>
+            <a:endParaRPr/>
           </a:p>
         </p:txBody>
       </p:sp>
@@ -3487,6 +3492,7 @@
           <a:lstStyle/>
           <a:p>
             <a:pPr algn="ctr"/>
+            <a:endParaRPr/>
           </a:p>
         </p:txBody>
       </p:sp>
@@ -3530,6 +3536,7 @@
           <a:lstStyle/>
           <a:p>
             <a:pPr algn="ctr"/>
+            <a:endParaRPr/>
           </a:p>
         </p:txBody>
       </p:sp>
@@ -3575,6 +3582,7 @@
           <a:lstStyle/>
           <a:p>
             <a:pPr algn="ctr"/>
+            <a:endParaRPr/>
           </a:p>
         </p:txBody>
       </p:sp>
@@ -3688,6 +3696,7 @@
           <a:lstStyle/>
           <a:p>
             <a:pPr algn="ctr"/>
+            <a:endParaRPr/>
           </a:p>
         </p:txBody>
       </p:sp>
@@ -3733,6 +3742,7 @@
           <a:lstStyle/>
           <a:p>
             <a:pPr algn="ctr"/>
+            <a:endParaRPr/>
           </a:p>
         </p:txBody>
       </p:sp>
@@ -3846,6 +3856,7 @@
           <a:lstStyle/>
           <a:p>
             <a:pPr algn="ctr"/>
+            <a:endParaRPr/>
           </a:p>
         </p:txBody>
       </p:sp>
@@ -3891,6 +3902,7 @@
           <a:lstStyle/>
           <a:p>
             <a:pPr algn="ctr"/>
+            <a:endParaRPr/>
           </a:p>
         </p:txBody>
       </p:sp>
@@ -4004,6 +4016,7 @@
           <a:lstStyle/>
           <a:p>
             <a:pPr algn="ctr"/>
+            <a:endParaRPr/>
           </a:p>
         </p:txBody>
       </p:sp>
@@ -4049,6 +4062,7 @@
           <a:lstStyle/>
           <a:p>
             <a:pPr algn="ctr"/>
+            <a:endParaRPr/>
           </a:p>
         </p:txBody>
       </p:sp>
@@ -4162,6 +4176,7 @@
           <a:lstStyle/>
           <a:p>
             <a:pPr algn="ctr"/>
+            <a:endParaRPr/>
           </a:p>
         </p:txBody>
       </p:sp>
@@ -4207,6 +4222,7 @@
           <a:lstStyle/>
           <a:p>
             <a:pPr algn="ctr"/>
+            <a:endParaRPr/>
           </a:p>
         </p:txBody>
       </p:sp>
@@ -4320,6 +4336,7 @@
           <a:lstStyle/>
           <a:p>
             <a:pPr algn="ctr"/>
+            <a:endParaRPr/>
           </a:p>
         </p:txBody>
       </p:sp>
@@ -4365,6 +4382,7 @@
           <a:lstStyle/>
           <a:p>
             <a:pPr algn="ctr"/>
+            <a:endParaRPr/>
           </a:p>
         </p:txBody>
       </p:sp>
@@ -4480,6 +4498,7 @@
           <a:lstStyle/>
           <a:p>
             <a:pPr algn="ctr"/>
+            <a:endParaRPr/>
           </a:p>
         </p:txBody>
       </p:sp>
@@ -4559,6 +4578,7 @@
           <a:lstStyle/>
           <a:p>
             <a:pPr algn="ctr"/>
+            <a:endParaRPr/>
           </a:p>
         </p:txBody>
       </p:sp>
@@ -5593,7 +5613,7 @@
 </file>
 
 <file path=ppt/slides/slide2.xml><?xml version="1.0" encoding="utf-8"?>
-<p:sld xmlns:a="http://schemas.openxmlformats.org/drawingml/2006/main" xmlns:p="http://schemas.openxmlformats.org/presentationml/2006/main" xmlns:r="http://schemas.openxmlformats.org/officeDocument/2006/relationships">
+<p:sld xmlns:a="http://schemas.openxmlformats.org/drawingml/2006/main" xmlns:r="http://schemas.openxmlformats.org/officeDocument/2006/relationships" xmlns:p="http://schemas.openxmlformats.org/presentationml/2006/main">
   <p:cSld>
     <p:bg>
       <p:bgPr>
@@ -5609,7 +5629,14 @@
         <p:cNvGrpSpPr/>
         <p:nvPr/>
       </p:nvGrpSpPr>
-      <p:grpSpPr/>
+      <p:grpSpPr>
+        <a:xfrm>
+          <a:off x="0" y="0"/>
+          <a:ext cx="0" cy="0"/>
+          <a:chOff x="0" y="0"/>
+          <a:chExt cx="0" cy="0"/>
+        </a:xfrm>
+      </p:grpSpPr>
       <p:sp>
         <p:nvSpPr>
           <p:cNvPr id="2" name="Rounded Rectangle 1"/>
@@ -5652,6 +5679,7 @@
           <a:lstStyle/>
           <a:p>
             <a:pPr algn="ctr"/>
+            <a:endParaRPr/>
           </a:p>
         </p:txBody>
       </p:sp>
@@ -5839,6 +5867,7 @@
           <a:lstStyle/>
           <a:p>
             <a:pPr algn="ctr"/>
+            <a:endParaRPr/>
           </a:p>
         </p:txBody>
       </p:sp>
@@ -5920,6 +5949,7 @@
           <a:lstStyle/>
           <a:p>
             <a:pPr algn="ctr"/>
+            <a:endParaRPr/>
           </a:p>
         </p:txBody>
       </p:sp>
@@ -5965,6 +5995,7 @@
           <a:lstStyle/>
           <a:p>
             <a:pPr algn="ctr"/>
+            <a:endParaRPr/>
           </a:p>
         </p:txBody>
       </p:sp>
@@ -6101,6 +6132,7 @@
           <a:lstStyle/>
           <a:p>
             <a:pPr algn="ctr"/>
+            <a:endParaRPr/>
           </a:p>
         </p:txBody>
       </p:sp>
@@ -6180,6 +6212,7 @@
           <a:lstStyle/>
           <a:p>
             <a:pPr algn="ctr"/>
+            <a:endParaRPr/>
           </a:p>
         </p:txBody>
       </p:sp>
@@ -6259,6 +6292,7 @@
           <a:lstStyle/>
           <a:p>
             <a:pPr algn="ctr"/>
+            <a:endParaRPr/>
           </a:p>
         </p:txBody>
       </p:sp>
@@ -6338,6 +6372,7 @@
           <a:lstStyle/>
           <a:p>
             <a:pPr algn="ctr"/>
+            <a:endParaRPr/>
           </a:p>
         </p:txBody>
       </p:sp>
@@ -6417,6 +6452,7 @@
           <a:lstStyle/>
           <a:p>
             <a:pPr algn="ctr"/>
+            <a:endParaRPr/>
           </a:p>
         </p:txBody>
       </p:sp>
@@ -6496,6 +6532,7 @@
           <a:lstStyle/>
           <a:p>
             <a:pPr algn="ctr"/>
+            <a:endParaRPr/>
           </a:p>
         </p:txBody>
       </p:sp>
@@ -6575,6 +6612,7 @@
           <a:lstStyle/>
           <a:p>
             <a:pPr algn="ctr"/>
+            <a:endParaRPr/>
           </a:p>
         </p:txBody>
       </p:sp>
@@ -6654,6 +6692,7 @@
           <a:lstStyle/>
           <a:p>
             <a:pPr algn="ctr"/>
+            <a:endParaRPr/>
           </a:p>
         </p:txBody>
       </p:sp>
@@ -6699,6 +6738,7 @@
           <a:lstStyle/>
           <a:p>
             <a:pPr algn="ctr"/>
+            <a:endParaRPr/>
           </a:p>
         </p:txBody>
       </p:sp>
@@ -6744,6 +6784,7 @@
           <a:lstStyle/>
           <a:p>
             <a:pPr algn="ctr"/>
+            <a:endParaRPr/>
           </a:p>
         </p:txBody>
       </p:sp>
@@ -6880,6 +6921,7 @@
           <a:lstStyle/>
           <a:p>
             <a:pPr algn="ctr"/>
+            <a:endParaRPr/>
           </a:p>
         </p:txBody>
       </p:sp>
@@ -6963,6 +7005,7 @@
           <a:lstStyle/>
           <a:p>
             <a:pPr algn="ctr"/>
+            <a:endParaRPr/>
           </a:p>
         </p:txBody>
       </p:sp>
@@ -7042,6 +7085,7 @@
           <a:lstStyle/>
           <a:p>
             <a:pPr algn="ctr"/>
+            <a:endParaRPr/>
           </a:p>
         </p:txBody>
       </p:sp>
@@ -7121,6 +7165,7 @@
           <a:lstStyle/>
           <a:p>
             <a:pPr algn="ctr"/>
+            <a:endParaRPr/>
           </a:p>
         </p:txBody>
       </p:sp>
@@ -7200,6 +7245,7 @@
           <a:lstStyle/>
           <a:p>
             <a:pPr algn="ctr"/>
+            <a:endParaRPr/>
           </a:p>
         </p:txBody>
       </p:sp>
@@ -7279,6 +7325,7 @@
           <a:lstStyle/>
           <a:p>
             <a:pPr algn="ctr"/>
+            <a:endParaRPr/>
           </a:p>
         </p:txBody>
       </p:sp>
@@ -7358,6 +7405,7 @@
           <a:lstStyle/>
           <a:p>
             <a:pPr algn="ctr"/>
+            <a:endParaRPr/>
           </a:p>
         </p:txBody>
       </p:sp>
@@ -7403,6 +7451,7 @@
           <a:lstStyle/>
           <a:p>
             <a:pPr algn="ctr"/>
+            <a:endParaRPr/>
           </a:p>
         </p:txBody>
       </p:sp>
@@ -7448,6 +7497,7 @@
           <a:lstStyle/>
           <a:p>
             <a:pPr algn="ctr"/>
+            <a:endParaRPr/>
           </a:p>
         </p:txBody>
       </p:sp>
@@ -7584,6 +7634,7 @@
           <a:lstStyle/>
           <a:p>
             <a:pPr algn="ctr"/>
+            <a:endParaRPr/>
           </a:p>
         </p:txBody>
       </p:sp>
@@ -7663,6 +7714,7 @@
           <a:lstStyle/>
           <a:p>
             <a:pPr algn="ctr"/>
+            <a:endParaRPr/>
           </a:p>
         </p:txBody>
       </p:sp>
@@ -7742,6 +7794,7 @@
           <a:lstStyle/>
           <a:p>
             <a:pPr algn="ctr"/>
+            <a:endParaRPr/>
           </a:p>
         </p:txBody>
       </p:sp>
@@ -7821,6 +7874,7 @@
           <a:lstStyle/>
           <a:p>
             <a:pPr algn="ctr"/>
+            <a:endParaRPr/>
           </a:p>
         </p:txBody>
       </p:sp>
@@ -7900,6 +7954,7 @@
           <a:lstStyle/>
           <a:p>
             <a:pPr algn="ctr"/>
+            <a:endParaRPr/>
           </a:p>
         </p:txBody>
       </p:sp>
@@ -7979,6 +8034,7 @@
           <a:lstStyle/>
           <a:p>
             <a:pPr algn="ctr"/>
+            <a:endParaRPr/>
           </a:p>
         </p:txBody>
       </p:sp>
@@ -8058,6 +8114,7 @@
           <a:lstStyle/>
           <a:p>
             <a:pPr algn="ctr"/>
+            <a:endParaRPr/>
           </a:p>
         </p:txBody>
       </p:sp>
@@ -8103,6 +8160,7 @@
           <a:lstStyle/>
           <a:p>
             <a:pPr algn="ctr"/>
+            <a:endParaRPr/>
           </a:p>
         </p:txBody>
       </p:sp>
@@ -8148,6 +8206,7 @@
           <a:lstStyle/>
           <a:p>
             <a:pPr algn="ctr"/>
+            <a:endParaRPr/>
           </a:p>
         </p:txBody>
       </p:sp>
@@ -8284,6 +8343,7 @@
           <a:lstStyle/>
           <a:p>
             <a:pPr algn="ctr"/>
+            <a:endParaRPr/>
           </a:p>
         </p:txBody>
       </p:sp>
@@ -8363,6 +8423,7 @@
           <a:lstStyle/>
           <a:p>
             <a:pPr algn="ctr"/>
+            <a:endParaRPr/>
           </a:p>
         </p:txBody>
       </p:sp>
@@ -8442,6 +8503,7 @@
           <a:lstStyle/>
           <a:p>
             <a:pPr algn="ctr"/>
+            <a:endParaRPr/>
           </a:p>
         </p:txBody>
       </p:sp>
@@ -8521,6 +8583,7 @@
           <a:lstStyle/>
           <a:p>
             <a:pPr algn="ctr"/>
+            <a:endParaRPr/>
           </a:p>
         </p:txBody>
       </p:sp>
@@ -8600,6 +8663,7 @@
           <a:lstStyle/>
           <a:p>
             <a:pPr algn="ctr"/>
+            <a:endParaRPr/>
           </a:p>
         </p:txBody>
       </p:sp>
@@ -8679,6 +8743,7 @@
           <a:lstStyle/>
           <a:p>
             <a:pPr algn="ctr"/>
+            <a:endParaRPr/>
           </a:p>
         </p:txBody>
       </p:sp>
@@ -8758,6 +8823,7 @@
           <a:lstStyle/>
           <a:p>
             <a:pPr algn="ctr"/>
+            <a:endParaRPr/>
           </a:p>
         </p:txBody>
       </p:sp>
@@ -8803,6 +8869,7 @@
           <a:lstStyle/>
           <a:p>
             <a:pPr algn="ctr"/>
+            <a:endParaRPr/>
           </a:p>
         </p:txBody>
       </p:sp>
@@ -8848,6 +8915,7 @@
           <a:lstStyle/>
           <a:p>
             <a:pPr algn="ctr"/>
+            <a:endParaRPr/>
           </a:p>
         </p:txBody>
       </p:sp>
@@ -8984,6 +9052,7 @@
           <a:lstStyle/>
           <a:p>
             <a:pPr algn="ctr"/>
+            <a:endParaRPr/>
           </a:p>
         </p:txBody>
       </p:sp>
@@ -9063,6 +9132,7 @@
           <a:lstStyle/>
           <a:p>
             <a:pPr algn="ctr"/>
+            <a:endParaRPr/>
           </a:p>
         </p:txBody>
       </p:sp>
@@ -9142,6 +9212,7 @@
           <a:lstStyle/>
           <a:p>
             <a:pPr algn="ctr"/>
+            <a:endParaRPr/>
           </a:p>
         </p:txBody>
       </p:sp>
@@ -9221,6 +9292,7 @@
           <a:lstStyle/>
           <a:p>
             <a:pPr algn="ctr"/>
+            <a:endParaRPr/>
           </a:p>
         </p:txBody>
       </p:sp>
@@ -9300,6 +9372,7 @@
           <a:lstStyle/>
           <a:p>
             <a:pPr algn="ctr"/>
+            <a:endParaRPr/>
           </a:p>
         </p:txBody>
       </p:sp>
@@ -9379,6 +9452,7 @@
           <a:lstStyle/>
           <a:p>
             <a:pPr algn="ctr"/>
+            <a:endParaRPr/>
           </a:p>
         </p:txBody>
       </p:sp>
@@ -9460,6 +9534,7 @@
           <a:lstStyle/>
           <a:p>
             <a:pPr algn="ctr"/>
+            <a:endParaRPr/>
           </a:p>
         </p:txBody>
       </p:sp>
@@ -9795,7 +9870,7 @@
 </file>
 
 <file path=ppt/slides/slide3.xml><?xml version="1.0" encoding="utf-8"?>
-<p:sld xmlns:a="http://schemas.openxmlformats.org/drawingml/2006/main" xmlns:p="http://schemas.openxmlformats.org/presentationml/2006/main" xmlns:r="http://schemas.openxmlformats.org/officeDocument/2006/relationships">
+<p:sld xmlns:a="http://schemas.openxmlformats.org/drawingml/2006/main" xmlns:r="http://schemas.openxmlformats.org/officeDocument/2006/relationships" xmlns:p="http://schemas.openxmlformats.org/presentationml/2006/main">
   <p:cSld>
     <p:bg>
       <p:bgPr>
@@ -9811,7 +9886,14 @@
         <p:cNvGrpSpPr/>
         <p:nvPr/>
       </p:nvGrpSpPr>
-      <p:grpSpPr/>
+      <p:grpSpPr>
+        <a:xfrm>
+          <a:off x="0" y="0"/>
+          <a:ext cx="0" cy="0"/>
+          <a:chOff x="0" y="0"/>
+          <a:chExt cx="0" cy="0"/>
+        </a:xfrm>
+      </p:grpSpPr>
       <p:sp>
         <p:nvSpPr>
           <p:cNvPr id="2" name="Rounded Rectangle 1"/>
@@ -9854,6 +9936,7 @@
           <a:lstStyle/>
           <a:p>
             <a:pPr algn="ctr"/>
+            <a:endParaRPr/>
           </a:p>
         </p:txBody>
       </p:sp>
@@ -10041,6 +10124,7 @@
           <a:lstStyle/>
           <a:p>
             <a:pPr algn="ctr"/>
+            <a:endParaRPr/>
           </a:p>
         </p:txBody>
       </p:sp>
@@ -10088,7 +10172,7 @@
         </p:nvSpPr>
         <p:spPr>
           <a:xfrm>
-            <a:off x="457200" y="1600200"/>
+            <a:off x="457200" y="1703070"/>
             <a:ext cx="3566160" cy="2788920"/>
           </a:xfrm>
           <a:prstGeom prst="roundRect">
@@ -10122,6 +10206,7 @@
           <a:lstStyle/>
           <a:p>
             <a:pPr algn="ctr"/>
+            <a:endParaRPr/>
           </a:p>
         </p:txBody>
       </p:sp>
@@ -10133,7 +10218,7 @@
         </p:nvSpPr>
         <p:spPr>
           <a:xfrm>
-            <a:off x="457200" y="1600200"/>
+            <a:off x="457200" y="1703070"/>
             <a:ext cx="3566160" cy="411480"/>
           </a:xfrm>
           <a:prstGeom prst="rect">
@@ -10167,6 +10252,7 @@
           <a:lstStyle/>
           <a:p>
             <a:pPr algn="ctr"/>
+            <a:endParaRPr/>
           </a:p>
         </p:txBody>
       </p:sp>
@@ -10178,7 +10264,7 @@
         </p:nvSpPr>
         <p:spPr>
           <a:xfrm>
-            <a:off x="640080" y="1673352"/>
+            <a:off x="640080" y="1776222"/>
             <a:ext cx="3200400" cy="274320"/>
           </a:xfrm>
           <a:prstGeom prst="rect">
@@ -10214,7 +10300,7 @@
         </p:nvSpPr>
         <p:spPr>
           <a:xfrm>
-            <a:off x="640080" y="2103120"/>
+            <a:off x="640080" y="2205990"/>
             <a:ext cx="2068372" cy="228600"/>
           </a:xfrm>
           <a:prstGeom prst="rect">
@@ -10250,7 +10336,7 @@
         </p:nvSpPr>
         <p:spPr>
           <a:xfrm>
-            <a:off x="2311603" y="2103120"/>
+            <a:off x="2311603" y="2205990"/>
             <a:ext cx="1497787" cy="228600"/>
           </a:xfrm>
           <a:prstGeom prst="rect">
@@ -10286,7 +10372,7 @@
         </p:nvSpPr>
         <p:spPr>
           <a:xfrm>
-            <a:off x="640080" y="2350008"/>
+            <a:off x="640080" y="2452878"/>
             <a:ext cx="3200400" cy="4572"/>
           </a:xfrm>
           <a:prstGeom prst="rect">
@@ -10318,6 +10404,7 @@
           <a:lstStyle/>
           <a:p>
             <a:pPr algn="ctr"/>
+            <a:endParaRPr/>
           </a:p>
         </p:txBody>
       </p:sp>
@@ -10329,7 +10416,7 @@
         </p:nvSpPr>
         <p:spPr>
           <a:xfrm>
-            <a:off x="640080" y="2395727"/>
+            <a:off x="640080" y="2498597"/>
             <a:ext cx="2068372" cy="228600"/>
           </a:xfrm>
           <a:prstGeom prst="rect">
@@ -10365,7 +10452,7 @@
         </p:nvSpPr>
         <p:spPr>
           <a:xfrm>
-            <a:off x="2311603" y="2395727"/>
+            <a:off x="2311603" y="2498597"/>
             <a:ext cx="1497787" cy="228600"/>
           </a:xfrm>
           <a:prstGeom prst="rect">
@@ -10401,7 +10488,7 @@
         </p:nvSpPr>
         <p:spPr>
           <a:xfrm>
-            <a:off x="640080" y="2642615"/>
+            <a:off x="640080" y="2745485"/>
             <a:ext cx="3200400" cy="4572"/>
           </a:xfrm>
           <a:prstGeom prst="rect">
@@ -10433,6 +10520,7 @@
           <a:lstStyle/>
           <a:p>
             <a:pPr algn="ctr"/>
+            <a:endParaRPr/>
           </a:p>
         </p:txBody>
       </p:sp>
@@ -10444,7 +10532,7 @@
         </p:nvSpPr>
         <p:spPr>
           <a:xfrm>
-            <a:off x="640080" y="2688335"/>
+            <a:off x="640080" y="2791205"/>
             <a:ext cx="2068372" cy="228600"/>
           </a:xfrm>
           <a:prstGeom prst="rect">
@@ -10480,7 +10568,7 @@
         </p:nvSpPr>
         <p:spPr>
           <a:xfrm>
-            <a:off x="2311603" y="2688335"/>
+            <a:off x="2311603" y="2791205"/>
             <a:ext cx="1497787" cy="228600"/>
           </a:xfrm>
           <a:prstGeom prst="rect">
@@ -10516,7 +10604,7 @@
         </p:nvSpPr>
         <p:spPr>
           <a:xfrm>
-            <a:off x="640080" y="2935223"/>
+            <a:off x="640080" y="3038093"/>
             <a:ext cx="3200400" cy="4572"/>
           </a:xfrm>
           <a:prstGeom prst="rect">
@@ -10548,6 +10636,7 @@
           <a:lstStyle/>
           <a:p>
             <a:pPr algn="ctr"/>
+            <a:endParaRPr/>
           </a:p>
         </p:txBody>
       </p:sp>
@@ -10559,7 +10648,7 @@
         </p:nvSpPr>
         <p:spPr>
           <a:xfrm>
-            <a:off x="640080" y="2980943"/>
+            <a:off x="640080" y="3083813"/>
             <a:ext cx="2068372" cy="228600"/>
           </a:xfrm>
           <a:prstGeom prst="rect">
@@ -10595,7 +10684,7 @@
         </p:nvSpPr>
         <p:spPr>
           <a:xfrm>
-            <a:off x="2311603" y="2980943"/>
+            <a:off x="2311603" y="3083813"/>
             <a:ext cx="1497787" cy="228600"/>
           </a:xfrm>
           <a:prstGeom prst="rect">
@@ -10631,7 +10720,7 @@
         </p:nvSpPr>
         <p:spPr>
           <a:xfrm>
-            <a:off x="640080" y="3227831"/>
+            <a:off x="640080" y="3330701"/>
             <a:ext cx="3200400" cy="4572"/>
           </a:xfrm>
           <a:prstGeom prst="rect">
@@ -10663,6 +10752,7 @@
           <a:lstStyle/>
           <a:p>
             <a:pPr algn="ctr"/>
+            <a:endParaRPr/>
           </a:p>
         </p:txBody>
       </p:sp>
@@ -10674,7 +10764,7 @@
         </p:nvSpPr>
         <p:spPr>
           <a:xfrm>
-            <a:off x="640080" y="3273551"/>
+            <a:off x="640080" y="3376421"/>
             <a:ext cx="2068372" cy="228600"/>
           </a:xfrm>
           <a:prstGeom prst="rect">
@@ -10710,7 +10800,7 @@
         </p:nvSpPr>
         <p:spPr>
           <a:xfrm>
-            <a:off x="2311603" y="3273551"/>
+            <a:off x="2311603" y="3376421"/>
             <a:ext cx="1497787" cy="228600"/>
           </a:xfrm>
           <a:prstGeom prst="rect">
@@ -10746,7 +10836,7 @@
         </p:nvSpPr>
         <p:spPr>
           <a:xfrm>
-            <a:off x="640080" y="3520439"/>
+            <a:off x="640080" y="3623309"/>
             <a:ext cx="3200400" cy="4572"/>
           </a:xfrm>
           <a:prstGeom prst="rect">
@@ -10778,6 +10868,7 @@
           <a:lstStyle/>
           <a:p>
             <a:pPr algn="ctr"/>
+            <a:endParaRPr/>
           </a:p>
         </p:txBody>
       </p:sp>
@@ -10789,7 +10880,7 @@
         </p:nvSpPr>
         <p:spPr>
           <a:xfrm>
-            <a:off x="640080" y="3611879"/>
+            <a:off x="640080" y="3714749"/>
             <a:ext cx="3200400" cy="18288"/>
           </a:xfrm>
           <a:prstGeom prst="rect">
@@ -10821,6 +10912,7 @@
           <a:lstStyle/>
           <a:p>
             <a:pPr algn="ctr"/>
+            <a:endParaRPr/>
           </a:p>
         </p:txBody>
       </p:sp>
@@ -10832,7 +10924,7 @@
         </p:nvSpPr>
         <p:spPr>
           <a:xfrm>
-            <a:off x="640080" y="3685031"/>
+            <a:off x="640080" y="3787901"/>
             <a:ext cx="1783080" cy="274320"/>
           </a:xfrm>
           <a:prstGeom prst="rect">
@@ -10868,7 +10960,7 @@
         </p:nvSpPr>
         <p:spPr>
           <a:xfrm>
-            <a:off x="2061972" y="3685031"/>
+            <a:off x="2061972" y="3787901"/>
             <a:ext cx="1783080" cy="274320"/>
           </a:xfrm>
           <a:prstGeom prst="rect">
@@ -10904,7 +10996,7 @@
         </p:nvSpPr>
         <p:spPr>
           <a:xfrm>
-            <a:off x="4297680" y="1600200"/>
+            <a:off x="4297680" y="1703070"/>
             <a:ext cx="3566160" cy="2788920"/>
           </a:xfrm>
           <a:prstGeom prst="roundRect">
@@ -10938,6 +11030,7 @@
           <a:lstStyle/>
           <a:p>
             <a:pPr algn="ctr"/>
+            <a:endParaRPr/>
           </a:p>
         </p:txBody>
       </p:sp>
@@ -10949,7 +11042,7 @@
         </p:nvSpPr>
         <p:spPr>
           <a:xfrm>
-            <a:off x="4297680" y="1600200"/>
+            <a:off x="4297680" y="1703070"/>
             <a:ext cx="3566160" cy="411480"/>
           </a:xfrm>
           <a:prstGeom prst="rect">
@@ -10983,6 +11076,7 @@
           <a:lstStyle/>
           <a:p>
             <a:pPr algn="ctr"/>
+            <a:endParaRPr/>
           </a:p>
         </p:txBody>
       </p:sp>
@@ -10994,7 +11088,7 @@
         </p:nvSpPr>
         <p:spPr>
           <a:xfrm>
-            <a:off x="4480560" y="1673352"/>
+            <a:off x="4480560" y="1776222"/>
             <a:ext cx="3200400" cy="274320"/>
           </a:xfrm>
           <a:prstGeom prst="rect">
@@ -11030,7 +11124,7 @@
         </p:nvSpPr>
         <p:spPr>
           <a:xfrm>
-            <a:off x="4480560" y="2103120"/>
+            <a:off x="4480560" y="2205990"/>
             <a:ext cx="2068372" cy="228600"/>
           </a:xfrm>
           <a:prstGeom prst="rect">
@@ -11066,7 +11160,7 @@
         </p:nvSpPr>
         <p:spPr>
           <a:xfrm>
-            <a:off x="6152083" y="2103120"/>
+            <a:off x="6152083" y="2205990"/>
             <a:ext cx="1497787" cy="228600"/>
           </a:xfrm>
           <a:prstGeom prst="rect">
@@ -11102,7 +11196,7 @@
         </p:nvSpPr>
         <p:spPr>
           <a:xfrm>
-            <a:off x="4480560" y="2350008"/>
+            <a:off x="4480560" y="2452878"/>
             <a:ext cx="3200400" cy="4572"/>
           </a:xfrm>
           <a:prstGeom prst="rect">
@@ -11134,6 +11228,7 @@
           <a:lstStyle/>
           <a:p>
             <a:pPr algn="ctr"/>
+            <a:endParaRPr/>
           </a:p>
         </p:txBody>
       </p:sp>
@@ -11145,7 +11240,7 @@
         </p:nvSpPr>
         <p:spPr>
           <a:xfrm>
-            <a:off x="4480560" y="2395727"/>
+            <a:off x="4480560" y="2498597"/>
             <a:ext cx="2068372" cy="228600"/>
           </a:xfrm>
           <a:prstGeom prst="rect">
@@ -11181,7 +11276,7 @@
         </p:nvSpPr>
         <p:spPr>
           <a:xfrm>
-            <a:off x="6152083" y="2395727"/>
+            <a:off x="6152083" y="2498597"/>
             <a:ext cx="1497787" cy="228600"/>
           </a:xfrm>
           <a:prstGeom prst="rect">
@@ -11217,7 +11312,7 @@
         </p:nvSpPr>
         <p:spPr>
           <a:xfrm>
-            <a:off x="4480560" y="2642615"/>
+            <a:off x="4480560" y="2745485"/>
             <a:ext cx="3200400" cy="4572"/>
           </a:xfrm>
           <a:prstGeom prst="rect">
@@ -11249,6 +11344,7 @@
           <a:lstStyle/>
           <a:p>
             <a:pPr algn="ctr"/>
+            <a:endParaRPr/>
           </a:p>
         </p:txBody>
       </p:sp>
@@ -11260,7 +11356,7 @@
         </p:nvSpPr>
         <p:spPr>
           <a:xfrm>
-            <a:off x="4480560" y="2688335"/>
+            <a:off x="4480560" y="2791205"/>
             <a:ext cx="2068372" cy="228600"/>
           </a:xfrm>
           <a:prstGeom prst="rect">
@@ -11296,7 +11392,7 @@
         </p:nvSpPr>
         <p:spPr>
           <a:xfrm>
-            <a:off x="6152083" y="2688335"/>
+            <a:off x="6152083" y="2791205"/>
             <a:ext cx="1497787" cy="228600"/>
           </a:xfrm>
           <a:prstGeom prst="rect">
@@ -11332,7 +11428,7 @@
         </p:nvSpPr>
         <p:spPr>
           <a:xfrm>
-            <a:off x="4480560" y="2935223"/>
+            <a:off x="4480560" y="3038093"/>
             <a:ext cx="3200400" cy="4572"/>
           </a:xfrm>
           <a:prstGeom prst="rect">
@@ -11364,6 +11460,7 @@
           <a:lstStyle/>
           <a:p>
             <a:pPr algn="ctr"/>
+            <a:endParaRPr/>
           </a:p>
         </p:txBody>
       </p:sp>
@@ -11375,7 +11472,7 @@
         </p:nvSpPr>
         <p:spPr>
           <a:xfrm>
-            <a:off x="4480560" y="2980943"/>
+            <a:off x="4480560" y="3083813"/>
             <a:ext cx="2068372" cy="228600"/>
           </a:xfrm>
           <a:prstGeom prst="rect">
@@ -11411,7 +11508,7 @@
         </p:nvSpPr>
         <p:spPr>
           <a:xfrm>
-            <a:off x="6152083" y="2980943"/>
+            <a:off x="6152083" y="3083813"/>
             <a:ext cx="1497787" cy="228600"/>
           </a:xfrm>
           <a:prstGeom prst="rect">
@@ -11447,7 +11544,7 @@
         </p:nvSpPr>
         <p:spPr>
           <a:xfrm>
-            <a:off x="4480560" y="3227831"/>
+            <a:off x="4480560" y="3330701"/>
             <a:ext cx="3200400" cy="4572"/>
           </a:xfrm>
           <a:prstGeom prst="rect">
@@ -11479,6 +11576,7 @@
           <a:lstStyle/>
           <a:p>
             <a:pPr algn="ctr"/>
+            <a:endParaRPr/>
           </a:p>
         </p:txBody>
       </p:sp>
@@ -11490,7 +11588,7 @@
         </p:nvSpPr>
         <p:spPr>
           <a:xfrm>
-            <a:off x="4480560" y="3273551"/>
+            <a:off x="4480560" y="3376421"/>
             <a:ext cx="2068372" cy="228600"/>
           </a:xfrm>
           <a:prstGeom prst="rect">
@@ -11526,7 +11624,7 @@
         </p:nvSpPr>
         <p:spPr>
           <a:xfrm>
-            <a:off x="6152083" y="3273551"/>
+            <a:off x="6152083" y="3376421"/>
             <a:ext cx="1497787" cy="228600"/>
           </a:xfrm>
           <a:prstGeom prst="rect">
@@ -11562,7 +11660,7 @@
         </p:nvSpPr>
         <p:spPr>
           <a:xfrm>
-            <a:off x="4480560" y="3520439"/>
+            <a:off x="4480560" y="3623309"/>
             <a:ext cx="3200400" cy="4572"/>
           </a:xfrm>
           <a:prstGeom prst="rect">
@@ -11594,6 +11692,7 @@
           <a:lstStyle/>
           <a:p>
             <a:pPr algn="ctr"/>
+            <a:endParaRPr/>
           </a:p>
         </p:txBody>
       </p:sp>
@@ -11605,7 +11704,7 @@
         </p:nvSpPr>
         <p:spPr>
           <a:xfrm>
-            <a:off x="4480560" y="3566159"/>
+            <a:off x="4480560" y="3669029"/>
             <a:ext cx="2068372" cy="228600"/>
           </a:xfrm>
           <a:prstGeom prst="rect">
@@ -11641,7 +11740,7 @@
         </p:nvSpPr>
         <p:spPr>
           <a:xfrm>
-            <a:off x="6152083" y="3566159"/>
+            <a:off x="6152083" y="3669029"/>
             <a:ext cx="1497787" cy="228600"/>
           </a:xfrm>
           <a:prstGeom prst="rect">
@@ -11677,7 +11776,7 @@
         </p:nvSpPr>
         <p:spPr>
           <a:xfrm>
-            <a:off x="4480560" y="3813047"/>
+            <a:off x="4480560" y="3915917"/>
             <a:ext cx="3200400" cy="4572"/>
           </a:xfrm>
           <a:prstGeom prst="rect">
@@ -11709,6 +11808,7 @@
           <a:lstStyle/>
           <a:p>
             <a:pPr algn="ctr"/>
+            <a:endParaRPr/>
           </a:p>
         </p:txBody>
       </p:sp>
@@ -11720,7 +11820,7 @@
         </p:nvSpPr>
         <p:spPr>
           <a:xfrm>
-            <a:off x="4480560" y="3904487"/>
+            <a:off x="4480560" y="4007357"/>
             <a:ext cx="3200400" cy="18288"/>
           </a:xfrm>
           <a:prstGeom prst="rect">
@@ -11752,6 +11852,7 @@
           <a:lstStyle/>
           <a:p>
             <a:pPr algn="ctr"/>
+            <a:endParaRPr/>
           </a:p>
         </p:txBody>
       </p:sp>
@@ -11763,7 +11864,7 @@
         </p:nvSpPr>
         <p:spPr>
           <a:xfrm>
-            <a:off x="4480560" y="3977639"/>
+            <a:off x="4480560" y="4080509"/>
             <a:ext cx="1783080" cy="274320"/>
           </a:xfrm>
           <a:prstGeom prst="rect">
@@ -11799,7 +11900,7 @@
         </p:nvSpPr>
         <p:spPr>
           <a:xfrm>
-            <a:off x="5902452" y="3977639"/>
+            <a:off x="5902452" y="4080509"/>
             <a:ext cx="1783080" cy="274320"/>
           </a:xfrm>
           <a:prstGeom prst="rect">
@@ -11835,7 +11936,7 @@
         </p:nvSpPr>
         <p:spPr>
           <a:xfrm>
-            <a:off x="8138160" y="1600200"/>
+            <a:off x="8138160" y="1703070"/>
             <a:ext cx="3566160" cy="2788920"/>
           </a:xfrm>
           <a:prstGeom prst="roundRect">
@@ -11869,6 +11970,7 @@
           <a:lstStyle/>
           <a:p>
             <a:pPr algn="ctr"/>
+            <a:endParaRPr/>
           </a:p>
         </p:txBody>
       </p:sp>
@@ -11880,7 +11982,7 @@
         </p:nvSpPr>
         <p:spPr>
           <a:xfrm>
-            <a:off x="8138160" y="1600200"/>
+            <a:off x="8138160" y="1703070"/>
             <a:ext cx="3566160" cy="411480"/>
           </a:xfrm>
           <a:prstGeom prst="rect">
@@ -11914,6 +12016,7 @@
           <a:lstStyle/>
           <a:p>
             <a:pPr algn="ctr"/>
+            <a:endParaRPr/>
           </a:p>
         </p:txBody>
       </p:sp>
@@ -11925,7 +12028,7 @@
         </p:nvSpPr>
         <p:spPr>
           <a:xfrm>
-            <a:off x="8321040" y="1673352"/>
+            <a:off x="8321040" y="1776222"/>
             <a:ext cx="3200400" cy="274320"/>
           </a:xfrm>
           <a:prstGeom prst="rect">
@@ -11961,7 +12064,7 @@
         </p:nvSpPr>
         <p:spPr>
           <a:xfrm>
-            <a:off x="8321040" y="2103120"/>
+            <a:off x="8321040" y="2205990"/>
             <a:ext cx="2068372" cy="228600"/>
           </a:xfrm>
           <a:prstGeom prst="rect">
@@ -11997,7 +12100,7 @@
         </p:nvSpPr>
         <p:spPr>
           <a:xfrm>
-            <a:off x="9992563" y="2103120"/>
+            <a:off x="9992563" y="2205990"/>
             <a:ext cx="1497787" cy="228600"/>
           </a:xfrm>
           <a:prstGeom prst="rect">
@@ -12033,7 +12136,7 @@
         </p:nvSpPr>
         <p:spPr>
           <a:xfrm>
-            <a:off x="8321040" y="2350008"/>
+            <a:off x="8321040" y="2452878"/>
             <a:ext cx="3200400" cy="4572"/>
           </a:xfrm>
           <a:prstGeom prst="rect">
@@ -12065,6 +12168,7 @@
           <a:lstStyle/>
           <a:p>
             <a:pPr algn="ctr"/>
+            <a:endParaRPr/>
           </a:p>
         </p:txBody>
       </p:sp>
@@ -12076,7 +12180,7 @@
         </p:nvSpPr>
         <p:spPr>
           <a:xfrm>
-            <a:off x="8321040" y="2395727"/>
+            <a:off x="8321040" y="2498597"/>
             <a:ext cx="2068372" cy="228600"/>
           </a:xfrm>
           <a:prstGeom prst="rect">
@@ -12112,7 +12216,7 @@
         </p:nvSpPr>
         <p:spPr>
           <a:xfrm>
-            <a:off x="9992563" y="2395727"/>
+            <a:off x="9992563" y="2498597"/>
             <a:ext cx="1497787" cy="228600"/>
           </a:xfrm>
           <a:prstGeom prst="rect">
@@ -12148,7 +12252,7 @@
         </p:nvSpPr>
         <p:spPr>
           <a:xfrm>
-            <a:off x="8321040" y="2642615"/>
+            <a:off x="8321040" y="2745485"/>
             <a:ext cx="3200400" cy="4572"/>
           </a:xfrm>
           <a:prstGeom prst="rect">
@@ -12180,6 +12284,7 @@
           <a:lstStyle/>
           <a:p>
             <a:pPr algn="ctr"/>
+            <a:endParaRPr/>
           </a:p>
         </p:txBody>
       </p:sp>
@@ -12191,7 +12296,7 @@
         </p:nvSpPr>
         <p:spPr>
           <a:xfrm>
-            <a:off x="8321040" y="2688335"/>
+            <a:off x="8321040" y="2791205"/>
             <a:ext cx="2068372" cy="228600"/>
           </a:xfrm>
           <a:prstGeom prst="rect">
@@ -12227,7 +12332,7 @@
         </p:nvSpPr>
         <p:spPr>
           <a:xfrm>
-            <a:off x="9992563" y="2688335"/>
+            <a:off x="9992563" y="2791205"/>
             <a:ext cx="1497787" cy="228600"/>
           </a:xfrm>
           <a:prstGeom prst="rect">
@@ -12263,7 +12368,7 @@
         </p:nvSpPr>
         <p:spPr>
           <a:xfrm>
-            <a:off x="8321040" y="2935223"/>
+            <a:off x="8321040" y="3038093"/>
             <a:ext cx="3200400" cy="4572"/>
           </a:xfrm>
           <a:prstGeom prst="rect">
@@ -12295,6 +12400,7 @@
           <a:lstStyle/>
           <a:p>
             <a:pPr algn="ctr"/>
+            <a:endParaRPr/>
           </a:p>
         </p:txBody>
       </p:sp>
@@ -12306,7 +12412,7 @@
         </p:nvSpPr>
         <p:spPr>
           <a:xfrm>
-            <a:off x="8321040" y="2980943"/>
+            <a:off x="8321040" y="3083813"/>
             <a:ext cx="2068372" cy="228600"/>
           </a:xfrm>
           <a:prstGeom prst="rect">
@@ -12342,7 +12448,7 @@
         </p:nvSpPr>
         <p:spPr>
           <a:xfrm>
-            <a:off x="9992563" y="2980943"/>
+            <a:off x="9992563" y="3083813"/>
             <a:ext cx="1497787" cy="228600"/>
           </a:xfrm>
           <a:prstGeom prst="rect">
@@ -12378,7 +12484,7 @@
         </p:nvSpPr>
         <p:spPr>
           <a:xfrm>
-            <a:off x="8321040" y="3227831"/>
+            <a:off x="8321040" y="3330701"/>
             <a:ext cx="3200400" cy="4572"/>
           </a:xfrm>
           <a:prstGeom prst="rect">
@@ -12410,6 +12516,7 @@
           <a:lstStyle/>
           <a:p>
             <a:pPr algn="ctr"/>
+            <a:endParaRPr/>
           </a:p>
         </p:txBody>
       </p:sp>
@@ -12421,7 +12528,7 @@
         </p:nvSpPr>
         <p:spPr>
           <a:xfrm>
-            <a:off x="8321040" y="3273551"/>
+            <a:off x="8321040" y="3376421"/>
             <a:ext cx="2068372" cy="228600"/>
           </a:xfrm>
           <a:prstGeom prst="rect">
@@ -12457,7 +12564,7 @@
         </p:nvSpPr>
         <p:spPr>
           <a:xfrm>
-            <a:off x="9992563" y="3273551"/>
+            <a:off x="9992563" y="3376421"/>
             <a:ext cx="1497787" cy="228600"/>
           </a:xfrm>
           <a:prstGeom prst="rect">
@@ -12493,7 +12600,7 @@
         </p:nvSpPr>
         <p:spPr>
           <a:xfrm>
-            <a:off x="8321040" y="3520439"/>
+            <a:off x="8321040" y="3623309"/>
             <a:ext cx="3200400" cy="4572"/>
           </a:xfrm>
           <a:prstGeom prst="rect">
@@ -12525,6 +12632,7 @@
           <a:lstStyle/>
           <a:p>
             <a:pPr algn="ctr"/>
+            <a:endParaRPr/>
           </a:p>
         </p:txBody>
       </p:sp>
@@ -12536,7 +12644,7 @@
         </p:nvSpPr>
         <p:spPr>
           <a:xfrm>
-            <a:off x="8321040" y="3611879"/>
+            <a:off x="8321040" y="3714749"/>
             <a:ext cx="3200400" cy="18288"/>
           </a:xfrm>
           <a:prstGeom prst="rect">
@@ -12568,6 +12676,7 @@
           <a:lstStyle/>
           <a:p>
             <a:pPr algn="ctr"/>
+            <a:endParaRPr/>
           </a:p>
         </p:txBody>
       </p:sp>
@@ -12579,7 +12688,7 @@
         </p:nvSpPr>
         <p:spPr>
           <a:xfrm>
-            <a:off x="8321040" y="3685031"/>
+            <a:off x="8321040" y="3787901"/>
             <a:ext cx="1783080" cy="274320"/>
           </a:xfrm>
           <a:prstGeom prst="rect">
@@ -12615,7 +12724,7 @@
         </p:nvSpPr>
         <p:spPr>
           <a:xfrm>
-            <a:off x="9742932" y="3685031"/>
+            <a:off x="9742932" y="3787901"/>
             <a:ext cx="1783080" cy="274320"/>
           </a:xfrm>
           <a:prstGeom prst="rect">
@@ -12651,8 +12760,8 @@
         </p:nvSpPr>
         <p:spPr>
           <a:xfrm>
-            <a:off x="457200" y="4572000"/>
-            <a:ext cx="5303520" cy="1417320"/>
+            <a:off x="457200" y="4697729"/>
+            <a:ext cx="5303520" cy="1618487"/>
           </a:xfrm>
           <a:prstGeom prst="roundRect">
             <a:avLst/>
@@ -12685,6 +12794,7 @@
           <a:lstStyle/>
           <a:p>
             <a:pPr algn="ctr"/>
+            <a:endParaRPr/>
           </a:p>
         </p:txBody>
       </p:sp>
@@ -12696,7 +12806,7 @@
         </p:nvSpPr>
         <p:spPr>
           <a:xfrm>
-            <a:off x="457200" y="4572000"/>
+            <a:off x="457200" y="4697730"/>
             <a:ext cx="5303520" cy="411480"/>
           </a:xfrm>
           <a:prstGeom prst="rect">
@@ -12730,6 +12840,7 @@
           <a:lstStyle/>
           <a:p>
             <a:pPr algn="ctr"/>
+            <a:endParaRPr/>
           </a:p>
         </p:txBody>
       </p:sp>
@@ -12741,7 +12852,7 @@
         </p:nvSpPr>
         <p:spPr>
           <a:xfrm>
-            <a:off x="640080" y="4645152"/>
+            <a:off x="640080" y="4770882"/>
             <a:ext cx="4937759" cy="274320"/>
           </a:xfrm>
           <a:prstGeom prst="rect">
@@ -12777,7 +12888,7 @@
         </p:nvSpPr>
         <p:spPr>
           <a:xfrm>
-            <a:off x="640080" y="5074920"/>
+            <a:off x="640080" y="5200650"/>
             <a:ext cx="3076041" cy="228600"/>
           </a:xfrm>
           <a:prstGeom prst="rect">
@@ -12813,7 +12924,7 @@
         </p:nvSpPr>
         <p:spPr>
           <a:xfrm>
-            <a:off x="3215030" y="5074920"/>
+            <a:off x="3215030" y="5200650"/>
             <a:ext cx="2227478" cy="228600"/>
           </a:xfrm>
           <a:prstGeom prst="rect">
@@ -12849,7 +12960,7 @@
         </p:nvSpPr>
         <p:spPr>
           <a:xfrm>
-            <a:off x="640080" y="5321808"/>
+            <a:off x="640080" y="5447538"/>
             <a:ext cx="4937759" cy="4572"/>
           </a:xfrm>
           <a:prstGeom prst="rect">
@@ -12881,6 +12992,7 @@
           <a:lstStyle/>
           <a:p>
             <a:pPr algn="ctr"/>
+            <a:endParaRPr/>
           </a:p>
         </p:txBody>
       </p:sp>
@@ -12892,7 +13004,7 @@
         </p:nvSpPr>
         <p:spPr>
           <a:xfrm>
-            <a:off x="640080" y="5367528"/>
+            <a:off x="640080" y="5493258"/>
             <a:ext cx="3076041" cy="228600"/>
           </a:xfrm>
           <a:prstGeom prst="rect">
@@ -12928,7 +13040,7 @@
         </p:nvSpPr>
         <p:spPr>
           <a:xfrm>
-            <a:off x="3215030" y="5367528"/>
+            <a:off x="3215030" y="5493258"/>
             <a:ext cx="2227478" cy="228600"/>
           </a:xfrm>
           <a:prstGeom prst="rect">
@@ -12964,7 +13076,7 @@
         </p:nvSpPr>
         <p:spPr>
           <a:xfrm>
-            <a:off x="640080" y="5614416"/>
+            <a:off x="640080" y="5740146"/>
             <a:ext cx="4937759" cy="4572"/>
           </a:xfrm>
           <a:prstGeom prst="rect">
@@ -12996,6 +13108,7 @@
           <a:lstStyle/>
           <a:p>
             <a:pPr algn="ctr"/>
+            <a:endParaRPr/>
           </a:p>
         </p:txBody>
       </p:sp>
@@ -13007,7 +13120,7 @@
         </p:nvSpPr>
         <p:spPr>
           <a:xfrm>
-            <a:off x="640080" y="5705856"/>
+            <a:off x="640080" y="5831586"/>
             <a:ext cx="4937759" cy="18288"/>
           </a:xfrm>
           <a:prstGeom prst="rect">
@@ -13039,6 +13152,7 @@
           <a:lstStyle/>
           <a:p>
             <a:pPr algn="ctr"/>
+            <a:endParaRPr/>
           </a:p>
         </p:txBody>
       </p:sp>
@@ -13050,7 +13164,7 @@
         </p:nvSpPr>
         <p:spPr>
           <a:xfrm>
-            <a:off x="640080" y="5779008"/>
+            <a:off x="640080" y="5904738"/>
             <a:ext cx="2651760" cy="274320"/>
           </a:xfrm>
           <a:prstGeom prst="rect">
@@ -13073,6 +13187,7 @@
               </a:defRPr>
             </a:pPr>
             <a:r>
+              <a:rPr dirty="0"/>
               <a:t>POC Total Investment</a:t>
             </a:r>
           </a:p>
@@ -13086,7 +13201,7 @@
         </p:nvSpPr>
         <p:spPr>
           <a:xfrm>
-            <a:off x="2843784" y="5779008"/>
+            <a:off x="2843784" y="5904738"/>
             <a:ext cx="2651760" cy="274320"/>
           </a:xfrm>
           <a:prstGeom prst="rect">
@@ -13122,8 +13237,8 @@
         </p:nvSpPr>
         <p:spPr>
           <a:xfrm>
-            <a:off x="6035040" y="4572000"/>
-            <a:ext cx="5669280" cy="1417320"/>
+            <a:off x="6035040" y="4697730"/>
+            <a:ext cx="5669280" cy="1618486"/>
           </a:xfrm>
           <a:prstGeom prst="roundRect">
             <a:avLst/>
@@ -13156,6 +13271,7 @@
           <a:lstStyle/>
           <a:p>
             <a:pPr algn="ctr"/>
+            <a:endParaRPr/>
           </a:p>
         </p:txBody>
       </p:sp>
@@ -13167,7 +13283,7 @@
         </p:nvSpPr>
         <p:spPr>
           <a:xfrm>
-            <a:off x="6035040" y="4572000"/>
+            <a:off x="6035040" y="4697730"/>
             <a:ext cx="5669280" cy="365760"/>
           </a:xfrm>
           <a:prstGeom prst="rect">
@@ -13201,6 +13317,7 @@
           <a:lstStyle/>
           <a:p>
             <a:pPr algn="ctr"/>
+            <a:endParaRPr/>
           </a:p>
         </p:txBody>
       </p:sp>
@@ -13212,7 +13329,7 @@
         </p:nvSpPr>
         <p:spPr>
           <a:xfrm>
-            <a:off x="6263640" y="4636008"/>
+            <a:off x="6263640" y="4761738"/>
             <a:ext cx="4572000" cy="256032"/>
           </a:xfrm>
           <a:prstGeom prst="rect">
@@ -13248,7 +13365,7 @@
         </p:nvSpPr>
         <p:spPr>
           <a:xfrm>
-            <a:off x="6309360" y="5056632"/>
+            <a:off x="6309360" y="5182362"/>
             <a:ext cx="45720" cy="45720"/>
           </a:xfrm>
           <a:prstGeom prst="ellipse">
@@ -13280,6 +13397,7 @@
           <a:lstStyle/>
           <a:p>
             <a:pPr algn="ctr"/>
+            <a:endParaRPr/>
           </a:p>
         </p:txBody>
       </p:sp>
@@ -13291,7 +13409,7 @@
         </p:nvSpPr>
         <p:spPr>
           <a:xfrm>
-            <a:off x="6446520" y="5010912"/>
+            <a:off x="6446520" y="5136642"/>
             <a:ext cx="5029200" cy="182880"/>
           </a:xfrm>
           <a:prstGeom prst="rect">
@@ -13327,7 +13445,7 @@
         </p:nvSpPr>
         <p:spPr>
           <a:xfrm>
-            <a:off x="6309360" y="5239512"/>
+            <a:off x="6309360" y="5365242"/>
             <a:ext cx="45720" cy="45720"/>
           </a:xfrm>
           <a:prstGeom prst="ellipse">
@@ -13359,6 +13477,7 @@
           <a:lstStyle/>
           <a:p>
             <a:pPr algn="ctr"/>
+            <a:endParaRPr/>
           </a:p>
         </p:txBody>
       </p:sp>
@@ -13370,7 +13489,7 @@
         </p:nvSpPr>
         <p:spPr>
           <a:xfrm>
-            <a:off x="6446520" y="5193792"/>
+            <a:off x="6446520" y="5319522"/>
             <a:ext cx="5029200" cy="182880"/>
           </a:xfrm>
           <a:prstGeom prst="rect">
@@ -13406,7 +13525,7 @@
         </p:nvSpPr>
         <p:spPr>
           <a:xfrm>
-            <a:off x="6309360" y="5422392"/>
+            <a:off x="6309360" y="5548122"/>
             <a:ext cx="45720" cy="45720"/>
           </a:xfrm>
           <a:prstGeom prst="ellipse">
@@ -13438,6 +13557,7 @@
           <a:lstStyle/>
           <a:p>
             <a:pPr algn="ctr"/>
+            <a:endParaRPr/>
           </a:p>
         </p:txBody>
       </p:sp>
@@ -13449,7 +13569,7 @@
         </p:nvSpPr>
         <p:spPr>
           <a:xfrm>
-            <a:off x="6446520" y="5376672"/>
+            <a:off x="6446520" y="5502402"/>
             <a:ext cx="5029200" cy="182880"/>
           </a:xfrm>
           <a:prstGeom prst="rect">
@@ -13485,7 +13605,7 @@
         </p:nvSpPr>
         <p:spPr>
           <a:xfrm>
-            <a:off x="6309360" y="5605272"/>
+            <a:off x="6309360" y="5731002"/>
             <a:ext cx="45720" cy="45720"/>
           </a:xfrm>
           <a:prstGeom prst="ellipse">
@@ -13517,6 +13637,7 @@
           <a:lstStyle/>
           <a:p>
             <a:pPr algn="ctr"/>
+            <a:endParaRPr/>
           </a:p>
         </p:txBody>
       </p:sp>
@@ -13528,7 +13649,7 @@
         </p:nvSpPr>
         <p:spPr>
           <a:xfrm>
-            <a:off x="6446520" y="5559552"/>
+            <a:off x="6446520" y="5685282"/>
             <a:ext cx="5029200" cy="182880"/>
           </a:xfrm>
           <a:prstGeom prst="rect">
@@ -13564,7 +13685,7 @@
         </p:nvSpPr>
         <p:spPr>
           <a:xfrm>
-            <a:off x="6309360" y="5788152"/>
+            <a:off x="6309360" y="5913882"/>
             <a:ext cx="45720" cy="45720"/>
           </a:xfrm>
           <a:prstGeom prst="ellipse">
@@ -13596,6 +13717,7 @@
           <a:lstStyle/>
           <a:p>
             <a:pPr algn="ctr"/>
+            <a:endParaRPr/>
           </a:p>
         </p:txBody>
       </p:sp>
@@ -13607,7 +13729,7 @@
         </p:nvSpPr>
         <p:spPr>
           <a:xfrm>
-            <a:off x="6446520" y="5742432"/>
+            <a:off x="6446520" y="5868162"/>
             <a:ext cx="5029200" cy="182880"/>
           </a:xfrm>
           <a:prstGeom prst="rect">

--- a/DAK_POC_Proposal_v2.pptx
+++ b/DAK_POC_Proposal_v2.pptx
@@ -2,8 +2,11 @@
 <file path=ppt/presentation.xml><?xml version="1.0" encoding="utf-8"?>
 <p:presentation xmlns:a="http://schemas.openxmlformats.org/drawingml/2006/main" xmlns:r="http://schemas.openxmlformats.org/officeDocument/2006/relationships" xmlns:p="http://schemas.openxmlformats.org/presentationml/2006/main" saveSubsetFonts="1" autoCompressPictures="0">
   <p:sldMasterIdLst>
-    <p:sldMasterId id="2147483648" r:id="rId1"/>
+    <p:sldMasterId id="2147483660" r:id="rId1"/>
   </p:sldMasterIdLst>
+  <p:notesMasterIdLst>
+    <p:notesMasterId r:id="rId5"/>
+  </p:notesMasterIdLst>
   <p:sldIdLst>
     <p:sldId id="256" r:id="rId2"/>
     <p:sldId id="257" r:id="rId3"/>
@@ -125,9 +128,14 @@
 </p:presentation>
 </file>
 
-<file path=ppt/slideLayouts/slideLayout1.xml><?xml version="1.0" encoding="utf-8"?>
-<p:sldLayout xmlns:a="http://schemas.openxmlformats.org/drawingml/2006/main" xmlns:r="http://schemas.openxmlformats.org/officeDocument/2006/relationships" xmlns:p="http://schemas.openxmlformats.org/presentationml/2006/main" type="title" preserve="1">
-  <p:cSld name="Title Slide">
+<file path=ppt/notesMasters/notesMaster1.xml><?xml version="1.0" encoding="utf-8"?>
+<p:notesMaster xmlns:a="http://schemas.openxmlformats.org/drawingml/2006/main" xmlns:r="http://schemas.openxmlformats.org/officeDocument/2006/relationships" xmlns:p="http://schemas.openxmlformats.org/presentationml/2006/main">
+  <p:cSld>
+    <p:bg>
+      <p:bgRef idx="1001">
+        <a:schemeClr val="bg1"/>
+      </p:bgRef>
+    </p:bg>
     <p:spTree>
       <p:nvGrpSpPr>
         <p:cNvPr id="1" name=""/>
@@ -144,6 +152,444 @@
       </p:grpSpPr>
       <p:sp>
         <p:nvSpPr>
+          <p:cNvPr id="2" name="Header Placeholder 1"/>
+          <p:cNvSpPr>
+            <a:spLocks noGrp="1"/>
+          </p:cNvSpPr>
+          <p:nvPr>
+            <p:ph type="hdr" sz="quarter"/>
+          </p:nvPr>
+        </p:nvSpPr>
+        <p:spPr>
+          <a:xfrm>
+            <a:off x="0" y="0"/>
+            <a:ext cx="2971800" cy="458788"/>
+          </a:xfrm>
+          <a:prstGeom prst="rect">
+            <a:avLst/>
+          </a:prstGeom>
+        </p:spPr>
+        <p:txBody>
+          <a:bodyPr vert="horz" lIns="91440" tIns="45720" rIns="91440" bIns="45720" rtlCol="0"/>
+          <a:lstStyle>
+            <a:lvl1pPr algn="l">
+              <a:defRPr sz="1200"/>
+            </a:lvl1pPr>
+          </a:lstStyle>
+          <a:p>
+            <a:endParaRPr lang="en-US"/>
+          </a:p>
+        </p:txBody>
+      </p:sp>
+      <p:sp>
+        <p:nvSpPr>
+          <p:cNvPr id="3" name="Date Placeholder 2"/>
+          <p:cNvSpPr>
+            <a:spLocks noGrp="1"/>
+          </p:cNvSpPr>
+          <p:nvPr>
+            <p:ph type="dt" idx="1"/>
+          </p:nvPr>
+        </p:nvSpPr>
+        <p:spPr>
+          <a:xfrm>
+            <a:off x="3884613" y="0"/>
+            <a:ext cx="2971800" cy="458788"/>
+          </a:xfrm>
+          <a:prstGeom prst="rect">
+            <a:avLst/>
+          </a:prstGeom>
+        </p:spPr>
+        <p:txBody>
+          <a:bodyPr vert="horz" lIns="91440" tIns="45720" rIns="91440" bIns="45720" rtlCol="0"/>
+          <a:lstStyle>
+            <a:lvl1pPr algn="r">
+              <a:defRPr sz="1200"/>
+            </a:lvl1pPr>
+          </a:lstStyle>
+          <a:p>
+            <a:fld id="{93200999-A28B-4417-ACCF-DD8E6C06F459}" type="datetimeFigureOut">
+              <a:rPr lang="en-US" smtClean="0"/>
+              <a:t>2/14/2026</a:t>
+            </a:fld>
+            <a:endParaRPr lang="en-US"/>
+          </a:p>
+        </p:txBody>
+      </p:sp>
+      <p:sp>
+        <p:nvSpPr>
+          <p:cNvPr id="4" name="Slide Image Placeholder 3"/>
+          <p:cNvSpPr>
+            <a:spLocks noGrp="1" noRot="1" noChangeAspect="1"/>
+          </p:cNvSpPr>
+          <p:nvPr>
+            <p:ph type="sldImg" idx="2"/>
+          </p:nvPr>
+        </p:nvSpPr>
+        <p:spPr>
+          <a:xfrm>
+            <a:off x="685800" y="1143000"/>
+            <a:ext cx="5486400" cy="3086100"/>
+          </a:xfrm>
+          <a:prstGeom prst="rect">
+            <a:avLst/>
+          </a:prstGeom>
+          <a:noFill/>
+          <a:ln w="12700">
+            <a:solidFill>
+              <a:prstClr val="black"/>
+            </a:solidFill>
+          </a:ln>
+        </p:spPr>
+        <p:txBody>
+          <a:bodyPr vert="horz" lIns="91440" tIns="45720" rIns="91440" bIns="45720" rtlCol="0" anchor="ctr"/>
+          <a:lstStyle/>
+          <a:p>
+            <a:endParaRPr lang="en-US"/>
+          </a:p>
+        </p:txBody>
+      </p:sp>
+      <p:sp>
+        <p:nvSpPr>
+          <p:cNvPr id="5" name="Notes Placeholder 4"/>
+          <p:cNvSpPr>
+            <a:spLocks noGrp="1"/>
+          </p:cNvSpPr>
+          <p:nvPr>
+            <p:ph type="body" sz="quarter" idx="3"/>
+          </p:nvPr>
+        </p:nvSpPr>
+        <p:spPr>
+          <a:xfrm>
+            <a:off x="685800" y="4400550"/>
+            <a:ext cx="5486400" cy="3600450"/>
+          </a:xfrm>
+          <a:prstGeom prst="rect">
+            <a:avLst/>
+          </a:prstGeom>
+        </p:spPr>
+        <p:txBody>
+          <a:bodyPr vert="horz" lIns="91440" tIns="45720" rIns="91440" bIns="45720" rtlCol="0"/>
+          <a:lstStyle/>
+          <a:p>
+            <a:pPr lvl="0"/>
+            <a:r>
+              <a:rPr lang="en-US"/>
+              <a:t>Click to edit Master text styles</a:t>
+            </a:r>
+          </a:p>
+          <a:p>
+            <a:pPr lvl="1"/>
+            <a:r>
+              <a:rPr lang="en-US"/>
+              <a:t>Second level</a:t>
+            </a:r>
+          </a:p>
+          <a:p>
+            <a:pPr lvl="2"/>
+            <a:r>
+              <a:rPr lang="en-US"/>
+              <a:t>Third level</a:t>
+            </a:r>
+          </a:p>
+          <a:p>
+            <a:pPr lvl="3"/>
+            <a:r>
+              <a:rPr lang="en-US"/>
+              <a:t>Fourth level</a:t>
+            </a:r>
+          </a:p>
+          <a:p>
+            <a:pPr lvl="4"/>
+            <a:r>
+              <a:rPr lang="en-US"/>
+              <a:t>Fifth level</a:t>
+            </a:r>
+          </a:p>
+        </p:txBody>
+      </p:sp>
+      <p:sp>
+        <p:nvSpPr>
+          <p:cNvPr id="6" name="Footer Placeholder 5"/>
+          <p:cNvSpPr>
+            <a:spLocks noGrp="1"/>
+          </p:cNvSpPr>
+          <p:nvPr>
+            <p:ph type="ftr" sz="quarter" idx="4"/>
+          </p:nvPr>
+        </p:nvSpPr>
+        <p:spPr>
+          <a:xfrm>
+            <a:off x="0" y="8685213"/>
+            <a:ext cx="2971800" cy="458787"/>
+          </a:xfrm>
+          <a:prstGeom prst="rect">
+            <a:avLst/>
+          </a:prstGeom>
+        </p:spPr>
+        <p:txBody>
+          <a:bodyPr vert="horz" lIns="91440" tIns="45720" rIns="91440" bIns="45720" rtlCol="0" anchor="b"/>
+          <a:lstStyle>
+            <a:lvl1pPr algn="l">
+              <a:defRPr sz="1200"/>
+            </a:lvl1pPr>
+          </a:lstStyle>
+          <a:p>
+            <a:endParaRPr lang="en-US"/>
+          </a:p>
+        </p:txBody>
+      </p:sp>
+      <p:sp>
+        <p:nvSpPr>
+          <p:cNvPr id="7" name="Slide Number Placeholder 6"/>
+          <p:cNvSpPr>
+            <a:spLocks noGrp="1"/>
+          </p:cNvSpPr>
+          <p:nvPr>
+            <p:ph type="sldNum" sz="quarter" idx="5"/>
+          </p:nvPr>
+        </p:nvSpPr>
+        <p:spPr>
+          <a:xfrm>
+            <a:off x="3884613" y="8685213"/>
+            <a:ext cx="2971800" cy="458787"/>
+          </a:xfrm>
+          <a:prstGeom prst="rect">
+            <a:avLst/>
+          </a:prstGeom>
+        </p:spPr>
+        <p:txBody>
+          <a:bodyPr vert="horz" lIns="91440" tIns="45720" rIns="91440" bIns="45720" rtlCol="0" anchor="b"/>
+          <a:lstStyle>
+            <a:lvl1pPr algn="r">
+              <a:defRPr sz="1200"/>
+            </a:lvl1pPr>
+          </a:lstStyle>
+          <a:p>
+            <a:fld id="{A629E13E-9BC9-4C15-A308-78BD5A5D6C1E}" type="slidenum">
+              <a:rPr lang="en-US" smtClean="0"/>
+              <a:t>‹#›</a:t>
+            </a:fld>
+            <a:endParaRPr lang="en-US"/>
+          </a:p>
+        </p:txBody>
+      </p:sp>
+    </p:spTree>
+    <p:extLst>
+      <p:ext uri="{BB962C8B-B14F-4D97-AF65-F5344CB8AC3E}">
+        <p14:creationId xmlns:p14="http://schemas.microsoft.com/office/powerpoint/2010/main" val="3954962744"/>
+      </p:ext>
+    </p:extLst>
+  </p:cSld>
+  <p:clrMap bg1="lt1" tx1="dk1" bg2="lt2" tx2="dk2" accent1="accent1" accent2="accent2" accent3="accent3" accent4="accent4" accent5="accent5" accent6="accent6" hlink="hlink" folHlink="folHlink"/>
+  <p:notesStyle>
+    <a:lvl1pPr marL="0" algn="l" defTabSz="914400" rtl="0" eaLnBrk="1" latinLnBrk="0" hangingPunct="1">
+      <a:defRPr sz="1200" kern="1200">
+        <a:solidFill>
+          <a:schemeClr val="tx1"/>
+        </a:solidFill>
+        <a:latin typeface="+mn-lt"/>
+        <a:ea typeface="+mn-ea"/>
+        <a:cs typeface="+mn-cs"/>
+      </a:defRPr>
+    </a:lvl1pPr>
+    <a:lvl2pPr marL="457200" algn="l" defTabSz="914400" rtl="0" eaLnBrk="1" latinLnBrk="0" hangingPunct="1">
+      <a:defRPr sz="1200" kern="1200">
+        <a:solidFill>
+          <a:schemeClr val="tx1"/>
+        </a:solidFill>
+        <a:latin typeface="+mn-lt"/>
+        <a:ea typeface="+mn-ea"/>
+        <a:cs typeface="+mn-cs"/>
+      </a:defRPr>
+    </a:lvl2pPr>
+    <a:lvl3pPr marL="914400" algn="l" defTabSz="914400" rtl="0" eaLnBrk="1" latinLnBrk="0" hangingPunct="1">
+      <a:defRPr sz="1200" kern="1200">
+        <a:solidFill>
+          <a:schemeClr val="tx1"/>
+        </a:solidFill>
+        <a:latin typeface="+mn-lt"/>
+        <a:ea typeface="+mn-ea"/>
+        <a:cs typeface="+mn-cs"/>
+      </a:defRPr>
+    </a:lvl3pPr>
+    <a:lvl4pPr marL="1371600" algn="l" defTabSz="914400" rtl="0" eaLnBrk="1" latinLnBrk="0" hangingPunct="1">
+      <a:defRPr sz="1200" kern="1200">
+        <a:solidFill>
+          <a:schemeClr val="tx1"/>
+        </a:solidFill>
+        <a:latin typeface="+mn-lt"/>
+        <a:ea typeface="+mn-ea"/>
+        <a:cs typeface="+mn-cs"/>
+      </a:defRPr>
+    </a:lvl4pPr>
+    <a:lvl5pPr marL="1828800" algn="l" defTabSz="914400" rtl="0" eaLnBrk="1" latinLnBrk="0" hangingPunct="1">
+      <a:defRPr sz="1200" kern="1200">
+        <a:solidFill>
+          <a:schemeClr val="tx1"/>
+        </a:solidFill>
+        <a:latin typeface="+mn-lt"/>
+        <a:ea typeface="+mn-ea"/>
+        <a:cs typeface="+mn-cs"/>
+      </a:defRPr>
+    </a:lvl5pPr>
+    <a:lvl6pPr marL="2286000" algn="l" defTabSz="914400" rtl="0" eaLnBrk="1" latinLnBrk="0" hangingPunct="1">
+      <a:defRPr sz="1200" kern="1200">
+        <a:solidFill>
+          <a:schemeClr val="tx1"/>
+        </a:solidFill>
+        <a:latin typeface="+mn-lt"/>
+        <a:ea typeface="+mn-ea"/>
+        <a:cs typeface="+mn-cs"/>
+      </a:defRPr>
+    </a:lvl6pPr>
+    <a:lvl7pPr marL="2743200" algn="l" defTabSz="914400" rtl="0" eaLnBrk="1" latinLnBrk="0" hangingPunct="1">
+      <a:defRPr sz="1200" kern="1200">
+        <a:solidFill>
+          <a:schemeClr val="tx1"/>
+        </a:solidFill>
+        <a:latin typeface="+mn-lt"/>
+        <a:ea typeface="+mn-ea"/>
+        <a:cs typeface="+mn-cs"/>
+      </a:defRPr>
+    </a:lvl7pPr>
+    <a:lvl8pPr marL="3200400" algn="l" defTabSz="914400" rtl="0" eaLnBrk="1" latinLnBrk="0" hangingPunct="1">
+      <a:defRPr sz="1200" kern="1200">
+        <a:solidFill>
+          <a:schemeClr val="tx1"/>
+        </a:solidFill>
+        <a:latin typeface="+mn-lt"/>
+        <a:ea typeface="+mn-ea"/>
+        <a:cs typeface="+mn-cs"/>
+      </a:defRPr>
+    </a:lvl8pPr>
+    <a:lvl9pPr marL="3657600" algn="l" defTabSz="914400" rtl="0" eaLnBrk="1" latinLnBrk="0" hangingPunct="1">
+      <a:defRPr sz="1200" kern="1200">
+        <a:solidFill>
+          <a:schemeClr val="tx1"/>
+        </a:solidFill>
+        <a:latin typeface="+mn-lt"/>
+        <a:ea typeface="+mn-ea"/>
+        <a:cs typeface="+mn-cs"/>
+      </a:defRPr>
+    </a:lvl9pPr>
+  </p:notesStyle>
+</p:notesMaster>
+</file>
+
+<file path=ppt/notesSlides/notesSlide1.xml><?xml version="1.0" encoding="utf-8"?>
+<p:notes xmlns:a="http://schemas.openxmlformats.org/drawingml/2006/main" xmlns:r="http://schemas.openxmlformats.org/officeDocument/2006/relationships" xmlns:p="http://schemas.openxmlformats.org/presentationml/2006/main">
+  <p:cSld>
+    <p:spTree>
+      <p:nvGrpSpPr>
+        <p:cNvPr id="1" name=""/>
+        <p:cNvGrpSpPr/>
+        <p:nvPr/>
+      </p:nvGrpSpPr>
+      <p:grpSpPr>
+        <a:xfrm>
+          <a:off x="0" y="0"/>
+          <a:ext cx="0" cy="0"/>
+          <a:chOff x="0" y="0"/>
+          <a:chExt cx="0" cy="0"/>
+        </a:xfrm>
+      </p:grpSpPr>
+      <p:sp>
+        <p:nvSpPr>
+          <p:cNvPr id="2" name="Slide Image Placeholder 1"/>
+          <p:cNvSpPr>
+            <a:spLocks noGrp="1" noRot="1" noChangeAspect="1"/>
+          </p:cNvSpPr>
+          <p:nvPr>
+            <p:ph type="sldImg"/>
+          </p:nvPr>
+        </p:nvSpPr>
+        <p:spPr/>
+      </p:sp>
+      <p:sp>
+        <p:nvSpPr>
+          <p:cNvPr id="3" name="Notes Placeholder 2"/>
+          <p:cNvSpPr>
+            <a:spLocks noGrp="1"/>
+          </p:cNvSpPr>
+          <p:nvPr>
+            <p:ph type="body" idx="1"/>
+          </p:nvPr>
+        </p:nvSpPr>
+        <p:spPr/>
+        <p:txBody>
+          <a:bodyPr/>
+          <a:lstStyle/>
+          <a:p>
+            <a:endParaRPr lang="en-US" dirty="0"/>
+          </a:p>
+        </p:txBody>
+      </p:sp>
+      <p:sp>
+        <p:nvSpPr>
+          <p:cNvPr id="4" name="Slide Number Placeholder 3"/>
+          <p:cNvSpPr>
+            <a:spLocks noGrp="1"/>
+          </p:cNvSpPr>
+          <p:nvPr>
+            <p:ph type="sldNum" sz="quarter" idx="5"/>
+          </p:nvPr>
+        </p:nvSpPr>
+        <p:spPr/>
+        <p:txBody>
+          <a:bodyPr/>
+          <a:lstStyle/>
+          <a:p>
+            <a:fld id="{A629E13E-9BC9-4C15-A308-78BD5A5D6C1E}" type="slidenum">
+              <a:rPr lang="en-US" smtClean="0"/>
+              <a:t>2</a:t>
+            </a:fld>
+            <a:endParaRPr lang="en-US"/>
+          </a:p>
+        </p:txBody>
+      </p:sp>
+    </p:spTree>
+    <p:extLst>
+      <p:ext uri="{BB962C8B-B14F-4D97-AF65-F5344CB8AC3E}">
+        <p14:creationId xmlns:p14="http://schemas.microsoft.com/office/powerpoint/2010/main" val="657464411"/>
+      </p:ext>
+    </p:extLst>
+  </p:cSld>
+  <p:clrMapOvr>
+    <a:masterClrMapping/>
+  </p:clrMapOvr>
+</p:notes>
+</file>
+
+<file path=ppt/slideLayouts/slideLayout1.xml><?xml version="1.0" encoding="utf-8"?>
+<p:sldLayout xmlns:a="http://schemas.openxmlformats.org/drawingml/2006/main" xmlns:r="http://schemas.openxmlformats.org/officeDocument/2006/relationships" xmlns:p="http://schemas.openxmlformats.org/presentationml/2006/main" showMasterSp="0" type="title" preserve="1">
+  <p:cSld name="Title Slide">
+    <p:bg>
+      <p:bgPr>
+        <a:solidFill>
+          <a:schemeClr val="bg2">
+            <a:lumMod val="75000"/>
+          </a:schemeClr>
+        </a:solidFill>
+        <a:effectLst/>
+      </p:bgPr>
+    </p:bg>
+    <p:spTree>
+      <p:nvGrpSpPr>
+        <p:cNvPr id="1" name=""/>
+        <p:cNvGrpSpPr/>
+        <p:nvPr/>
+      </p:nvGrpSpPr>
+      <p:grpSpPr>
+        <a:xfrm>
+          <a:off x="0" y="0"/>
+          <a:ext cx="0" cy="0"/>
+          <a:chOff x="0" y="0"/>
+          <a:chExt cx="0" cy="0"/>
+        </a:xfrm>
+      </p:grpSpPr>
+      <p:sp>
+        <p:nvSpPr>
           <p:cNvPr id="2" name="Title 1"/>
           <p:cNvSpPr>
             <a:spLocks noGrp="1"/>
@@ -154,18 +600,32 @@
         </p:nvSpPr>
         <p:spPr>
           <a:xfrm>
-            <a:off x="685800" y="2130425"/>
-            <a:ext cx="7772400" cy="1470025"/>
-          </a:xfrm>
-        </p:spPr>
-        <p:txBody>
-          <a:bodyPr/>
-          <a:lstStyle/>
+            <a:off x="1261872" y="758952"/>
+            <a:ext cx="9418320" cy="4041648"/>
+          </a:xfrm>
+        </p:spPr>
+        <p:txBody>
+          <a:bodyPr anchor="b">
+            <a:normAutofit/>
+          </a:bodyPr>
+          <a:lstStyle>
+            <a:lvl1pPr algn="l">
+              <a:lnSpc>
+                <a:spcPct val="85000"/>
+              </a:lnSpc>
+              <a:defRPr sz="7200" baseline="0">
+                <a:solidFill>
+                  <a:schemeClr val="tx1"/>
+                </a:solidFill>
+              </a:defRPr>
+            </a:lvl1pPr>
+          </a:lstStyle>
           <a:p>
             <a:r>
               <a:rPr lang="en-US"/>
               <a:t>Click to edit Master title style</a:t>
             </a:r>
+            <a:endParaRPr lang="en-US" dirty="0"/>
           </a:p>
         </p:txBody>
       </p:sp>
@@ -181,102 +641,56 @@
         </p:nvSpPr>
         <p:spPr>
           <a:xfrm>
-            <a:off x="1371600" y="3886200"/>
-            <a:ext cx="6400800" cy="1752600"/>
-          </a:xfrm>
-        </p:spPr>
-        <p:txBody>
-          <a:bodyPr/>
+            <a:off x="1261872" y="4800600"/>
+            <a:ext cx="9418320" cy="1691640"/>
+          </a:xfrm>
+        </p:spPr>
+        <p:txBody>
+          <a:bodyPr>
+            <a:normAutofit/>
+          </a:bodyPr>
           <a:lstStyle>
-            <a:lvl1pPr marL="0" indent="0" algn="ctr">
+            <a:lvl1pPr marL="0" indent="0" algn="l">
               <a:buNone/>
-              <a:defRPr>
+              <a:defRPr sz="2200" baseline="0">
                 <a:solidFill>
                   <a:schemeClr val="tx1">
-                    <a:tint val="75000"/>
+                    <a:lumMod val="75000"/>
                   </a:schemeClr>
                 </a:solidFill>
               </a:defRPr>
             </a:lvl1pPr>
             <a:lvl2pPr marL="457200" indent="0" algn="ctr">
               <a:buNone/>
-              <a:defRPr>
-                <a:solidFill>
-                  <a:schemeClr val="tx1">
-                    <a:tint val="75000"/>
-                  </a:schemeClr>
-                </a:solidFill>
-              </a:defRPr>
+              <a:defRPr sz="2200"/>
             </a:lvl2pPr>
             <a:lvl3pPr marL="914400" indent="0" algn="ctr">
               <a:buNone/>
-              <a:defRPr>
-                <a:solidFill>
-                  <a:schemeClr val="tx1">
-                    <a:tint val="75000"/>
-                  </a:schemeClr>
-                </a:solidFill>
-              </a:defRPr>
+              <a:defRPr sz="2200"/>
             </a:lvl3pPr>
             <a:lvl4pPr marL="1371600" indent="0" algn="ctr">
               <a:buNone/>
-              <a:defRPr>
-                <a:solidFill>
-                  <a:schemeClr val="tx1">
-                    <a:tint val="75000"/>
-                  </a:schemeClr>
-                </a:solidFill>
-              </a:defRPr>
+              <a:defRPr sz="2000"/>
             </a:lvl4pPr>
             <a:lvl5pPr marL="1828800" indent="0" algn="ctr">
               <a:buNone/>
-              <a:defRPr>
-                <a:solidFill>
-                  <a:schemeClr val="tx1">
-                    <a:tint val="75000"/>
-                  </a:schemeClr>
-                </a:solidFill>
-              </a:defRPr>
+              <a:defRPr sz="2000"/>
             </a:lvl5pPr>
             <a:lvl6pPr marL="2286000" indent="0" algn="ctr">
               <a:buNone/>
-              <a:defRPr>
-                <a:solidFill>
-                  <a:schemeClr val="tx1">
-                    <a:tint val="75000"/>
-                  </a:schemeClr>
-                </a:solidFill>
-              </a:defRPr>
+              <a:defRPr sz="2000"/>
             </a:lvl6pPr>
             <a:lvl7pPr marL="2743200" indent="0" algn="ctr">
               <a:buNone/>
-              <a:defRPr>
-                <a:solidFill>
-                  <a:schemeClr val="tx1">
-                    <a:tint val="75000"/>
-                  </a:schemeClr>
-                </a:solidFill>
-              </a:defRPr>
+              <a:defRPr sz="2000"/>
             </a:lvl7pPr>
             <a:lvl8pPr marL="3200400" indent="0" algn="ctr">
               <a:buNone/>
-              <a:defRPr>
-                <a:solidFill>
-                  <a:schemeClr val="tx1">
-                    <a:tint val="75000"/>
-                  </a:schemeClr>
-                </a:solidFill>
-              </a:defRPr>
+              <a:defRPr sz="2000"/>
             </a:lvl8pPr>
             <a:lvl9pPr marL="3657600" indent="0" algn="ctr">
               <a:buNone/>
-              <a:defRPr>
-                <a:solidFill>
-                  <a:schemeClr val="tx1">
-                    <a:tint val="75000"/>
-                  </a:schemeClr>
-                </a:solidFill>
-              </a:defRPr>
+              <a:defRPr sz="2000"/>
             </a:lvl9pPr>
           </a:lstStyle>
           <a:p>
@@ -284,6 +698,7 @@
               <a:rPr lang="en-US"/>
               <a:t>Click to edit Master subtitle style</a:t>
             </a:r>
+            <a:endParaRPr lang="en-US" dirty="0"/>
           </a:p>
         </p:txBody>
       </p:sp>
@@ -300,11 +715,21 @@
         <p:spPr/>
         <p:txBody>
           <a:bodyPr/>
-          <a:lstStyle/>
+          <a:lstStyle>
+            <a:lvl1pPr>
+              <a:defRPr>
+                <a:solidFill>
+                  <a:schemeClr val="tx1">
+                    <a:lumMod val="50000"/>
+                  </a:schemeClr>
+                </a:solidFill>
+              </a:defRPr>
+            </a:lvl1pPr>
+          </a:lstStyle>
           <a:p>
             <a:fld id="{5BCAD085-E8A6-8845-BD4E-CB4CCA059FC4}" type="datetimeFigureOut">
               <a:rPr lang="en-US" smtClean="0"/>
-              <a:t>2/13/2026</a:t>
+              <a:t>2/14/2026</a:t>
             </a:fld>
             <a:endParaRPr lang="en-US"/>
           </a:p>
@@ -323,7 +748,17 @@
         <p:spPr/>
         <p:txBody>
           <a:bodyPr/>
-          <a:lstStyle/>
+          <a:lstStyle>
+            <a:lvl1pPr>
+              <a:defRPr>
+                <a:solidFill>
+                  <a:schemeClr val="tx1">
+                    <a:lumMod val="65000"/>
+                  </a:schemeClr>
+                </a:solidFill>
+              </a:defRPr>
+            </a:lvl1pPr>
+          </a:lstStyle>
           <a:p>
             <a:endParaRPr lang="en-US"/>
           </a:p>
@@ -342,7 +777,17 @@
         <p:spPr/>
         <p:txBody>
           <a:bodyPr/>
-          <a:lstStyle/>
+          <a:lstStyle>
+            <a:lvl1pPr>
+              <a:defRPr>
+                <a:solidFill>
+                  <a:schemeClr val="tx1">
+                    <a:lumMod val="65000"/>
+                  </a:schemeClr>
+                </a:solidFill>
+              </a:defRPr>
+            </a:lvl1pPr>
+          </a:lstStyle>
           <a:p>
             <a:fld id="{C1FF6DA9-008F-8B48-92A6-B652298478BF}" type="slidenum">
               <a:rPr lang="en-US" smtClean="0"/>
@@ -352,15 +797,53 @@
           </a:p>
         </p:txBody>
       </p:sp>
+      <p:sp>
+        <p:nvSpPr>
+          <p:cNvPr id="7" name="Rectangle 6"/>
+          <p:cNvSpPr/>
+          <p:nvPr/>
+        </p:nvSpPr>
+        <p:spPr>
+          <a:xfrm>
+            <a:off x="0" y="0"/>
+            <a:ext cx="457200" cy="6858000"/>
+          </a:xfrm>
+          <a:prstGeom prst="rect">
+            <a:avLst/>
+          </a:prstGeom>
+          <a:solidFill>
+            <a:schemeClr val="accent1"/>
+          </a:solidFill>
+          <a:ln>
+            <a:noFill/>
+          </a:ln>
+        </p:spPr>
+        <p:style>
+          <a:lnRef idx="2">
+            <a:schemeClr val="accent1">
+              <a:shade val="50000"/>
+            </a:schemeClr>
+          </a:lnRef>
+          <a:fillRef idx="1">
+            <a:schemeClr val="accent1"/>
+          </a:fillRef>
+          <a:effectRef idx="0">
+            <a:schemeClr val="accent1"/>
+          </a:effectRef>
+          <a:fontRef idx="minor">
+            <a:schemeClr val="lt1"/>
+          </a:fontRef>
+        </p:style>
+      </p:sp>
     </p:spTree>
     <p:extLst>
       <p:ext uri="{BB962C8B-B14F-4D97-AF65-F5344CB8AC3E}">
-        <p14:creationId xmlns:p14="http://schemas.microsoft.com/office/powerpoint/2010/main" val="3168075583"/>
+        <p14:creationId xmlns:p14="http://schemas.microsoft.com/office/powerpoint/2010/main" val="401954109"/>
       </p:ext>
     </p:extLst>
   </p:cSld>
   <p:clrMapOvr>
-    <a:masterClrMapping/>
+    <a:overrideClrMapping bg1="dk1" tx1="lt1" bg2="dk2" tx2="lt2" accent1="accent1" accent2="accent2" accent3="accent3" accent4="accent4" accent5="accent5" accent6="accent6" hlink="hlink" folHlink="folHlink"/>
   </p:clrMapOvr>
 </p:sldLayout>
 </file>
@@ -401,6 +884,7 @@
               <a:rPr lang="en-US"/>
               <a:t>Click to edit Master title style</a:t>
             </a:r>
+            <a:endParaRPr lang="en-US" dirty="0"/>
           </a:p>
         </p:txBody>
       </p:sp>
@@ -452,6 +936,7 @@
               <a:rPr lang="en-US"/>
               <a:t>Fifth level</a:t>
             </a:r>
+            <a:endParaRPr lang="en-US" dirty="0"/>
           </a:p>
         </p:txBody>
       </p:sp>
@@ -472,7 +957,7 @@
           <a:p>
             <a:fld id="{5BCAD085-E8A6-8845-BD4E-CB4CCA059FC4}" type="datetimeFigureOut">
               <a:rPr lang="en-US" smtClean="0"/>
-              <a:t>2/13/2026</a:t>
+              <a:t>2/14/2026</a:t>
             </a:fld>
             <a:endParaRPr lang="en-US"/>
           </a:p>
@@ -523,7 +1008,7 @@
     </p:spTree>
     <p:extLst>
       <p:ext uri="{BB962C8B-B14F-4D97-AF65-F5344CB8AC3E}">
-        <p14:creationId xmlns:p14="http://schemas.microsoft.com/office/powerpoint/2010/main" val="2910927964"/>
+        <p14:creationId xmlns:p14="http://schemas.microsoft.com/office/powerpoint/2010/main" val="3794502346"/>
       </p:ext>
     </p:extLst>
   </p:cSld>
@@ -562,8 +1047,8 @@
         </p:nvSpPr>
         <p:spPr>
           <a:xfrm>
-            <a:off x="6629400" y="274638"/>
-            <a:ext cx="2057400" cy="5851525"/>
+            <a:off x="8648700" y="381000"/>
+            <a:ext cx="2476500" cy="5897562"/>
           </a:xfrm>
         </p:spPr>
         <p:txBody>
@@ -574,6 +1059,7 @@
               <a:rPr lang="en-US"/>
               <a:t>Click to edit Master title style</a:t>
             </a:r>
+            <a:endParaRPr lang="en-US" dirty="0"/>
           </a:p>
         </p:txBody>
       </p:sp>
@@ -589,8 +1075,8 @@
         </p:nvSpPr>
         <p:spPr>
           <a:xfrm>
-            <a:off x="457200" y="274638"/>
-            <a:ext cx="6019800" cy="5851525"/>
+            <a:off x="762000" y="381000"/>
+            <a:ext cx="7734300" cy="5897562"/>
           </a:xfrm>
         </p:spPr>
         <p:txBody>
@@ -630,6 +1116,7 @@
               <a:rPr lang="en-US"/>
               <a:t>Fifth level</a:t>
             </a:r>
+            <a:endParaRPr lang="en-US" dirty="0"/>
           </a:p>
         </p:txBody>
       </p:sp>
@@ -650,7 +1137,7 @@
           <a:p>
             <a:fld id="{5BCAD085-E8A6-8845-BD4E-CB4CCA059FC4}" type="datetimeFigureOut">
               <a:rPr lang="en-US" smtClean="0"/>
-              <a:t>2/13/2026</a:t>
+              <a:t>2/14/2026</a:t>
             </a:fld>
             <a:endParaRPr lang="en-US"/>
           </a:p>
@@ -701,7 +1188,7 @@
     </p:spTree>
     <p:extLst>
       <p:ext uri="{BB962C8B-B14F-4D97-AF65-F5344CB8AC3E}">
-        <p14:creationId xmlns:p14="http://schemas.microsoft.com/office/powerpoint/2010/main" val="3612223792"/>
+        <p14:creationId xmlns:p14="http://schemas.microsoft.com/office/powerpoint/2010/main" val="714998393"/>
       </p:ext>
     </p:extLst>
   </p:cSld>
@@ -747,6 +1234,7 @@
               <a:rPr lang="en-US"/>
               <a:t>Click to edit Master title style</a:t>
             </a:r>
+            <a:endParaRPr lang="en-US" dirty="0"/>
           </a:p>
         </p:txBody>
       </p:sp>
@@ -798,6 +1286,7 @@
               <a:rPr lang="en-US"/>
               <a:t>Fifth level</a:t>
             </a:r>
+            <a:endParaRPr lang="en-US" dirty="0"/>
           </a:p>
         </p:txBody>
       </p:sp>
@@ -818,7 +1307,7 @@
           <a:p>
             <a:fld id="{5BCAD085-E8A6-8845-BD4E-CB4CCA059FC4}" type="datetimeFigureOut">
               <a:rPr lang="en-US" smtClean="0"/>
-              <a:t>2/13/2026</a:t>
+              <a:t>2/14/2026</a:t>
             </a:fld>
             <a:endParaRPr lang="en-US"/>
           </a:p>
@@ -869,7 +1358,7 @@
     </p:spTree>
     <p:extLst>
       <p:ext uri="{BB962C8B-B14F-4D97-AF65-F5344CB8AC3E}">
-        <p14:creationId xmlns:p14="http://schemas.microsoft.com/office/powerpoint/2010/main" val="2614314258"/>
+        <p14:creationId xmlns:p14="http://schemas.microsoft.com/office/powerpoint/2010/main" val="535735182"/>
       </p:ext>
     </p:extLst>
   </p:cSld>
@@ -908,15 +1397,20 @@
         </p:nvSpPr>
         <p:spPr>
           <a:xfrm>
-            <a:off x="722313" y="4406900"/>
-            <a:ext cx="7772400" cy="1362075"/>
-          </a:xfrm>
-        </p:spPr>
-        <p:txBody>
-          <a:bodyPr anchor="t"/>
+            <a:off x="1261872" y="758952"/>
+            <a:ext cx="9418320" cy="4041648"/>
+          </a:xfrm>
+        </p:spPr>
+        <p:txBody>
+          <a:bodyPr anchor="b">
+            <a:normAutofit/>
+          </a:bodyPr>
           <a:lstStyle>
-            <a:lvl1pPr algn="l">
-              <a:defRPr sz="4000" b="1" cap="all"/>
+            <a:lvl1pPr>
+              <a:lnSpc>
+                <a:spcPct val="85000"/>
+              </a:lnSpc>
+              <a:defRPr sz="7200" b="0"/>
             </a:lvl1pPr>
           </a:lstStyle>
           <a:p>
@@ -924,6 +1418,7 @@
               <a:rPr lang="en-US"/>
               <a:t>Click to edit Master title style</a:t>
             </a:r>
+            <a:endParaRPr lang="en-US" dirty="0"/>
           </a:p>
         </p:txBody>
       </p:sp>
@@ -939,19 +1434,22 @@
         </p:nvSpPr>
         <p:spPr>
           <a:xfrm>
-            <a:off x="722313" y="2906713"/>
-            <a:ext cx="7772400" cy="1500187"/>
-          </a:xfrm>
-        </p:spPr>
-        <p:txBody>
-          <a:bodyPr anchor="b"/>
+            <a:off x="1261872" y="4800600"/>
+            <a:ext cx="9418320" cy="1691640"/>
+          </a:xfrm>
+        </p:spPr>
+        <p:txBody>
+          <a:bodyPr anchor="t">
+            <a:normAutofit/>
+          </a:bodyPr>
           <a:lstStyle>
             <a:lvl1pPr marL="0" indent="0">
               <a:buNone/>
-              <a:defRPr sz="2000">
+              <a:defRPr sz="2200">
                 <a:solidFill>
                   <a:schemeClr val="tx1">
-                    <a:tint val="75000"/>
+                    <a:lumMod val="65000"/>
+                    <a:lumOff val="35000"/>
                   </a:schemeClr>
                 </a:solidFill>
               </a:defRPr>
@@ -1063,7 +1561,7 @@
           <a:p>
             <a:fld id="{5BCAD085-E8A6-8845-BD4E-CB4CCA059FC4}" type="datetimeFigureOut">
               <a:rPr lang="en-US" smtClean="0"/>
-              <a:t>2/13/2026</a:t>
+              <a:t>2/14/2026</a:t>
             </a:fld>
             <a:endParaRPr lang="en-US"/>
           </a:p>
@@ -1111,10 +1609,48 @@
           </a:p>
         </p:txBody>
       </p:sp>
+      <p:sp>
+        <p:nvSpPr>
+          <p:cNvPr id="7" name="Rectangle 6"/>
+          <p:cNvSpPr/>
+          <p:nvPr/>
+        </p:nvSpPr>
+        <p:spPr>
+          <a:xfrm>
+            <a:off x="0" y="0"/>
+            <a:ext cx="457200" cy="6858000"/>
+          </a:xfrm>
+          <a:prstGeom prst="rect">
+            <a:avLst/>
+          </a:prstGeom>
+          <a:solidFill>
+            <a:schemeClr val="accent1"/>
+          </a:solidFill>
+          <a:ln>
+            <a:noFill/>
+          </a:ln>
+        </p:spPr>
+        <p:style>
+          <a:lnRef idx="2">
+            <a:schemeClr val="accent1">
+              <a:shade val="50000"/>
+            </a:schemeClr>
+          </a:lnRef>
+          <a:fillRef idx="1">
+            <a:schemeClr val="accent1"/>
+          </a:fillRef>
+          <a:effectRef idx="0">
+            <a:schemeClr val="accent1"/>
+          </a:effectRef>
+          <a:fontRef idx="minor">
+            <a:schemeClr val="lt1"/>
+          </a:fontRef>
+        </p:style>
+      </p:sp>
     </p:spTree>
     <p:extLst>
       <p:ext uri="{BB962C8B-B14F-4D97-AF65-F5344CB8AC3E}">
-        <p14:creationId xmlns:p14="http://schemas.microsoft.com/office/powerpoint/2010/main" val="960648375"/>
+        <p14:creationId xmlns:p14="http://schemas.microsoft.com/office/powerpoint/2010/main" val="1459121049"/>
       </p:ext>
     </p:extLst>
   </p:cSld>
@@ -1160,6 +1696,7 @@
               <a:rPr lang="en-US"/>
               <a:t>Click to edit Master title style</a:t>
             </a:r>
+            <a:endParaRPr lang="en-US" dirty="0"/>
           </a:p>
         </p:txBody>
       </p:sp>
@@ -1175,39 +1712,39 @@
         </p:nvSpPr>
         <p:spPr>
           <a:xfrm>
-            <a:off x="457200" y="1600200"/>
-            <a:ext cx="4038600" cy="4525963"/>
+            <a:off x="1261872" y="1828800"/>
+            <a:ext cx="4480560" cy="4351337"/>
           </a:xfrm>
         </p:spPr>
         <p:txBody>
           <a:bodyPr/>
           <a:lstStyle>
             <a:lvl1pPr>
-              <a:defRPr sz="2800"/>
+              <a:defRPr sz="1800"/>
             </a:lvl1pPr>
             <a:lvl2pPr>
-              <a:defRPr sz="2400"/>
+              <a:defRPr sz="1600"/>
             </a:lvl2pPr>
             <a:lvl3pPr>
-              <a:defRPr sz="2000"/>
+              <a:defRPr sz="1400"/>
             </a:lvl3pPr>
             <a:lvl4pPr>
-              <a:defRPr sz="1800"/>
+              <a:defRPr sz="1400"/>
             </a:lvl4pPr>
             <a:lvl5pPr>
-              <a:defRPr sz="1800"/>
+              <a:defRPr sz="1400"/>
             </a:lvl5pPr>
             <a:lvl6pPr>
-              <a:defRPr sz="1800"/>
+              <a:defRPr sz="1400"/>
             </a:lvl6pPr>
             <a:lvl7pPr>
-              <a:defRPr sz="1800"/>
+              <a:defRPr sz="1400"/>
             </a:lvl7pPr>
             <a:lvl8pPr>
-              <a:defRPr sz="1800"/>
+              <a:defRPr sz="1400"/>
             </a:lvl8pPr>
             <a:lvl9pPr>
-              <a:defRPr sz="1800"/>
+              <a:defRPr sz="1400"/>
             </a:lvl9pPr>
           </a:lstStyle>
           <a:p>
@@ -1244,6 +1781,7 @@
               <a:rPr lang="en-US"/>
               <a:t>Fifth level</a:t>
             </a:r>
+            <a:endParaRPr lang="en-US" dirty="0"/>
           </a:p>
         </p:txBody>
       </p:sp>
@@ -1259,39 +1797,39 @@
         </p:nvSpPr>
         <p:spPr>
           <a:xfrm>
-            <a:off x="4648200" y="1600200"/>
-            <a:ext cx="4038600" cy="4525963"/>
+            <a:off x="6126480" y="1828800"/>
+            <a:ext cx="4480560" cy="4351337"/>
           </a:xfrm>
         </p:spPr>
         <p:txBody>
           <a:bodyPr/>
           <a:lstStyle>
             <a:lvl1pPr>
-              <a:defRPr sz="2800"/>
+              <a:defRPr sz="1800"/>
             </a:lvl1pPr>
             <a:lvl2pPr>
-              <a:defRPr sz="2400"/>
+              <a:defRPr sz="1600"/>
             </a:lvl2pPr>
             <a:lvl3pPr>
-              <a:defRPr sz="2000"/>
+              <a:defRPr sz="1400"/>
             </a:lvl3pPr>
             <a:lvl4pPr>
-              <a:defRPr sz="1800"/>
+              <a:defRPr sz="1400"/>
             </a:lvl4pPr>
             <a:lvl5pPr>
-              <a:defRPr sz="1800"/>
+              <a:defRPr sz="1400"/>
             </a:lvl5pPr>
             <a:lvl6pPr>
-              <a:defRPr sz="1800"/>
+              <a:defRPr sz="1400"/>
             </a:lvl6pPr>
             <a:lvl7pPr>
-              <a:defRPr sz="1800"/>
+              <a:defRPr sz="1400"/>
             </a:lvl7pPr>
             <a:lvl8pPr>
-              <a:defRPr sz="1800"/>
+              <a:defRPr sz="1400"/>
             </a:lvl8pPr>
             <a:lvl9pPr>
-              <a:defRPr sz="1800"/>
+              <a:defRPr sz="1400"/>
             </a:lvl9pPr>
           </a:lstStyle>
           <a:p>
@@ -1328,6 +1866,7 @@
               <a:rPr lang="en-US"/>
               <a:t>Fifth level</a:t>
             </a:r>
+            <a:endParaRPr lang="en-US" dirty="0"/>
           </a:p>
         </p:txBody>
       </p:sp>
@@ -1348,7 +1887,7 @@
           <a:p>
             <a:fld id="{5BCAD085-E8A6-8845-BD4E-CB4CCA059FC4}" type="datetimeFigureOut">
               <a:rPr lang="en-US" smtClean="0"/>
-              <a:t>2/13/2026</a:t>
+              <a:t>2/14/2026</a:t>
             </a:fld>
             <a:endParaRPr lang="en-US"/>
           </a:p>
@@ -1399,7 +1938,7 @@
     </p:spTree>
     <p:extLst>
       <p:ext uri="{BB962C8B-B14F-4D97-AF65-F5344CB8AC3E}">
-        <p14:creationId xmlns:p14="http://schemas.microsoft.com/office/powerpoint/2010/main" val="2782244947"/>
+        <p14:creationId xmlns:p14="http://schemas.microsoft.com/office/powerpoint/2010/main" val="950671026"/>
       </p:ext>
     </p:extLst>
   </p:cSld>
@@ -1428,7 +1967,7 @@
       </p:grpSpPr>
       <p:sp>
         <p:nvSpPr>
-          <p:cNvPr id="2" name="Title 1"/>
+          <p:cNvPr id="10" name="Title 9"/>
           <p:cNvSpPr>
             <a:spLocks noGrp="1"/>
           </p:cNvSpPr>
@@ -1439,16 +1978,13 @@
         <p:spPr/>
         <p:txBody>
           <a:bodyPr/>
-          <a:lstStyle>
-            <a:lvl1pPr>
-              <a:defRPr/>
-            </a:lvl1pPr>
-          </a:lstStyle>
+          <a:lstStyle/>
           <a:p>
             <a:r>
               <a:rPr lang="en-US"/>
               <a:t>Click to edit Master title style</a:t>
             </a:r>
+            <a:endParaRPr lang="en-US" dirty="0"/>
           </a:p>
         </p:txBody>
       </p:sp>
@@ -1464,16 +2000,25 @@
         </p:nvSpPr>
         <p:spPr>
           <a:xfrm>
-            <a:off x="457200" y="1535113"/>
-            <a:ext cx="4040188" cy="639762"/>
-          </a:xfrm>
-        </p:spPr>
-        <p:txBody>
-          <a:bodyPr anchor="b"/>
+            <a:off x="1261872" y="1713655"/>
+            <a:ext cx="4480560" cy="731520"/>
+          </a:xfrm>
+        </p:spPr>
+        <p:txBody>
+          <a:bodyPr anchor="b">
+            <a:normAutofit/>
+          </a:bodyPr>
           <a:lstStyle>
             <a:lvl1pPr marL="0" indent="0">
+              <a:spcBef>
+                <a:spcPts val="0"/>
+              </a:spcBef>
               <a:buNone/>
-              <a:defRPr sz="2400" b="1"/>
+              <a:defRPr sz="2000" b="0">
+                <a:solidFill>
+                  <a:schemeClr val="tx2"/>
+                </a:solidFill>
+              </a:defRPr>
             </a:lvl1pPr>
             <a:lvl2pPr marL="457200" indent="0">
               <a:buNone/>
@@ -1529,39 +2074,39 @@
         </p:nvSpPr>
         <p:spPr>
           <a:xfrm>
-            <a:off x="457200" y="2174875"/>
-            <a:ext cx="4040188" cy="3951288"/>
+            <a:off x="1261872" y="2507550"/>
+            <a:ext cx="4480560" cy="3664650"/>
           </a:xfrm>
         </p:spPr>
         <p:txBody>
           <a:bodyPr/>
           <a:lstStyle>
             <a:lvl1pPr>
-              <a:defRPr sz="2400"/>
+              <a:defRPr sz="1800"/>
             </a:lvl1pPr>
             <a:lvl2pPr>
-              <a:defRPr sz="2000"/>
+              <a:defRPr sz="1600"/>
             </a:lvl2pPr>
             <a:lvl3pPr>
-              <a:defRPr sz="1800"/>
+              <a:defRPr sz="1400"/>
             </a:lvl3pPr>
             <a:lvl4pPr>
-              <a:defRPr sz="1600"/>
+              <a:defRPr sz="1400"/>
             </a:lvl4pPr>
             <a:lvl5pPr>
-              <a:defRPr sz="1600"/>
+              <a:defRPr sz="1400"/>
             </a:lvl5pPr>
             <a:lvl6pPr>
-              <a:defRPr sz="1600"/>
+              <a:defRPr sz="1400"/>
             </a:lvl6pPr>
             <a:lvl7pPr>
-              <a:defRPr sz="1600"/>
+              <a:defRPr sz="1400"/>
             </a:lvl7pPr>
             <a:lvl8pPr>
-              <a:defRPr sz="1600"/>
+              <a:defRPr sz="1400"/>
             </a:lvl8pPr>
             <a:lvl9pPr>
-              <a:defRPr sz="1600"/>
+              <a:defRPr sz="1400"/>
             </a:lvl9pPr>
           </a:lstStyle>
           <a:p>
@@ -1598,6 +2143,7 @@
               <a:rPr lang="en-US"/>
               <a:t>Fifth level</a:t>
             </a:r>
+            <a:endParaRPr lang="en-US" dirty="0"/>
           </a:p>
         </p:txBody>
       </p:sp>
@@ -1613,16 +2159,31 @@
         </p:nvSpPr>
         <p:spPr>
           <a:xfrm>
-            <a:off x="4645025" y="1535113"/>
-            <a:ext cx="4041775" cy="639762"/>
-          </a:xfrm>
-        </p:spPr>
-        <p:txBody>
-          <a:bodyPr anchor="b"/>
+            <a:off x="6126480" y="1713655"/>
+            <a:ext cx="4480560" cy="731520"/>
+          </a:xfrm>
+        </p:spPr>
+        <p:txBody>
+          <a:bodyPr anchor="b">
+            <a:normAutofit/>
+          </a:bodyPr>
           <a:lstStyle>
             <a:lvl1pPr marL="0" indent="0">
+              <a:lnSpc>
+                <a:spcPct val="95000"/>
+              </a:lnSpc>
+              <a:spcBef>
+                <a:spcPts val="0"/>
+              </a:spcBef>
               <a:buNone/>
-              <a:defRPr sz="2400" b="1"/>
+              <a:defRPr lang="en-US" sz="2000" b="0" kern="1200" dirty="0">
+                <a:solidFill>
+                  <a:schemeClr val="tx2"/>
+                </a:solidFill>
+                <a:latin typeface="+mn-lt"/>
+                <a:ea typeface="+mn-ea"/>
+                <a:cs typeface="+mn-cs"/>
+              </a:defRPr>
             </a:lvl1pPr>
             <a:lvl2pPr marL="457200" indent="0">
               <a:buNone/>
@@ -1658,7 +2219,16 @@
             </a:lvl9pPr>
           </a:lstStyle>
           <a:p>
-            <a:pPr lvl="0"/>
+            <a:pPr marL="0" lvl="0" indent="0" algn="l" defTabSz="914400" rtl="0" eaLnBrk="1" latinLnBrk="0" hangingPunct="1">
+              <a:lnSpc>
+                <a:spcPct val="90000"/>
+              </a:lnSpc>
+              <a:spcBef>
+                <a:spcPts val="2000"/>
+              </a:spcBef>
+              <a:buFontTx/>
+              <a:buNone/>
+            </a:pPr>
             <a:r>
               <a:rPr lang="en-US"/>
               <a:t>Click to edit Master text styles</a:t>
@@ -1678,39 +2248,39 @@
         </p:nvSpPr>
         <p:spPr>
           <a:xfrm>
-            <a:off x="4645025" y="2174875"/>
-            <a:ext cx="4041775" cy="3951288"/>
+            <a:off x="6126480" y="2507550"/>
+            <a:ext cx="4480560" cy="3664650"/>
           </a:xfrm>
         </p:spPr>
         <p:txBody>
           <a:bodyPr/>
           <a:lstStyle>
             <a:lvl1pPr>
-              <a:defRPr sz="2400"/>
+              <a:defRPr sz="1800"/>
             </a:lvl1pPr>
             <a:lvl2pPr>
-              <a:defRPr sz="2000"/>
+              <a:defRPr sz="1600"/>
             </a:lvl2pPr>
             <a:lvl3pPr>
-              <a:defRPr sz="1800"/>
+              <a:defRPr sz="1400"/>
             </a:lvl3pPr>
             <a:lvl4pPr>
-              <a:defRPr sz="1600"/>
+              <a:defRPr sz="1400"/>
             </a:lvl4pPr>
             <a:lvl5pPr>
-              <a:defRPr sz="1600"/>
+              <a:defRPr sz="1400"/>
             </a:lvl5pPr>
             <a:lvl6pPr>
-              <a:defRPr sz="1600"/>
+              <a:defRPr sz="1400"/>
             </a:lvl6pPr>
             <a:lvl7pPr>
-              <a:defRPr sz="1600"/>
+              <a:defRPr sz="1400"/>
             </a:lvl7pPr>
             <a:lvl8pPr>
-              <a:defRPr sz="1600"/>
+              <a:defRPr sz="1400"/>
             </a:lvl8pPr>
             <a:lvl9pPr>
-              <a:defRPr sz="1600"/>
+              <a:defRPr sz="1400"/>
             </a:lvl9pPr>
           </a:lstStyle>
           <a:p>
@@ -1747,6 +2317,7 @@
               <a:rPr lang="en-US"/>
               <a:t>Fifth level</a:t>
             </a:r>
+            <a:endParaRPr lang="en-US" dirty="0"/>
           </a:p>
         </p:txBody>
       </p:sp>
@@ -1767,7 +2338,7 @@
           <a:p>
             <a:fld id="{5BCAD085-E8A6-8845-BD4E-CB4CCA059FC4}" type="datetimeFigureOut">
               <a:rPr lang="en-US" smtClean="0"/>
-              <a:t>2/13/2026</a:t>
+              <a:t>2/14/2026</a:t>
             </a:fld>
             <a:endParaRPr lang="en-US"/>
           </a:p>
@@ -1818,7 +2389,7 @@
     </p:spTree>
     <p:extLst>
       <p:ext uri="{BB962C8B-B14F-4D97-AF65-F5344CB8AC3E}">
-        <p14:creationId xmlns:p14="http://schemas.microsoft.com/office/powerpoint/2010/main" val="990158736"/>
+        <p14:creationId xmlns:p14="http://schemas.microsoft.com/office/powerpoint/2010/main" val="1517510084"/>
       </p:ext>
     </p:extLst>
   </p:cSld>
@@ -1847,7 +2418,7 @@
       </p:grpSpPr>
       <p:sp>
         <p:nvSpPr>
-          <p:cNvPr id="2" name="Title 1"/>
+          <p:cNvPr id="6" name="Title 5"/>
           <p:cNvSpPr>
             <a:spLocks noGrp="1"/>
           </p:cNvSpPr>
@@ -1864,6 +2435,7 @@
               <a:rPr lang="en-US"/>
               <a:t>Click to edit Master title style</a:t>
             </a:r>
+            <a:endParaRPr lang="en-US" dirty="0"/>
           </a:p>
         </p:txBody>
       </p:sp>
@@ -1884,7 +2456,7 @@
           <a:p>
             <a:fld id="{5BCAD085-E8A6-8845-BD4E-CB4CCA059FC4}" type="datetimeFigureOut">
               <a:rPr lang="en-US" smtClean="0"/>
-              <a:t>2/13/2026</a:t>
+              <a:t>2/14/2026</a:t>
             </a:fld>
             <a:endParaRPr lang="en-US"/>
           </a:p>
@@ -1935,7 +2507,7 @@
     </p:spTree>
     <p:extLst>
       <p:ext uri="{BB962C8B-B14F-4D97-AF65-F5344CB8AC3E}">
-        <p14:creationId xmlns:p14="http://schemas.microsoft.com/office/powerpoint/2010/main" val="727027711"/>
+        <p14:creationId xmlns:p14="http://schemas.microsoft.com/office/powerpoint/2010/main" val="1474919888"/>
       </p:ext>
     </p:extLst>
   </p:cSld>
@@ -1979,7 +2551,7 @@
           <a:p>
             <a:fld id="{5BCAD085-E8A6-8845-BD4E-CB4CCA059FC4}" type="datetimeFigureOut">
               <a:rPr lang="en-US" smtClean="0"/>
-              <a:t>2/13/2026</a:t>
+              <a:t>2/14/2026</a:t>
             </a:fld>
             <a:endParaRPr lang="en-US"/>
           </a:p>
@@ -2030,7 +2602,7 @@
     </p:spTree>
     <p:extLst>
       <p:ext uri="{BB962C8B-B14F-4D97-AF65-F5344CB8AC3E}">
-        <p14:creationId xmlns:p14="http://schemas.microsoft.com/office/powerpoint/2010/main" val="1212999818"/>
+        <p14:creationId xmlns:p14="http://schemas.microsoft.com/office/powerpoint/2010/main" val="2355449518"/>
       </p:ext>
     </p:extLst>
   </p:cSld>
@@ -2069,15 +2641,17 @@
         </p:nvSpPr>
         <p:spPr>
           <a:xfrm>
-            <a:off x="457200" y="273050"/>
-            <a:ext cx="3008313" cy="1162050"/>
-          </a:xfrm>
-        </p:spPr>
-        <p:txBody>
-          <a:bodyPr anchor="b"/>
+            <a:off x="841248" y="457200"/>
+            <a:ext cx="3200400" cy="1600197"/>
+          </a:xfrm>
+        </p:spPr>
+        <p:txBody>
+          <a:bodyPr anchor="b">
+            <a:normAutofit/>
+          </a:bodyPr>
           <a:lstStyle>
-            <a:lvl1pPr algn="l">
-              <a:defRPr sz="2000" b="1"/>
+            <a:lvl1pPr>
+              <a:defRPr sz="3200" b="0" baseline="0"/>
             </a:lvl1pPr>
           </a:lstStyle>
           <a:p>
@@ -2085,6 +2659,7 @@
               <a:rPr lang="en-US"/>
               <a:t>Click to edit Master title style</a:t>
             </a:r>
+            <a:endParaRPr lang="en-US" dirty="0"/>
           </a:p>
         </p:txBody>
       </p:sp>
@@ -2100,39 +2675,39 @@
         </p:nvSpPr>
         <p:spPr>
           <a:xfrm>
-            <a:off x="3575050" y="273050"/>
-            <a:ext cx="5111750" cy="5853113"/>
+            <a:off x="4504267" y="685800"/>
+            <a:ext cx="6079066" cy="5486400"/>
           </a:xfrm>
         </p:spPr>
         <p:txBody>
           <a:bodyPr/>
           <a:lstStyle>
             <a:lvl1pPr>
-              <a:defRPr sz="3200"/>
+              <a:defRPr sz="2000"/>
             </a:lvl1pPr>
             <a:lvl2pPr>
-              <a:defRPr sz="2800"/>
+              <a:defRPr sz="1800"/>
             </a:lvl2pPr>
             <a:lvl3pPr>
-              <a:defRPr sz="2400"/>
+              <a:defRPr sz="1600"/>
             </a:lvl3pPr>
             <a:lvl4pPr>
-              <a:defRPr sz="2000"/>
+              <a:defRPr sz="1400"/>
             </a:lvl4pPr>
             <a:lvl5pPr>
-              <a:defRPr sz="2000"/>
+              <a:defRPr sz="1400"/>
             </a:lvl5pPr>
             <a:lvl6pPr>
-              <a:defRPr sz="2000"/>
+              <a:defRPr sz="1400"/>
             </a:lvl6pPr>
             <a:lvl7pPr>
-              <a:defRPr sz="2000"/>
+              <a:defRPr sz="1400"/>
             </a:lvl7pPr>
             <a:lvl8pPr>
-              <a:defRPr sz="2000"/>
+              <a:defRPr sz="1400"/>
             </a:lvl8pPr>
             <a:lvl9pPr>
-              <a:defRPr sz="2000"/>
+              <a:defRPr sz="1400"/>
             </a:lvl9pPr>
           </a:lstStyle>
           <a:p>
@@ -2169,6 +2744,7 @@
               <a:rPr lang="en-US"/>
               <a:t>Fifth level</a:t>
             </a:r>
+            <a:endParaRPr lang="en-US" dirty="0"/>
           </a:p>
         </p:txBody>
       </p:sp>
@@ -2184,16 +2760,24 @@
         </p:nvSpPr>
         <p:spPr>
           <a:xfrm>
-            <a:off x="457200" y="1435100"/>
-            <a:ext cx="3008313" cy="4691063"/>
-          </a:xfrm>
-        </p:spPr>
-        <p:txBody>
-          <a:bodyPr/>
+            <a:off x="841248" y="2099734"/>
+            <a:ext cx="3200400" cy="3810001"/>
+          </a:xfrm>
+        </p:spPr>
+        <p:txBody>
+          <a:bodyPr>
+            <a:normAutofit/>
+          </a:bodyPr>
           <a:lstStyle>
             <a:lvl1pPr marL="0" indent="0">
+              <a:lnSpc>
+                <a:spcPct val="114000"/>
+              </a:lnSpc>
+              <a:spcBef>
+                <a:spcPts val="800"/>
+              </a:spcBef>
               <a:buNone/>
-              <a:defRPr sz="1400"/>
+              <a:defRPr sz="1300"/>
             </a:lvl1pPr>
             <a:lvl2pPr marL="457200" indent="0">
               <a:buNone/>
@@ -2254,7 +2838,7 @@
           <a:p>
             <a:fld id="{5BCAD085-E8A6-8845-BD4E-CB4CCA059FC4}" type="datetimeFigureOut">
               <a:rPr lang="en-US" smtClean="0"/>
-              <a:t>2/13/2026</a:t>
+              <a:t>2/14/2026</a:t>
             </a:fld>
             <a:endParaRPr lang="en-US"/>
           </a:p>
@@ -2305,7 +2889,7 @@
     </p:spTree>
     <p:extLst>
       <p:ext uri="{BB962C8B-B14F-4D97-AF65-F5344CB8AC3E}">
-        <p14:creationId xmlns:p14="http://schemas.microsoft.com/office/powerpoint/2010/main" val="1840726560"/>
+        <p14:creationId xmlns:p14="http://schemas.microsoft.com/office/powerpoint/2010/main" val="1809623533"/>
       </p:ext>
     </p:extLst>
   </p:cSld>
@@ -2334,6 +2918,44 @@
       </p:grpSpPr>
       <p:sp>
         <p:nvSpPr>
+          <p:cNvPr id="8" name="Rectangle 7"/>
+          <p:cNvSpPr/>
+          <p:nvPr/>
+        </p:nvSpPr>
+        <p:spPr>
+          <a:xfrm>
+            <a:off x="0" y="5105400"/>
+            <a:ext cx="11292840" cy="1752600"/>
+          </a:xfrm>
+          <a:prstGeom prst="rect">
+            <a:avLst/>
+          </a:prstGeom>
+          <a:solidFill>
+            <a:srgbClr val="000000"/>
+          </a:solidFill>
+          <a:ln>
+            <a:noFill/>
+          </a:ln>
+        </p:spPr>
+        <p:style>
+          <a:lnRef idx="2">
+            <a:schemeClr val="accent1">
+              <a:shade val="50000"/>
+            </a:schemeClr>
+          </a:lnRef>
+          <a:fillRef idx="1">
+            <a:schemeClr val="accent1"/>
+          </a:fillRef>
+          <a:effectRef idx="0">
+            <a:schemeClr val="accent1"/>
+          </a:effectRef>
+          <a:fontRef idx="minor">
+            <a:schemeClr val="lt1"/>
+          </a:fontRef>
+        </p:style>
+      </p:sp>
+      <p:sp>
+        <p:nvSpPr>
           <p:cNvPr id="2" name="Title 1"/>
           <p:cNvSpPr>
             <a:spLocks noGrp="1"/>
@@ -2344,15 +2966,21 @@
         </p:nvSpPr>
         <p:spPr>
           <a:xfrm>
-            <a:off x="1792288" y="4800600"/>
-            <a:ext cx="5486400" cy="566738"/>
-          </a:xfrm>
-        </p:spPr>
-        <p:txBody>
-          <a:bodyPr anchor="b"/>
+            <a:off x="914400" y="5257800"/>
+            <a:ext cx="9982200" cy="914400"/>
+          </a:xfrm>
+        </p:spPr>
+        <p:txBody>
+          <a:bodyPr anchor="b">
+            <a:normAutofit/>
+          </a:bodyPr>
           <a:lstStyle>
-            <a:lvl1pPr algn="l">
-              <a:defRPr sz="2000" b="1"/>
+            <a:lvl1pPr>
+              <a:defRPr sz="2800" b="0">
+                <a:solidFill>
+                  <a:schemeClr val="bg1"/>
+                </a:solidFill>
+              </a:defRPr>
             </a:lvl1pPr>
           </a:lstStyle>
           <a:p>
@@ -2360,6 +2988,7 @@
               <a:rPr lang="en-US"/>
               <a:t>Click to edit Master title style</a:t>
             </a:r>
+            <a:endParaRPr lang="en-US" dirty="0"/>
           </a:p>
         </p:txBody>
       </p:sp>
@@ -2367,7 +2996,7 @@
         <p:nvSpPr>
           <p:cNvPr id="3" name="Picture Placeholder 2"/>
           <p:cNvSpPr>
-            <a:spLocks noGrp="1"/>
+            <a:spLocks noGrp="1" noChangeAspect="1"/>
           </p:cNvSpPr>
           <p:nvPr>
             <p:ph type="pic" idx="1"/>
@@ -2375,16 +3004,23 @@
         </p:nvSpPr>
         <p:spPr>
           <a:xfrm>
-            <a:off x="1792288" y="612775"/>
-            <a:ext cx="5486400" cy="4114800"/>
-          </a:xfrm>
-        </p:spPr>
-        <p:txBody>
-          <a:bodyPr/>
+            <a:off x="0" y="0"/>
+            <a:ext cx="11292840" cy="5128923"/>
+          </a:xfrm>
+          <a:solidFill>
+            <a:schemeClr val="accent1"/>
+          </a:solidFill>
+        </p:spPr>
+        <p:txBody>
+          <a:bodyPr anchor="t"/>
           <a:lstStyle>
             <a:lvl1pPr marL="0" indent="0">
               <a:buNone/>
-              <a:defRPr sz="3200"/>
+              <a:defRPr sz="3200">
+                <a:solidFill>
+                  <a:schemeClr val="bg1"/>
+                </a:solidFill>
+              </a:defRPr>
             </a:lvl1pPr>
             <a:lvl2pPr marL="457200" indent="0">
               <a:buNone/>
@@ -2420,7 +3056,11 @@
             </a:lvl9pPr>
           </a:lstStyle>
           <a:p>
-            <a:endParaRPr lang="en-US"/>
+            <a:r>
+              <a:rPr lang="en-US"/>
+              <a:t>Click icon to add picture</a:t>
+            </a:r>
+            <a:endParaRPr lang="en-US" dirty="0"/>
           </a:p>
         </p:txBody>
       </p:sp>
@@ -2436,16 +3076,30 @@
         </p:nvSpPr>
         <p:spPr>
           <a:xfrm>
-            <a:off x="1792288" y="5367338"/>
-            <a:ext cx="5486400" cy="804862"/>
-          </a:xfrm>
-        </p:spPr>
-        <p:txBody>
-          <a:bodyPr/>
+            <a:off x="914400" y="6108589"/>
+            <a:ext cx="9982200" cy="597011"/>
+          </a:xfrm>
+        </p:spPr>
+        <p:txBody>
+          <a:bodyPr>
+            <a:normAutofit/>
+          </a:bodyPr>
           <a:lstStyle>
             <a:lvl1pPr marL="0" indent="0">
+              <a:lnSpc>
+                <a:spcPct val="100000"/>
+              </a:lnSpc>
+              <a:spcBef>
+                <a:spcPts val="800"/>
+              </a:spcBef>
               <a:buNone/>
-              <a:defRPr sz="1400"/>
+              <a:defRPr sz="1300">
+                <a:solidFill>
+                  <a:schemeClr val="bg1">
+                    <a:lumMod val="85000"/>
+                  </a:schemeClr>
+                </a:solidFill>
+              </a:defRPr>
             </a:lvl1pPr>
             <a:lvl2pPr marL="457200" indent="0">
               <a:buNone/>
@@ -2506,7 +3160,7 @@
           <a:p>
             <a:fld id="{5BCAD085-E8A6-8845-BD4E-CB4CCA059FC4}" type="datetimeFigureOut">
               <a:rPr lang="en-US" smtClean="0"/>
-              <a:t>2/13/2026</a:t>
+              <a:t>2/14/2026</a:t>
             </a:fld>
             <a:endParaRPr lang="en-US"/>
           </a:p>
@@ -2557,7 +3211,7 @@
     </p:spTree>
     <p:extLst>
       <p:ext uri="{BB962C8B-B14F-4D97-AF65-F5344CB8AC3E}">
-        <p14:creationId xmlns:p14="http://schemas.microsoft.com/office/powerpoint/2010/main" val="3889236939"/>
+        <p14:creationId xmlns:p14="http://schemas.microsoft.com/office/powerpoint/2010/main" val="2009040641"/>
       </p:ext>
     </p:extLst>
   </p:cSld>
@@ -2591,6 +3245,46 @@
       </p:grpSpPr>
       <p:sp>
         <p:nvSpPr>
+          <p:cNvPr id="7" name="Rectangle 6"/>
+          <p:cNvSpPr/>
+          <p:nvPr/>
+        </p:nvSpPr>
+        <p:spPr>
+          <a:xfrm>
+            <a:off x="11292840" y="0"/>
+            <a:ext cx="914400" cy="6858000"/>
+          </a:xfrm>
+          <a:prstGeom prst="rect">
+            <a:avLst/>
+          </a:prstGeom>
+          <a:solidFill>
+            <a:schemeClr val="tx2">
+              <a:lumMod val="75000"/>
+            </a:schemeClr>
+          </a:solidFill>
+          <a:ln>
+            <a:noFill/>
+          </a:ln>
+        </p:spPr>
+        <p:style>
+          <a:lnRef idx="2">
+            <a:schemeClr val="accent1">
+              <a:shade val="50000"/>
+            </a:schemeClr>
+          </a:lnRef>
+          <a:fillRef idx="1">
+            <a:schemeClr val="accent1"/>
+          </a:fillRef>
+          <a:effectRef idx="0">
+            <a:schemeClr val="accent1"/>
+          </a:effectRef>
+          <a:fontRef idx="minor">
+            <a:schemeClr val="lt1"/>
+          </a:fontRef>
+        </p:style>
+      </p:sp>
+      <p:sp>
+        <p:nvSpPr>
           <p:cNvPr id="2" name="Title Placeholder 1"/>
           <p:cNvSpPr>
             <a:spLocks noGrp="1"/>
@@ -2601,15 +3295,15 @@
         </p:nvSpPr>
         <p:spPr>
           <a:xfrm>
-            <a:off x="457200" y="274638"/>
-            <a:ext cx="8229600" cy="1143000"/>
-          </a:xfrm>
-          <a:prstGeom prst="rect">
-            <a:avLst/>
-          </a:prstGeom>
-        </p:spPr>
-        <p:txBody>
-          <a:bodyPr vert="horz" lIns="91440" tIns="45720" rIns="91440" bIns="45720" rtlCol="0" anchor="ctr">
+            <a:off x="1261872" y="365760"/>
+            <a:ext cx="9692640" cy="1325562"/>
+          </a:xfrm>
+          <a:prstGeom prst="rect">
+            <a:avLst/>
+          </a:prstGeom>
+        </p:spPr>
+        <p:txBody>
+          <a:bodyPr vert="horz" lIns="91440" tIns="45720" rIns="91440" bIns="45720" rtlCol="0" anchor="b">
             <a:normAutofit/>
           </a:bodyPr>
           <a:lstStyle/>
@@ -2618,6 +3312,7 @@
               <a:rPr lang="en-US"/>
               <a:t>Click to edit Master title style</a:t>
             </a:r>
+            <a:endParaRPr lang="en-US" dirty="0"/>
           </a:p>
         </p:txBody>
       </p:sp>
@@ -2633,8 +3328,8 @@
         </p:nvSpPr>
         <p:spPr>
           <a:xfrm>
-            <a:off x="457200" y="1600200"/>
-            <a:ext cx="8229600" cy="4525963"/>
+            <a:off x="1261872" y="1828800"/>
+            <a:ext cx="8595360" cy="4351337"/>
           </a:xfrm>
           <a:prstGeom prst="rect">
             <a:avLst/>
@@ -2679,6 +3374,7 @@
               <a:rPr lang="en-US"/>
               <a:t>Fifth level</a:t>
             </a:r>
+            <a:endParaRPr lang="en-US" dirty="0"/>
           </a:p>
         </p:txBody>
       </p:sp>
@@ -2693,9 +3389,9 @@
           </p:nvPr>
         </p:nvSpPr>
         <p:spPr>
-          <a:xfrm>
-            <a:off x="457200" y="6356350"/>
-            <a:ext cx="2133600" cy="365125"/>
+          <a:xfrm rot="16200000">
+            <a:off x="10797542" y="998537"/>
+            <a:ext cx="1904999" cy="365125"/>
           </a:xfrm>
           <a:prstGeom prst="rect">
             <a:avLst/>
@@ -2704,11 +3400,12 @@
         <p:txBody>
           <a:bodyPr vert="horz" lIns="91440" tIns="45720" rIns="91440" bIns="45720" rtlCol="0" anchor="ctr"/>
           <a:lstStyle>
-            <a:lvl1pPr algn="l">
-              <a:defRPr sz="1200">
-                <a:solidFill>
-                  <a:schemeClr val="tx1">
-                    <a:tint val="75000"/>
+            <a:lvl1pPr algn="r">
+              <a:defRPr sz="1050" b="0">
+                <a:solidFill>
+                  <a:schemeClr val="tx2">
+                    <a:lumMod val="20000"/>
+                    <a:lumOff val="80000"/>
                   </a:schemeClr>
                 </a:solidFill>
               </a:defRPr>
@@ -2717,7 +3414,7 @@
           <a:p>
             <a:fld id="{5BCAD085-E8A6-8845-BD4E-CB4CCA059FC4}" type="datetimeFigureOut">
               <a:rPr lang="en-US" smtClean="0"/>
-              <a:t>2/13/2026</a:t>
+              <a:t>2/14/2026</a:t>
             </a:fld>
             <a:endParaRPr lang="en-US"/>
           </a:p>
@@ -2734,9 +3431,9 @@
           </p:nvPr>
         </p:nvSpPr>
         <p:spPr>
-          <a:xfrm>
-            <a:off x="3124200" y="6356350"/>
-            <a:ext cx="2895600" cy="365125"/>
+          <a:xfrm rot="16200000">
+            <a:off x="9959341" y="4046537"/>
+            <a:ext cx="3581400" cy="365125"/>
           </a:xfrm>
           <a:prstGeom prst="rect">
             <a:avLst/>
@@ -2745,11 +3442,12 @@
         <p:txBody>
           <a:bodyPr vert="horz" lIns="91440" tIns="45720" rIns="91440" bIns="45720" rtlCol="0" anchor="ctr"/>
           <a:lstStyle>
-            <a:lvl1pPr algn="ctr">
-              <a:defRPr sz="1200">
-                <a:solidFill>
-                  <a:schemeClr val="tx1">
-                    <a:tint val="75000"/>
+            <a:lvl1pPr algn="l">
+              <a:defRPr sz="1050">
+                <a:solidFill>
+                  <a:schemeClr val="tx2">
+                    <a:lumMod val="20000"/>
+                    <a:lumOff val="80000"/>
                   </a:schemeClr>
                 </a:solidFill>
               </a:defRPr>
@@ -2772,21 +3470,24 @@
         </p:nvSpPr>
         <p:spPr>
           <a:xfrm>
-            <a:off x="6553200" y="6356350"/>
-            <a:ext cx="2133600" cy="365125"/>
-          </a:xfrm>
-          <a:prstGeom prst="rect">
-            <a:avLst/>
-          </a:prstGeom>
-        </p:spPr>
-        <p:txBody>
-          <a:bodyPr vert="horz" lIns="91440" tIns="45720" rIns="91440" bIns="45720" rtlCol="0" anchor="ctr"/>
+            <a:off x="11292840" y="6172200"/>
+            <a:ext cx="914400" cy="593725"/>
+          </a:xfrm>
+          <a:prstGeom prst="rect">
+            <a:avLst/>
+          </a:prstGeom>
+        </p:spPr>
+        <p:txBody>
+          <a:bodyPr vert="horz" lIns="45720" tIns="45720" rIns="45720" bIns="45720" rtlCol="0" anchor="ctr">
+            <a:normAutofit/>
+          </a:bodyPr>
           <a:lstStyle>
-            <a:lvl1pPr algn="r">
-              <a:defRPr sz="1200">
-                <a:solidFill>
-                  <a:schemeClr val="tx1">
-                    <a:tint val="75000"/>
+            <a:lvl1pPr algn="ctr">
+              <a:defRPr sz="3600">
+                <a:solidFill>
+                  <a:schemeClr val="tx2">
+                    <a:lumMod val="60000"/>
+                    <a:lumOff val="40000"/>
                   </a:schemeClr>
                 </a:solidFill>
               </a:defRPr>
@@ -2804,32 +3505,35 @@
     </p:spTree>
     <p:extLst>
       <p:ext uri="{BB962C8B-B14F-4D97-AF65-F5344CB8AC3E}">
-        <p14:creationId xmlns:p14="http://schemas.microsoft.com/office/powerpoint/2010/main" val="2209977519"/>
+        <p14:creationId xmlns:p14="http://schemas.microsoft.com/office/powerpoint/2010/main" val="1495296833"/>
       </p:ext>
     </p:extLst>
   </p:cSld>
   <p:clrMap bg1="lt1" tx1="dk1" bg2="lt2" tx2="dk2" accent1="accent1" accent2="accent2" accent3="accent3" accent4="accent4" accent5="accent5" accent6="accent6" hlink="hlink" folHlink="folHlink"/>
   <p:sldLayoutIdLst>
-    <p:sldLayoutId id="2147483649" r:id="rId1"/>
-    <p:sldLayoutId id="2147483650" r:id="rId2"/>
-    <p:sldLayoutId id="2147483651" r:id="rId3"/>
-    <p:sldLayoutId id="2147483652" r:id="rId4"/>
-    <p:sldLayoutId id="2147483653" r:id="rId5"/>
-    <p:sldLayoutId id="2147483654" r:id="rId6"/>
-    <p:sldLayoutId id="2147483655" r:id="rId7"/>
-    <p:sldLayoutId id="2147483656" r:id="rId8"/>
-    <p:sldLayoutId id="2147483657" r:id="rId9"/>
-    <p:sldLayoutId id="2147483658" r:id="rId10"/>
-    <p:sldLayoutId id="2147483659" r:id="rId11"/>
+    <p:sldLayoutId id="2147483661" r:id="rId1"/>
+    <p:sldLayoutId id="2147483662" r:id="rId2"/>
+    <p:sldLayoutId id="2147483663" r:id="rId3"/>
+    <p:sldLayoutId id="2147483664" r:id="rId4"/>
+    <p:sldLayoutId id="2147483665" r:id="rId5"/>
+    <p:sldLayoutId id="2147483666" r:id="rId6"/>
+    <p:sldLayoutId id="2147483667" r:id="rId7"/>
+    <p:sldLayoutId id="2147483668" r:id="rId8"/>
+    <p:sldLayoutId id="2147483669" r:id="rId9"/>
+    <p:sldLayoutId id="2147483670" r:id="rId10"/>
+    <p:sldLayoutId id="2147483671" r:id="rId11"/>
   </p:sldLayoutIdLst>
   <p:txStyles>
     <p:titleStyle>
-      <a:lvl1pPr algn="ctr" defTabSz="457200" rtl="0" eaLnBrk="1" latinLnBrk="0" hangingPunct="1">
+      <a:lvl1pPr algn="l" defTabSz="914400" rtl="0" eaLnBrk="1" latinLnBrk="0" hangingPunct="1">
+        <a:lnSpc>
+          <a:spcPct val="90000"/>
+        </a:lnSpc>
         <a:spcBef>
           <a:spcPct val="0"/>
         </a:spcBef>
         <a:buNone/>
-        <a:defRPr sz="4400" kern="1200">
+        <a:defRPr sz="4400" kern="1200" spc="-50" baseline="0">
           <a:solidFill>
             <a:schemeClr val="tx1"/>
           </a:solidFill>
@@ -2840,13 +3544,23 @@
       </a:lvl1pPr>
     </p:titleStyle>
     <p:bodyStyle>
-      <a:lvl1pPr marL="342900" indent="-342900" algn="l" defTabSz="457200" rtl="0" eaLnBrk="1" latinLnBrk="0" hangingPunct="1">
+      <a:lvl1pPr marL="182880" indent="-182880" algn="l" defTabSz="914400" rtl="0" eaLnBrk="1" latinLnBrk="0" hangingPunct="1">
+        <a:lnSpc>
+          <a:spcPct val="95000"/>
+        </a:lnSpc>
         <a:spcBef>
-          <a:spcPct val="20000"/>
+          <a:spcPts val="1400"/>
         </a:spcBef>
-        <a:buFont typeface="Arial"/>
+        <a:spcAft>
+          <a:spcPts val="200"/>
+        </a:spcAft>
+        <a:buClr>
+          <a:schemeClr val="accent1"/>
+        </a:buClr>
+        <a:buSzPct val="80000"/>
+        <a:buFont typeface="Arial" pitchFamily="34" charset="0"/>
         <a:buChar char="•"/>
-        <a:defRPr sz="3200" kern="1200">
+        <a:defRPr sz="1800" kern="1200" spc="10" baseline="0">
           <a:solidFill>
             <a:schemeClr val="tx1"/>
           </a:solidFill>
@@ -2855,120 +3569,216 @@
           <a:cs typeface="+mn-cs"/>
         </a:defRPr>
       </a:lvl1pPr>
-      <a:lvl2pPr marL="742950" indent="-285750" algn="l" defTabSz="457200" rtl="0" eaLnBrk="1" latinLnBrk="0" hangingPunct="1">
+      <a:lvl2pPr marL="457200" indent="-182880" algn="l" defTabSz="914400" rtl="0" eaLnBrk="1" latinLnBrk="0" hangingPunct="1">
+        <a:lnSpc>
+          <a:spcPct val="90000"/>
+        </a:lnSpc>
         <a:spcBef>
-          <a:spcPct val="20000"/>
+          <a:spcPts val="300"/>
         </a:spcBef>
-        <a:buFont typeface="Arial"/>
-        <a:buChar char="–"/>
-        <a:defRPr sz="2800" kern="1200">
+        <a:spcAft>
+          <a:spcPts val="300"/>
+        </a:spcAft>
+        <a:buClr>
+          <a:schemeClr val="accent1"/>
+        </a:buClr>
+        <a:buFont typeface="Wingdings 2" pitchFamily="18" charset="2"/>
+        <a:buChar char=""/>
+        <a:defRPr sz="1600" kern="1200">
           <a:solidFill>
-            <a:schemeClr val="tx1"/>
+            <a:schemeClr val="tx1">
+              <a:lumMod val="85000"/>
+              <a:lumOff val="15000"/>
+            </a:schemeClr>
           </a:solidFill>
           <a:latin typeface="+mn-lt"/>
           <a:ea typeface="+mn-ea"/>
           <a:cs typeface="+mn-cs"/>
         </a:defRPr>
       </a:lvl2pPr>
-      <a:lvl3pPr marL="1143000" indent="-228600" algn="l" defTabSz="457200" rtl="0" eaLnBrk="1" latinLnBrk="0" hangingPunct="1">
+      <a:lvl3pPr marL="731520" indent="-182880" algn="l" defTabSz="914400" rtl="0" eaLnBrk="1" latinLnBrk="0" hangingPunct="1">
+        <a:lnSpc>
+          <a:spcPct val="90000"/>
+        </a:lnSpc>
         <a:spcBef>
-          <a:spcPct val="20000"/>
+          <a:spcPts val="300"/>
         </a:spcBef>
-        <a:buFont typeface="Arial"/>
-        <a:buChar char="•"/>
-        <a:defRPr sz="2400" kern="1200">
+        <a:spcAft>
+          <a:spcPts val="300"/>
+        </a:spcAft>
+        <a:buClr>
+          <a:schemeClr val="accent1"/>
+        </a:buClr>
+        <a:buFont typeface="Wingdings 2" pitchFamily="18" charset="2"/>
+        <a:buChar char=""/>
+        <a:defRPr sz="1400" kern="1200">
           <a:solidFill>
-            <a:schemeClr val="tx1"/>
+            <a:schemeClr val="tx1">
+              <a:lumMod val="85000"/>
+              <a:lumOff val="15000"/>
+            </a:schemeClr>
           </a:solidFill>
           <a:latin typeface="+mn-lt"/>
           <a:ea typeface="+mn-ea"/>
           <a:cs typeface="+mn-cs"/>
         </a:defRPr>
       </a:lvl3pPr>
-      <a:lvl4pPr marL="1600200" indent="-228600" algn="l" defTabSz="457200" rtl="0" eaLnBrk="1" latinLnBrk="0" hangingPunct="1">
+      <a:lvl4pPr marL="1005840" indent="-182880" algn="l" defTabSz="914400" rtl="0" eaLnBrk="1" latinLnBrk="0" hangingPunct="1">
+        <a:lnSpc>
+          <a:spcPct val="90000"/>
+        </a:lnSpc>
         <a:spcBef>
-          <a:spcPct val="20000"/>
+          <a:spcPts val="300"/>
         </a:spcBef>
-        <a:buFont typeface="Arial"/>
-        <a:buChar char="–"/>
-        <a:defRPr sz="2000" kern="1200">
+        <a:spcAft>
+          <a:spcPts val="300"/>
+        </a:spcAft>
+        <a:buClr>
+          <a:schemeClr val="accent1"/>
+        </a:buClr>
+        <a:buFont typeface="Wingdings 2" pitchFamily="18" charset="2"/>
+        <a:buChar char=""/>
+        <a:defRPr sz="1400" kern="1200">
           <a:solidFill>
-            <a:schemeClr val="tx1"/>
+            <a:schemeClr val="tx1">
+              <a:lumMod val="85000"/>
+              <a:lumOff val="15000"/>
+            </a:schemeClr>
           </a:solidFill>
           <a:latin typeface="+mn-lt"/>
           <a:ea typeface="+mn-ea"/>
           <a:cs typeface="+mn-cs"/>
         </a:defRPr>
       </a:lvl4pPr>
-      <a:lvl5pPr marL="2057400" indent="-228600" algn="l" defTabSz="457200" rtl="0" eaLnBrk="1" latinLnBrk="0" hangingPunct="1">
+      <a:lvl5pPr marL="1280160" indent="-182880" algn="l" defTabSz="914400" rtl="0" eaLnBrk="1" latinLnBrk="0" hangingPunct="1">
+        <a:lnSpc>
+          <a:spcPct val="90000"/>
+        </a:lnSpc>
         <a:spcBef>
-          <a:spcPct val="20000"/>
+          <a:spcPts val="300"/>
         </a:spcBef>
-        <a:buFont typeface="Arial"/>
-        <a:buChar char="»"/>
-        <a:defRPr sz="2000" kern="1200">
+        <a:spcAft>
+          <a:spcPts val="300"/>
+        </a:spcAft>
+        <a:buClr>
+          <a:schemeClr val="accent1"/>
+        </a:buClr>
+        <a:buFont typeface="Wingdings 2" pitchFamily="18" charset="2"/>
+        <a:buChar char=""/>
+        <a:defRPr sz="1400" kern="1200">
           <a:solidFill>
-            <a:schemeClr val="tx1"/>
+            <a:schemeClr val="tx1">
+              <a:lumMod val="85000"/>
+              <a:lumOff val="15000"/>
+            </a:schemeClr>
           </a:solidFill>
           <a:latin typeface="+mn-lt"/>
           <a:ea typeface="+mn-ea"/>
           <a:cs typeface="+mn-cs"/>
         </a:defRPr>
       </a:lvl5pPr>
-      <a:lvl6pPr marL="2514600" indent="-228600" algn="l" defTabSz="457200" rtl="0" eaLnBrk="1" latinLnBrk="0" hangingPunct="1">
+      <a:lvl6pPr marL="1600000" indent="-228600" algn="l" defTabSz="914400" rtl="0" eaLnBrk="1" latinLnBrk="0" hangingPunct="1">
+        <a:lnSpc>
+          <a:spcPct val="90000"/>
+        </a:lnSpc>
         <a:spcBef>
-          <a:spcPct val="20000"/>
+          <a:spcPts val="300"/>
         </a:spcBef>
-        <a:buFont typeface="Arial"/>
-        <a:buChar char="•"/>
-        <a:defRPr sz="2000" kern="1200">
+        <a:spcAft>
+          <a:spcPts val="300"/>
+        </a:spcAft>
+        <a:buClr>
+          <a:schemeClr val="accent1"/>
+        </a:buClr>
+        <a:buFont typeface="Wingdings 2" pitchFamily="18" charset="2"/>
+        <a:buChar char=""/>
+        <a:defRPr sz="1400" kern="1200">
           <a:solidFill>
-            <a:schemeClr val="tx1"/>
+            <a:schemeClr val="tx1">
+              <a:lumMod val="85000"/>
+              <a:lumOff val="15000"/>
+            </a:schemeClr>
           </a:solidFill>
           <a:latin typeface="+mn-lt"/>
           <a:ea typeface="+mn-ea"/>
           <a:cs typeface="+mn-cs"/>
         </a:defRPr>
       </a:lvl6pPr>
-      <a:lvl7pPr marL="2971800" indent="-228600" algn="l" defTabSz="457200" rtl="0" eaLnBrk="1" latinLnBrk="0" hangingPunct="1">
+      <a:lvl7pPr marL="1900000" indent="-228600" algn="l" defTabSz="914400" rtl="0" eaLnBrk="1" latinLnBrk="0" hangingPunct="1">
+        <a:lnSpc>
+          <a:spcPct val="90000"/>
+        </a:lnSpc>
         <a:spcBef>
-          <a:spcPct val="20000"/>
+          <a:spcPts val="300"/>
         </a:spcBef>
-        <a:buFont typeface="Arial"/>
-        <a:buChar char="•"/>
-        <a:defRPr sz="2000" kern="1200">
+        <a:spcAft>
+          <a:spcPts val="300"/>
+        </a:spcAft>
+        <a:buClr>
+          <a:schemeClr val="accent1"/>
+        </a:buClr>
+        <a:buFont typeface="Wingdings 2" pitchFamily="18" charset="2"/>
+        <a:buChar char=""/>
+        <a:defRPr sz="1400" kern="1200">
           <a:solidFill>
-            <a:schemeClr val="tx1"/>
+            <a:schemeClr val="tx1">
+              <a:lumMod val="85000"/>
+              <a:lumOff val="15000"/>
+            </a:schemeClr>
           </a:solidFill>
           <a:latin typeface="+mn-lt"/>
           <a:ea typeface="+mn-ea"/>
           <a:cs typeface="+mn-cs"/>
         </a:defRPr>
       </a:lvl7pPr>
-      <a:lvl8pPr marL="3429000" indent="-228600" algn="l" defTabSz="457200" rtl="0" eaLnBrk="1" latinLnBrk="0" hangingPunct="1">
+      <a:lvl8pPr marL="2200000" indent="-228600" algn="l" defTabSz="914400" rtl="0" eaLnBrk="1" latinLnBrk="0" hangingPunct="1">
+        <a:lnSpc>
+          <a:spcPct val="90000"/>
+        </a:lnSpc>
         <a:spcBef>
-          <a:spcPct val="20000"/>
+          <a:spcPts val="300"/>
         </a:spcBef>
-        <a:buFont typeface="Arial"/>
-        <a:buChar char="•"/>
-        <a:defRPr sz="2000" kern="1200">
+        <a:spcAft>
+          <a:spcPts val="300"/>
+        </a:spcAft>
+        <a:buClr>
+          <a:schemeClr val="accent1"/>
+        </a:buClr>
+        <a:buFont typeface="Wingdings 2" pitchFamily="18" charset="2"/>
+        <a:buChar char=""/>
+        <a:defRPr sz="1400" kern="1200">
           <a:solidFill>
-            <a:schemeClr val="tx1"/>
+            <a:schemeClr val="tx1">
+              <a:lumMod val="85000"/>
+              <a:lumOff val="15000"/>
+            </a:schemeClr>
           </a:solidFill>
           <a:latin typeface="+mn-lt"/>
           <a:ea typeface="+mn-ea"/>
           <a:cs typeface="+mn-cs"/>
         </a:defRPr>
       </a:lvl8pPr>
-      <a:lvl9pPr marL="3886200" indent="-228600" algn="l" defTabSz="457200" rtl="0" eaLnBrk="1" latinLnBrk="0" hangingPunct="1">
+      <a:lvl9pPr marL="2500000" indent="-228600" algn="l" defTabSz="914400" rtl="0" eaLnBrk="1" latinLnBrk="0" hangingPunct="1">
+        <a:lnSpc>
+          <a:spcPct val="90000"/>
+        </a:lnSpc>
         <a:spcBef>
-          <a:spcPct val="20000"/>
+          <a:spcPts val="300"/>
         </a:spcBef>
-        <a:buFont typeface="Arial"/>
-        <a:buChar char="•"/>
-        <a:defRPr sz="2000" kern="1200">
+        <a:spcAft>
+          <a:spcPts val="300"/>
+        </a:spcAft>
+        <a:buClr>
+          <a:schemeClr val="accent1"/>
+        </a:buClr>
+        <a:buFont typeface="Wingdings 2" pitchFamily="18" charset="2"/>
+        <a:buChar char=""/>
+        <a:defRPr sz="1400" kern="1200">
           <a:solidFill>
-            <a:schemeClr val="tx1"/>
+            <a:schemeClr val="tx1">
+              <a:lumMod val="85000"/>
+              <a:lumOff val="15000"/>
+            </a:schemeClr>
           </a:solidFill>
           <a:latin typeface="+mn-lt"/>
           <a:ea typeface="+mn-ea"/>
@@ -2980,7 +3790,7 @@
       <a:defPPr>
         <a:defRPr lang="en-US"/>
       </a:defPPr>
-      <a:lvl1pPr marL="0" algn="l" defTabSz="457200" rtl="0" eaLnBrk="1" latinLnBrk="0" hangingPunct="1">
+      <a:lvl1pPr marL="0" algn="l" defTabSz="914400" rtl="0" eaLnBrk="1" latinLnBrk="0" hangingPunct="1">
         <a:defRPr sz="1800" kern="1200">
           <a:solidFill>
             <a:schemeClr val="tx1"/>
@@ -2990,7 +3800,7 @@
           <a:cs typeface="+mn-cs"/>
         </a:defRPr>
       </a:lvl1pPr>
-      <a:lvl2pPr marL="457200" algn="l" defTabSz="457200" rtl="0" eaLnBrk="1" latinLnBrk="0" hangingPunct="1">
+      <a:lvl2pPr marL="457200" algn="l" defTabSz="914400" rtl="0" eaLnBrk="1" latinLnBrk="0" hangingPunct="1">
         <a:defRPr sz="1800" kern="1200">
           <a:solidFill>
             <a:schemeClr val="tx1"/>
@@ -3000,7 +3810,7 @@
           <a:cs typeface="+mn-cs"/>
         </a:defRPr>
       </a:lvl2pPr>
-      <a:lvl3pPr marL="914400" algn="l" defTabSz="457200" rtl="0" eaLnBrk="1" latinLnBrk="0" hangingPunct="1">
+      <a:lvl3pPr marL="914400" algn="l" defTabSz="914400" rtl="0" eaLnBrk="1" latinLnBrk="0" hangingPunct="1">
         <a:defRPr sz="1800" kern="1200">
           <a:solidFill>
             <a:schemeClr val="tx1"/>
@@ -3010,7 +3820,7 @@
           <a:cs typeface="+mn-cs"/>
         </a:defRPr>
       </a:lvl3pPr>
-      <a:lvl4pPr marL="1371600" algn="l" defTabSz="457200" rtl="0" eaLnBrk="1" latinLnBrk="0" hangingPunct="1">
+      <a:lvl4pPr marL="1371600" algn="l" defTabSz="914400" rtl="0" eaLnBrk="1" latinLnBrk="0" hangingPunct="1">
         <a:defRPr sz="1800" kern="1200">
           <a:solidFill>
             <a:schemeClr val="tx1"/>
@@ -3020,7 +3830,7 @@
           <a:cs typeface="+mn-cs"/>
         </a:defRPr>
       </a:lvl4pPr>
-      <a:lvl5pPr marL="1828800" algn="l" defTabSz="457200" rtl="0" eaLnBrk="1" latinLnBrk="0" hangingPunct="1">
+      <a:lvl5pPr marL="1828800" algn="l" defTabSz="914400" rtl="0" eaLnBrk="1" latinLnBrk="0" hangingPunct="1">
         <a:defRPr sz="1800" kern="1200">
           <a:solidFill>
             <a:schemeClr val="tx1"/>
@@ -3030,7 +3840,7 @@
           <a:cs typeface="+mn-cs"/>
         </a:defRPr>
       </a:lvl5pPr>
-      <a:lvl6pPr marL="2286000" algn="l" defTabSz="457200" rtl="0" eaLnBrk="1" latinLnBrk="0" hangingPunct="1">
+      <a:lvl6pPr marL="2286000" algn="l" defTabSz="914400" rtl="0" eaLnBrk="1" latinLnBrk="0" hangingPunct="1">
         <a:defRPr sz="1800" kern="1200">
           <a:solidFill>
             <a:schemeClr val="tx1"/>
@@ -3040,7 +3850,7 @@
           <a:cs typeface="+mn-cs"/>
         </a:defRPr>
       </a:lvl6pPr>
-      <a:lvl7pPr marL="2743200" algn="l" defTabSz="457200" rtl="0" eaLnBrk="1" latinLnBrk="0" hangingPunct="1">
+      <a:lvl7pPr marL="2743200" algn="l" defTabSz="914400" rtl="0" eaLnBrk="1" latinLnBrk="0" hangingPunct="1">
         <a:defRPr sz="1800" kern="1200">
           <a:solidFill>
             <a:schemeClr val="tx1"/>
@@ -3050,7 +3860,7 @@
           <a:cs typeface="+mn-cs"/>
         </a:defRPr>
       </a:lvl7pPr>
-      <a:lvl8pPr marL="3200400" algn="l" defTabSz="457200" rtl="0" eaLnBrk="1" latinLnBrk="0" hangingPunct="1">
+      <a:lvl8pPr marL="3200400" algn="l" defTabSz="914400" rtl="0" eaLnBrk="1" latinLnBrk="0" hangingPunct="1">
         <a:defRPr sz="1800" kern="1200">
           <a:solidFill>
             <a:schemeClr val="tx1"/>
@@ -3060,7 +3870,7 @@
           <a:cs typeface="+mn-cs"/>
         </a:defRPr>
       </a:lvl8pPr>
-      <a:lvl9pPr marL="3657600" algn="l" defTabSz="457200" rtl="0" eaLnBrk="1" latinLnBrk="0" hangingPunct="1">
+      <a:lvl9pPr marL="3657600" algn="l" defTabSz="914400" rtl="0" eaLnBrk="1" latinLnBrk="0" hangingPunct="1">
         <a:defRPr sz="1800" kern="1200">
           <a:solidFill>
             <a:schemeClr val="tx1"/>
@@ -3190,7 +4000,7 @@
         </p:nvSpPr>
         <p:spPr>
           <a:xfrm>
-            <a:off x="914400" y="274320"/>
+            <a:off x="994410" y="274320"/>
             <a:ext cx="1097280" cy="457200"/>
           </a:xfrm>
           <a:prstGeom prst="rect">
@@ -3213,6 +4023,7 @@
               </a:defRPr>
             </a:pPr>
             <a:r>
+              <a:rPr dirty="0"/>
               <a:t>D.A.K</a:t>
             </a:r>
           </a:p>
@@ -3285,6 +4096,7 @@
               </a:defRPr>
             </a:pPr>
             <a:r>
+              <a:rPr dirty="0"/>
               <a:t>Scope of POC</a:t>
             </a:r>
           </a:p>
@@ -3298,8 +4110,8 @@
         </p:nvSpPr>
         <p:spPr>
           <a:xfrm>
-            <a:off x="731520" y="1344168"/>
-            <a:ext cx="1645920" cy="32004"/>
+            <a:off x="731520" y="1344167"/>
+            <a:ext cx="2137410" cy="45719"/>
           </a:xfrm>
           <a:prstGeom prst="rect">
             <a:avLst/>
@@ -3342,8 +4154,8 @@
         </p:nvSpPr>
         <p:spPr>
           <a:xfrm>
-            <a:off x="731520" y="1417320"/>
-            <a:ext cx="10058400" cy="320040"/>
+            <a:off x="335585" y="1485900"/>
+            <a:ext cx="11338559" cy="292388"/>
           </a:xfrm>
           <a:prstGeom prst="rect">
             <a:avLst/>
@@ -3365,6 +4177,7 @@
               </a:defRPr>
             </a:pPr>
             <a:r>
+              <a:rPr dirty="0"/>
               <a:t>Multi-portal faith-community platform with Spiritual AI Guru Bot, VPS deployment &amp; Docker orchestration</a:t>
             </a:r>
           </a:p>
@@ -3378,7 +4191,7 @@
         </p:nvSpPr>
         <p:spPr>
           <a:xfrm>
-            <a:off x="457200" y="1600200"/>
+            <a:off x="335585" y="1920240"/>
             <a:ext cx="5486400" cy="4754880"/>
           </a:xfrm>
           <a:prstGeom prst="roundRect">
@@ -3424,7 +4237,7 @@
         </p:nvSpPr>
         <p:spPr>
           <a:xfrm>
-            <a:off x="731520" y="1737360"/>
+            <a:off x="609905" y="2057400"/>
             <a:ext cx="4572000" cy="320040"/>
           </a:xfrm>
           <a:prstGeom prst="rect">
@@ -3460,7 +4273,7 @@
         </p:nvSpPr>
         <p:spPr>
           <a:xfrm>
-            <a:off x="731520" y="2011680"/>
+            <a:off x="609905" y="2331720"/>
             <a:ext cx="640080" cy="22860"/>
           </a:xfrm>
           <a:prstGeom prst="rect">
@@ -3504,7 +4317,7 @@
         </p:nvSpPr>
         <p:spPr>
           <a:xfrm>
-            <a:off x="731520" y="2194560"/>
+            <a:off x="609905" y="2514600"/>
             <a:ext cx="45720" cy="475488"/>
           </a:xfrm>
           <a:prstGeom prst="rect">
@@ -3548,7 +4361,7 @@
         </p:nvSpPr>
         <p:spPr>
           <a:xfrm>
-            <a:off x="777240" y="2194560"/>
+            <a:off x="655625" y="2514600"/>
             <a:ext cx="4983480" cy="475488"/>
           </a:xfrm>
           <a:prstGeom prst="roundRect">
@@ -3594,7 +4407,7 @@
         </p:nvSpPr>
         <p:spPr>
           <a:xfrm>
-            <a:off x="914400" y="2221991"/>
+            <a:off x="792785" y="2542031"/>
             <a:ext cx="4663440" cy="201168"/>
           </a:xfrm>
           <a:prstGeom prst="rect">
@@ -3628,7 +4441,7 @@
         </p:nvSpPr>
         <p:spPr>
           <a:xfrm>
-            <a:off x="914400" y="2432304"/>
+            <a:off x="792785" y="2752344"/>
             <a:ext cx="4663440" cy="201168"/>
           </a:xfrm>
           <a:prstGeom prst="rect">
@@ -3664,7 +4477,7 @@
         </p:nvSpPr>
         <p:spPr>
           <a:xfrm>
-            <a:off x="731520" y="2743200"/>
+            <a:off x="609905" y="3063240"/>
             <a:ext cx="45720" cy="475488"/>
           </a:xfrm>
           <a:prstGeom prst="rect">
@@ -3708,7 +4521,7 @@
         </p:nvSpPr>
         <p:spPr>
           <a:xfrm>
-            <a:off x="777240" y="2743200"/>
+            <a:off x="655625" y="3063240"/>
             <a:ext cx="4983480" cy="475488"/>
           </a:xfrm>
           <a:prstGeom prst="roundRect">
@@ -3754,7 +4567,7 @@
         </p:nvSpPr>
         <p:spPr>
           <a:xfrm>
-            <a:off x="914400" y="2770632"/>
+            <a:off x="792785" y="3090672"/>
             <a:ext cx="4663440" cy="201168"/>
           </a:xfrm>
           <a:prstGeom prst="rect">
@@ -3788,7 +4601,7 @@
         </p:nvSpPr>
         <p:spPr>
           <a:xfrm>
-            <a:off x="914400" y="2980944"/>
+            <a:off x="792785" y="3300984"/>
             <a:ext cx="4663440" cy="201168"/>
           </a:xfrm>
           <a:prstGeom prst="rect">
@@ -3824,7 +4637,7 @@
         </p:nvSpPr>
         <p:spPr>
           <a:xfrm>
-            <a:off x="731520" y="3291840"/>
+            <a:off x="609905" y="3611880"/>
             <a:ext cx="45720" cy="475488"/>
           </a:xfrm>
           <a:prstGeom prst="rect">
@@ -3868,7 +4681,7 @@
         </p:nvSpPr>
         <p:spPr>
           <a:xfrm>
-            <a:off x="777240" y="3291840"/>
+            <a:off x="655625" y="3611880"/>
             <a:ext cx="4983480" cy="475488"/>
           </a:xfrm>
           <a:prstGeom prst="roundRect">
@@ -3914,7 +4727,7 @@
         </p:nvSpPr>
         <p:spPr>
           <a:xfrm>
-            <a:off x="914400" y="3319272"/>
+            <a:off x="792785" y="3639312"/>
             <a:ext cx="4663440" cy="201168"/>
           </a:xfrm>
           <a:prstGeom prst="rect">
@@ -3948,7 +4761,7 @@
         </p:nvSpPr>
         <p:spPr>
           <a:xfrm>
-            <a:off x="914400" y="3529584"/>
+            <a:off x="792785" y="3849624"/>
             <a:ext cx="4663440" cy="201168"/>
           </a:xfrm>
           <a:prstGeom prst="rect">
@@ -3984,7 +4797,7 @@
         </p:nvSpPr>
         <p:spPr>
           <a:xfrm>
-            <a:off x="731520" y="3840480"/>
+            <a:off x="609905" y="4160520"/>
             <a:ext cx="45720" cy="475488"/>
           </a:xfrm>
           <a:prstGeom prst="rect">
@@ -4028,7 +4841,7 @@
         </p:nvSpPr>
         <p:spPr>
           <a:xfrm>
-            <a:off x="777240" y="3840480"/>
+            <a:off x="655625" y="4160520"/>
             <a:ext cx="4983480" cy="475488"/>
           </a:xfrm>
           <a:prstGeom prst="roundRect">
@@ -4074,7 +4887,7 @@
         </p:nvSpPr>
         <p:spPr>
           <a:xfrm>
-            <a:off x="914400" y="3867912"/>
+            <a:off x="792785" y="4187952"/>
             <a:ext cx="4663440" cy="201168"/>
           </a:xfrm>
           <a:prstGeom prst="rect">
@@ -4108,7 +4921,7 @@
         </p:nvSpPr>
         <p:spPr>
           <a:xfrm>
-            <a:off x="914400" y="4078224"/>
+            <a:off x="792785" y="4398264"/>
             <a:ext cx="4663440" cy="201168"/>
           </a:xfrm>
           <a:prstGeom prst="rect">
@@ -4138,13 +4951,13 @@
       </p:sp>
       <p:sp>
         <p:nvSpPr>
-          <p:cNvPr id="28" name="Rectangle 27"/>
+          <p:cNvPr id="32" name="Rectangle 31"/>
           <p:cNvSpPr/>
           <p:nvPr/>
         </p:nvSpPr>
         <p:spPr>
           <a:xfrm>
-            <a:off x="731520" y="4389120"/>
+            <a:off x="609905" y="4720589"/>
             <a:ext cx="45720" cy="475488"/>
           </a:xfrm>
           <a:prstGeom prst="rect">
@@ -4182,13 +4995,13 @@
       </p:sp>
       <p:sp>
         <p:nvSpPr>
-          <p:cNvPr id="29" name="Rounded Rectangle 28"/>
+          <p:cNvPr id="33" name="Rounded Rectangle 32"/>
           <p:cNvSpPr/>
           <p:nvPr/>
         </p:nvSpPr>
         <p:spPr>
           <a:xfrm>
-            <a:off x="777240" y="4389120"/>
+            <a:off x="655625" y="4720589"/>
             <a:ext cx="4983480" cy="475488"/>
           </a:xfrm>
           <a:prstGeom prst="roundRect">
@@ -4228,13 +5041,13 @@
       </p:sp>
       <p:sp>
         <p:nvSpPr>
-          <p:cNvPr id="30" name="TextBox 29"/>
+          <p:cNvPr id="34" name="TextBox 33"/>
           <p:cNvSpPr txBox="1"/>
           <p:nvPr/>
         </p:nvSpPr>
         <p:spPr>
           <a:xfrm>
-            <a:off x="914400" y="4416552"/>
+            <a:off x="792785" y="4748022"/>
             <a:ext cx="4663440" cy="201168"/>
           </a:xfrm>
           <a:prstGeom prst="rect">
@@ -4255,20 +5068,20 @@
                 </a:solidFill>
                 <a:latin typeface="Segoe UI"/>
               </a:rPr>
-              <a:t>Spiritual AI Guru Bot</a:t>
-            </a:r>
-          </a:p>
-        </p:txBody>
-      </p:sp>
-      <p:sp>
-        <p:nvSpPr>
-          <p:cNvPr id="31" name="TextBox 30"/>
+              <a:t>VPS &amp; Docker Deploy</a:t>
+            </a:r>
+          </a:p>
+        </p:txBody>
+      </p:sp>
+      <p:sp>
+        <p:nvSpPr>
+          <p:cNvPr id="35" name="TextBox 34"/>
           <p:cNvSpPr txBox="1"/>
           <p:nvPr/>
         </p:nvSpPr>
         <p:spPr>
           <a:xfrm>
-            <a:off x="914400" y="4626864"/>
+            <a:off x="792785" y="4958333"/>
             <a:ext cx="4663440" cy="201168"/>
           </a:xfrm>
           <a:prstGeom prst="rect">
@@ -4291,166 +5104,6 @@
               </a:defRPr>
             </a:pPr>
             <a:r>
-              <a:t>AI-powered spiritual chatbot — faith-specific guidance, scripture references</a:t>
-            </a:r>
-          </a:p>
-        </p:txBody>
-      </p:sp>
-      <p:sp>
-        <p:nvSpPr>
-          <p:cNvPr id="32" name="Rectangle 31"/>
-          <p:cNvSpPr/>
-          <p:nvPr/>
-        </p:nvSpPr>
-        <p:spPr>
-          <a:xfrm>
-            <a:off x="731520" y="4937759"/>
-            <a:ext cx="45720" cy="475488"/>
-          </a:xfrm>
-          <a:prstGeom prst="rect">
-            <a:avLst/>
-          </a:prstGeom>
-          <a:solidFill>
-            <a:srgbClr val="2563EB"/>
-          </a:solidFill>
-          <a:ln>
-            <a:noFill/>
-          </a:ln>
-        </p:spPr>
-        <p:style>
-          <a:lnRef idx="1">
-            <a:schemeClr val="accent1"/>
-          </a:lnRef>
-          <a:fillRef idx="3">
-            <a:schemeClr val="accent1"/>
-          </a:fillRef>
-          <a:effectRef idx="2">
-            <a:schemeClr val="accent1"/>
-          </a:effectRef>
-          <a:fontRef idx="minor">
-            <a:schemeClr val="lt1"/>
-          </a:fontRef>
-        </p:style>
-        <p:txBody>
-          <a:bodyPr rtlCol="0" anchor="ctr"/>
-          <a:lstStyle/>
-          <a:p>
-            <a:pPr algn="ctr"/>
-            <a:endParaRPr/>
-          </a:p>
-        </p:txBody>
-      </p:sp>
-      <p:sp>
-        <p:nvSpPr>
-          <p:cNvPr id="33" name="Rounded Rectangle 32"/>
-          <p:cNvSpPr/>
-          <p:nvPr/>
-        </p:nvSpPr>
-        <p:spPr>
-          <a:xfrm>
-            <a:off x="777240" y="4937759"/>
-            <a:ext cx="4983480" cy="475488"/>
-          </a:xfrm>
-          <a:prstGeom prst="roundRect">
-            <a:avLst/>
-          </a:prstGeom>
-          <a:solidFill>
-            <a:srgbClr val="F8FAFC"/>
-          </a:solidFill>
-          <a:ln w="9525">
-            <a:solidFill>
-              <a:srgbClr val="E2E8F0"/>
-            </a:solidFill>
-          </a:ln>
-        </p:spPr>
-        <p:style>
-          <a:lnRef idx="1">
-            <a:schemeClr val="accent1"/>
-          </a:lnRef>
-          <a:fillRef idx="3">
-            <a:schemeClr val="accent1"/>
-          </a:fillRef>
-          <a:effectRef idx="2">
-            <a:schemeClr val="accent1"/>
-          </a:effectRef>
-          <a:fontRef idx="minor">
-            <a:schemeClr val="lt1"/>
-          </a:fontRef>
-        </p:style>
-        <p:txBody>
-          <a:bodyPr rtlCol="0" anchor="ctr"/>
-          <a:lstStyle/>
-          <a:p>
-            <a:pPr algn="ctr"/>
-            <a:endParaRPr/>
-          </a:p>
-        </p:txBody>
-      </p:sp>
-      <p:sp>
-        <p:nvSpPr>
-          <p:cNvPr id="34" name="TextBox 33"/>
-          <p:cNvSpPr txBox="1"/>
-          <p:nvPr/>
-        </p:nvSpPr>
-        <p:spPr>
-          <a:xfrm>
-            <a:off x="914400" y="4965192"/>
-            <a:ext cx="4663440" cy="201168"/>
-          </a:xfrm>
-          <a:prstGeom prst="rect">
-            <a:avLst/>
-          </a:prstGeom>
-          <a:noFill/>
-        </p:spPr>
-        <p:txBody>
-          <a:bodyPr wrap="square">
-            <a:spAutoFit/>
-          </a:bodyPr>
-          <a:lstStyle/>
-          <a:p>
-            <a:r>
-              <a:rPr sz="1200" b="1">
-                <a:solidFill>
-                  <a:srgbClr val="1F2937"/>
-                </a:solidFill>
-                <a:latin typeface="Segoe UI"/>
-              </a:rPr>
-              <a:t>VPS &amp; Docker Deploy</a:t>
-            </a:r>
-          </a:p>
-        </p:txBody>
-      </p:sp>
-      <p:sp>
-        <p:nvSpPr>
-          <p:cNvPr id="35" name="TextBox 34"/>
-          <p:cNvSpPr txBox="1"/>
-          <p:nvPr/>
-        </p:nvSpPr>
-        <p:spPr>
-          <a:xfrm>
-            <a:off x="914400" y="5175503"/>
-            <a:ext cx="4663440" cy="201168"/>
-          </a:xfrm>
-          <a:prstGeom prst="rect">
-            <a:avLst/>
-          </a:prstGeom>
-          <a:noFill/>
-        </p:spPr>
-        <p:txBody>
-          <a:bodyPr wrap="square">
-            <a:spAutoFit/>
-          </a:bodyPr>
-          <a:lstStyle/>
-          <a:p>
-            <a:pPr algn="l">
-              <a:defRPr sz="900" b="0">
-                <a:solidFill>
-                  <a:srgbClr val="6B7280"/>
-                </a:solidFill>
-                <a:latin typeface="Segoe UI"/>
-              </a:defRPr>
-            </a:pPr>
-            <a:r>
               <a:t>Production VPS, Docker orchestration, SSL/TLS, domain, monitoring</a:t>
             </a:r>
           </a:p>
@@ -4464,7 +5117,7 @@
         </p:nvSpPr>
         <p:spPr>
           <a:xfrm>
-            <a:off x="6217920" y="1600200"/>
+            <a:off x="6096305" y="1920240"/>
             <a:ext cx="5577840" cy="4754880"/>
           </a:xfrm>
           <a:prstGeom prst="roundRect">
@@ -4510,7 +5163,7 @@
         </p:nvSpPr>
         <p:spPr>
           <a:xfrm>
-            <a:off x="6492240" y="1737360"/>
+            <a:off x="6370625" y="2057400"/>
             <a:ext cx="4572000" cy="320040"/>
           </a:xfrm>
           <a:prstGeom prst="rect">
@@ -4546,7 +5199,7 @@
         </p:nvSpPr>
         <p:spPr>
           <a:xfrm>
-            <a:off x="6492240" y="2011680"/>
+            <a:off x="6370625" y="2331720"/>
             <a:ext cx="640080" cy="22860"/>
           </a:xfrm>
           <a:prstGeom prst="rect">
@@ -4590,7 +5243,7 @@
         </p:nvSpPr>
         <p:spPr>
           <a:xfrm>
-            <a:off x="6492240" y="2249424"/>
+            <a:off x="6370625" y="2569464"/>
             <a:ext cx="164592" cy="164592"/>
           </a:xfrm>
           <a:prstGeom prst="ellipse">
@@ -4642,7 +5295,7 @@
         </p:nvSpPr>
         <p:spPr>
           <a:xfrm>
-            <a:off x="6720840" y="2212848"/>
+            <a:off x="6599225" y="2532888"/>
             <a:ext cx="4846320" cy="182880"/>
           </a:xfrm>
           <a:prstGeom prst="rect">
@@ -4679,13 +5332,13 @@
       </p:sp>
       <p:sp>
         <p:nvSpPr>
-          <p:cNvPr id="41" name="Oval 40"/>
+          <p:cNvPr id="43" name="Oval 42"/>
           <p:cNvSpPr/>
           <p:nvPr/>
         </p:nvSpPr>
         <p:spPr>
           <a:xfrm>
-            <a:off x="6492240" y="2615184"/>
+            <a:off x="6370625" y="2958084"/>
             <a:ext cx="164592" cy="164592"/>
           </a:xfrm>
           <a:prstGeom prst="ellipse">
@@ -4731,13 +5384,13 @@
       </p:sp>
       <p:sp>
         <p:nvSpPr>
-          <p:cNvPr id="42" name="TextBox 41"/>
+          <p:cNvPr id="44" name="TextBox 43"/>
           <p:cNvSpPr txBox="1"/>
           <p:nvPr/>
         </p:nvSpPr>
         <p:spPr>
           <a:xfrm>
-            <a:off x="6720840" y="2578608"/>
+            <a:off x="6599225" y="2921508"/>
             <a:ext cx="4846320" cy="182880"/>
           </a:xfrm>
           <a:prstGeom prst="rect">
@@ -4758,7 +5411,7 @@
                 </a:solidFill>
                 <a:latin typeface="Segoe UI"/>
               </a:rPr>
-              <a:t>Live Streaming</a:t>
+              <a:t>Support &amp; Payments</a:t>
             </a:r>
             <a:r>
               <a:rPr sz="900" b="0">
@@ -4767,20 +5420,20 @@
                 </a:solidFill>
                 <a:latin typeface="Segoe UI"/>
               </a:rPr>
-              <a:t>  —  Embedded player, LIVE badge, viewer count, playback controls, recording gating</a:t>
-            </a:r>
-          </a:p>
-        </p:txBody>
-      </p:sp>
-      <p:sp>
-        <p:nvSpPr>
-          <p:cNvPr id="43" name="Oval 42"/>
+              <a:t>  —  One-time/Monthly, $16/$36/$100/$250 presets, 5% platform fee</a:t>
+            </a:r>
+          </a:p>
+        </p:txBody>
+      </p:sp>
+      <p:sp>
+        <p:nvSpPr>
+          <p:cNvPr id="45" name="Oval 44"/>
           <p:cNvSpPr/>
           <p:nvPr/>
         </p:nvSpPr>
         <p:spPr>
           <a:xfrm>
-            <a:off x="6492240" y="2980944"/>
+            <a:off x="6370625" y="3323843"/>
             <a:ext cx="164592" cy="164592"/>
           </a:xfrm>
           <a:prstGeom prst="ellipse">
@@ -4826,13 +5479,13 @@
       </p:sp>
       <p:sp>
         <p:nvSpPr>
-          <p:cNvPr id="44" name="TextBox 43"/>
+          <p:cNvPr id="46" name="TextBox 45"/>
           <p:cNvSpPr txBox="1"/>
           <p:nvPr/>
         </p:nvSpPr>
         <p:spPr>
           <a:xfrm>
-            <a:off x="6720840" y="2944368"/>
+            <a:off x="6599225" y="3287267"/>
             <a:ext cx="4846320" cy="182880"/>
           </a:xfrm>
           <a:prstGeom prst="rect">
@@ -4853,7 +5506,7 @@
                 </a:solidFill>
                 <a:latin typeface="Segoe UI"/>
               </a:rPr>
-              <a:t>Support &amp; Payments</a:t>
+              <a:t>Events &amp; Calendar</a:t>
             </a:r>
             <a:r>
               <a:rPr sz="900" b="0">
@@ -4862,20 +5515,20 @@
                 </a:solidFill>
                 <a:latin typeface="Segoe UI"/>
               </a:rPr>
-              <a:t>  —  One-time/Monthly, $16/$36/$100/$250 presets, 5% platform fee</a:t>
-            </a:r>
-          </a:p>
-        </p:txBody>
-      </p:sp>
-      <p:sp>
-        <p:nvSpPr>
-          <p:cNvPr id="45" name="Oval 44"/>
+              <a:t>  —  Event management, upcoming events sidebar, mini calendar, ICS export</a:t>
+            </a:r>
+          </a:p>
+        </p:txBody>
+      </p:sp>
+      <p:sp>
+        <p:nvSpPr>
+          <p:cNvPr id="47" name="Oval 46"/>
           <p:cNvSpPr/>
           <p:nvPr/>
         </p:nvSpPr>
         <p:spPr>
           <a:xfrm>
-            <a:off x="6492240" y="3346703"/>
+            <a:off x="6370625" y="3689603"/>
             <a:ext cx="164592" cy="164592"/>
           </a:xfrm>
           <a:prstGeom prst="ellipse">
@@ -4921,13 +5574,13 @@
       </p:sp>
       <p:sp>
         <p:nvSpPr>
-          <p:cNvPr id="46" name="TextBox 45"/>
+          <p:cNvPr id="48" name="TextBox 47"/>
           <p:cNvSpPr txBox="1"/>
           <p:nvPr/>
         </p:nvSpPr>
         <p:spPr>
           <a:xfrm>
-            <a:off x="6720840" y="3310127"/>
+            <a:off x="6599225" y="3653027"/>
             <a:ext cx="4846320" cy="182880"/>
           </a:xfrm>
           <a:prstGeom prst="rect">
@@ -4948,7 +5601,7 @@
                 </a:solidFill>
                 <a:latin typeface="Segoe UI"/>
               </a:rPr>
-              <a:t>Events &amp; Calendar</a:t>
+              <a:t>Spiritual AI Guru Bot</a:t>
             </a:r>
             <a:r>
               <a:rPr sz="900" b="0">
@@ -4957,20 +5610,20 @@
                 </a:solidFill>
                 <a:latin typeface="Segoe UI"/>
               </a:rPr>
-              <a:t>  —  Event management, upcoming events sidebar, mini calendar, ICS export</a:t>
-            </a:r>
-          </a:p>
-        </p:txBody>
-      </p:sp>
-      <p:sp>
-        <p:nvSpPr>
-          <p:cNvPr id="47" name="Oval 46"/>
+              <a:t>  —  Faith-specific AI chatbot, scripture Q&amp;A, community-context aware</a:t>
+            </a:r>
+          </a:p>
+        </p:txBody>
+      </p:sp>
+      <p:sp>
+        <p:nvSpPr>
+          <p:cNvPr id="49" name="Oval 48"/>
           <p:cNvSpPr/>
           <p:nvPr/>
         </p:nvSpPr>
         <p:spPr>
           <a:xfrm>
-            <a:off x="6492240" y="3712463"/>
+            <a:off x="6370625" y="4055363"/>
             <a:ext cx="164592" cy="164592"/>
           </a:xfrm>
           <a:prstGeom prst="ellipse">
@@ -5016,13 +5669,13 @@
       </p:sp>
       <p:sp>
         <p:nvSpPr>
-          <p:cNvPr id="48" name="TextBox 47"/>
+          <p:cNvPr id="50" name="TextBox 49"/>
           <p:cNvSpPr txBox="1"/>
           <p:nvPr/>
         </p:nvSpPr>
         <p:spPr>
           <a:xfrm>
-            <a:off x="6720840" y="3675887"/>
+            <a:off x="6599225" y="4018787"/>
             <a:ext cx="4846320" cy="182880"/>
           </a:xfrm>
           <a:prstGeom prst="rect">
@@ -5043,7 +5696,7 @@
                 </a:solidFill>
                 <a:latin typeface="Segoe UI"/>
               </a:rPr>
-              <a:t>Spiritual AI Guru Bot</a:t>
+              <a:t>Private Messaging</a:t>
             </a:r>
             <a:r>
               <a:rPr sz="900" b="0">
@@ -5052,20 +5705,20 @@
                 </a:solidFill>
                 <a:latin typeface="Segoe UI"/>
               </a:rPr>
-              <a:t>  —  Faith-specific AI chatbot, scripture Q&amp;A, community-context aware</a:t>
-            </a:r>
-          </a:p>
-        </p:txBody>
-      </p:sp>
-      <p:sp>
-        <p:nvSpPr>
-          <p:cNvPr id="49" name="Oval 48"/>
+              <a:t>  —  Threaded User↔Admin inbox, real-time, block capability</a:t>
+            </a:r>
+          </a:p>
+        </p:txBody>
+      </p:sp>
+      <p:sp>
+        <p:nvSpPr>
+          <p:cNvPr id="51" name="Oval 50"/>
           <p:cNvSpPr/>
           <p:nvPr/>
         </p:nvSpPr>
         <p:spPr>
           <a:xfrm>
-            <a:off x="6492240" y="4078223"/>
+            <a:off x="6370625" y="4421123"/>
             <a:ext cx="164592" cy="164592"/>
           </a:xfrm>
           <a:prstGeom prst="ellipse">
@@ -5111,13 +5764,13 @@
       </p:sp>
       <p:sp>
         <p:nvSpPr>
-          <p:cNvPr id="50" name="TextBox 49"/>
+          <p:cNvPr id="52" name="TextBox 51"/>
           <p:cNvSpPr txBox="1"/>
           <p:nvPr/>
         </p:nvSpPr>
         <p:spPr>
           <a:xfrm>
-            <a:off x="6720840" y="4041647"/>
+            <a:off x="6599225" y="4384547"/>
             <a:ext cx="4846320" cy="182880"/>
           </a:xfrm>
           <a:prstGeom prst="rect">
@@ -5138,7 +5791,7 @@
                 </a:solidFill>
                 <a:latin typeface="Segoe UI"/>
               </a:rPr>
-              <a:t>Private Messaging</a:t>
+              <a:t>Community Management</a:t>
             </a:r>
             <a:r>
               <a:rPr sz="900" b="0">
@@ -5147,20 +5800,20 @@
                 </a:solidFill>
                 <a:latin typeface="Segoe UI"/>
               </a:rPr>
-              <a:t>  —  Threaded User↔Admin inbox, real-time, block capability</a:t>
-            </a:r>
-          </a:p>
-        </p:txBody>
-      </p:sp>
-      <p:sp>
-        <p:nvSpPr>
-          <p:cNvPr id="51" name="Oval 50"/>
+              <a:t>  —  Onboarding, branding, member management, stream scheduling</a:t>
+            </a:r>
+          </a:p>
+        </p:txBody>
+      </p:sp>
+      <p:sp>
+        <p:nvSpPr>
+          <p:cNvPr id="53" name="Oval 52"/>
           <p:cNvSpPr/>
           <p:nvPr/>
         </p:nvSpPr>
         <p:spPr>
           <a:xfrm>
-            <a:off x="6492240" y="4443983"/>
+            <a:off x="6370625" y="4786884"/>
             <a:ext cx="164592" cy="164592"/>
           </a:xfrm>
           <a:prstGeom prst="ellipse">
@@ -5206,13 +5859,13 @@
       </p:sp>
       <p:sp>
         <p:nvSpPr>
-          <p:cNvPr id="52" name="TextBox 51"/>
+          <p:cNvPr id="54" name="TextBox 53"/>
           <p:cNvSpPr txBox="1"/>
           <p:nvPr/>
         </p:nvSpPr>
         <p:spPr>
           <a:xfrm>
-            <a:off x="6720840" y="4407407"/>
+            <a:off x="6599225" y="4750308"/>
             <a:ext cx="4846320" cy="182880"/>
           </a:xfrm>
           <a:prstGeom prst="rect">
@@ -5233,7 +5886,7 @@
                 </a:solidFill>
                 <a:latin typeface="Segoe UI"/>
               </a:rPr>
-              <a:t>Community Management</a:t>
+              <a:t>Admin Dashboard</a:t>
             </a:r>
             <a:r>
               <a:rPr sz="900" b="0">
@@ -5242,20 +5895,20 @@
                 </a:solidFill>
                 <a:latin typeface="Segoe UI"/>
               </a:rPr>
-              <a:t>  —  Onboarding, branding, member management, stream scheduling</a:t>
-            </a:r>
-          </a:p>
-        </p:txBody>
-      </p:sp>
-      <p:sp>
-        <p:nvSpPr>
-          <p:cNvPr id="53" name="Oval 52"/>
+              <a:t>  —  GMV, users, subscribers metrics, community approve/suspend</a:t>
+            </a:r>
+          </a:p>
+        </p:txBody>
+      </p:sp>
+      <p:sp>
+        <p:nvSpPr>
+          <p:cNvPr id="55" name="Oval 54"/>
           <p:cNvSpPr/>
           <p:nvPr/>
         </p:nvSpPr>
         <p:spPr>
           <a:xfrm>
-            <a:off x="6492240" y="4809744"/>
+            <a:off x="6370625" y="5152644"/>
             <a:ext cx="164592" cy="164592"/>
           </a:xfrm>
           <a:prstGeom prst="ellipse">
@@ -5301,13 +5954,13 @@
       </p:sp>
       <p:sp>
         <p:nvSpPr>
-          <p:cNvPr id="54" name="TextBox 53"/>
+          <p:cNvPr id="56" name="TextBox 55"/>
           <p:cNvSpPr txBox="1"/>
           <p:nvPr/>
         </p:nvSpPr>
         <p:spPr>
           <a:xfrm>
-            <a:off x="6720840" y="4773168"/>
+            <a:off x="6599225" y="5116068"/>
             <a:ext cx="4846320" cy="182880"/>
           </a:xfrm>
           <a:prstGeom prst="rect">
@@ -5328,7 +5981,7 @@
                 </a:solidFill>
                 <a:latin typeface="Segoe UI"/>
               </a:rPr>
-              <a:t>Admin Dashboard</a:t>
+              <a:t>VPS Production Setup</a:t>
             </a:r>
             <a:r>
               <a:rPr sz="900" b="0">
@@ -5337,20 +5990,20 @@
                 </a:solidFill>
                 <a:latin typeface="Segoe UI"/>
               </a:rPr>
-              <a:t>  —  GMV, users, subscribers metrics, community approve/suspend</a:t>
-            </a:r>
-          </a:p>
-        </p:txBody>
-      </p:sp>
-      <p:sp>
-        <p:nvSpPr>
-          <p:cNvPr id="55" name="Oval 54"/>
+              <a:t>  —  Server provisioning, Docker deploy, SSL, domain, backups</a:t>
+            </a:r>
+          </a:p>
+        </p:txBody>
+      </p:sp>
+      <p:sp>
+        <p:nvSpPr>
+          <p:cNvPr id="57" name="Oval 56"/>
           <p:cNvSpPr/>
           <p:nvPr/>
         </p:nvSpPr>
         <p:spPr>
           <a:xfrm>
-            <a:off x="6492240" y="5175504"/>
+            <a:off x="6370625" y="5518404"/>
             <a:ext cx="164592" cy="164592"/>
           </a:xfrm>
           <a:prstGeom prst="ellipse">
@@ -5396,13 +6049,13 @@
       </p:sp>
       <p:sp>
         <p:nvSpPr>
-          <p:cNvPr id="56" name="TextBox 55"/>
+          <p:cNvPr id="58" name="TextBox 57"/>
           <p:cNvSpPr txBox="1"/>
           <p:nvPr/>
         </p:nvSpPr>
         <p:spPr>
           <a:xfrm>
-            <a:off x="6720840" y="5138928"/>
+            <a:off x="6599225" y="5481828"/>
             <a:ext cx="4846320" cy="182880"/>
           </a:xfrm>
           <a:prstGeom prst="rect">
@@ -5423,7 +6076,7 @@
                 </a:solidFill>
                 <a:latin typeface="Segoe UI"/>
               </a:rPr>
-              <a:t>VPS Production Setup</a:t>
+              <a:t>Responsive UI</a:t>
             </a:r>
             <a:r>
               <a:rPr sz="900" b="0">
@@ -5432,73 +6085,21 @@
                 </a:solidFill>
                 <a:latin typeface="Segoe UI"/>
               </a:rPr>
-              <a:t>  —  Server provisioning, Docker deploy, SSL, domain, backups</a:t>
-            </a:r>
-          </a:p>
-        </p:txBody>
-      </p:sp>
-      <p:sp>
-        <p:nvSpPr>
-          <p:cNvPr id="57" name="Oval 56"/>
-          <p:cNvSpPr/>
-          <p:nvPr/>
-        </p:nvSpPr>
-        <p:spPr>
-          <a:xfrm>
-            <a:off x="6492240" y="5541264"/>
-            <a:ext cx="164592" cy="164592"/>
-          </a:xfrm>
-          <a:prstGeom prst="ellipse">
-            <a:avLst/>
-          </a:prstGeom>
-          <a:solidFill>
-            <a:srgbClr val="10B981"/>
-          </a:solidFill>
-          <a:ln>
-            <a:noFill/>
-          </a:ln>
-        </p:spPr>
-        <p:style>
-          <a:lnRef idx="1">
-            <a:schemeClr val="accent1"/>
-          </a:lnRef>
-          <a:fillRef idx="3">
-            <a:schemeClr val="accent1"/>
-          </a:fillRef>
-          <a:effectRef idx="2">
-            <a:schemeClr val="accent1"/>
-          </a:effectRef>
-          <a:fontRef idx="minor">
-            <a:schemeClr val="lt1"/>
-          </a:fontRef>
-        </p:style>
-        <p:txBody>
-          <a:bodyPr rtlCol="0" anchor="ctr"/>
-          <a:lstStyle/>
-          <a:p>
-            <a:pPr algn="ctr">
-              <a:defRPr sz="700" b="1">
-                <a:solidFill>
-                  <a:srgbClr val="FFFFFF"/>
-                </a:solidFill>
-              </a:defRPr>
-            </a:pPr>
-            <a:r>
-              <a:t>✓</a:t>
-            </a:r>
-          </a:p>
-        </p:txBody>
-      </p:sp>
-      <p:sp>
-        <p:nvSpPr>
-          <p:cNvPr id="58" name="TextBox 57"/>
+              <a:t>  —  Apple-inspired design, two-column layout, Star of David branding</a:t>
+            </a:r>
+          </a:p>
+        </p:txBody>
+      </p:sp>
+      <p:sp>
+        <p:nvSpPr>
+          <p:cNvPr id="59" name="TextBox 58"/>
           <p:cNvSpPr txBox="1"/>
           <p:nvPr/>
         </p:nvSpPr>
         <p:spPr>
           <a:xfrm>
-            <a:off x="6720840" y="5504688"/>
-            <a:ext cx="4846320" cy="182880"/>
+            <a:off x="609905" y="6812280"/>
+            <a:ext cx="2743200" cy="274320"/>
           </a:xfrm>
           <a:prstGeom prst="rect">
             <a:avLst/>
@@ -5511,49 +6112,6 @@
           </a:bodyPr>
           <a:lstStyle/>
           <a:p>
-            <a:r>
-              <a:rPr sz="1100" b="1">
-                <a:solidFill>
-                  <a:srgbClr val="1F2937"/>
-                </a:solidFill>
-                <a:latin typeface="Segoe UI"/>
-              </a:rPr>
-              <a:t>Responsive UI</a:t>
-            </a:r>
-            <a:r>
-              <a:rPr sz="900" b="0">
-                <a:solidFill>
-                  <a:srgbClr val="6B7280"/>
-                </a:solidFill>
-                <a:latin typeface="Segoe UI"/>
-              </a:rPr>
-              <a:t>  —  Apple-inspired design, two-column layout, Star of David branding</a:t>
-            </a:r>
-          </a:p>
-        </p:txBody>
-      </p:sp>
-      <p:sp>
-        <p:nvSpPr>
-          <p:cNvPr id="59" name="TextBox 58"/>
-          <p:cNvSpPr txBox="1"/>
-          <p:nvPr/>
-        </p:nvSpPr>
-        <p:spPr>
-          <a:xfrm>
-            <a:off x="731520" y="6492240"/>
-            <a:ext cx="2743200" cy="274320"/>
-          </a:xfrm>
-          <a:prstGeom prst="rect">
-            <a:avLst/>
-          </a:prstGeom>
-          <a:noFill/>
-        </p:spPr>
-        <p:txBody>
-          <a:bodyPr wrap="square">
-            <a:spAutoFit/>
-          </a:bodyPr>
-          <a:lstStyle/>
-          <a:p>
             <a:pPr algn="l">
               <a:defRPr sz="900" b="0">
                 <a:solidFill>
@@ -5576,7 +6134,7 @@
         </p:nvSpPr>
         <p:spPr>
           <a:xfrm>
-            <a:off x="9144000" y="6492240"/>
+            <a:off x="9022385" y="6812280"/>
             <a:ext cx="2560320" cy="274320"/>
           </a:xfrm>
           <a:prstGeom prst="rect">
@@ -5727,7 +6285,7 @@
         </p:nvSpPr>
         <p:spPr>
           <a:xfrm>
-            <a:off x="914400" y="274320"/>
+            <a:off x="1001268" y="274320"/>
             <a:ext cx="1097280" cy="457200"/>
           </a:xfrm>
           <a:prstGeom prst="rect">
@@ -5750,6 +6308,7 @@
               </a:defRPr>
             </a:pPr>
             <a:r>
+              <a:rPr dirty="0"/>
               <a:t>D.A.K</a:t>
             </a:r>
           </a:p>
@@ -5915,7 +6474,7 @@
         </p:nvSpPr>
         <p:spPr>
           <a:xfrm>
-            <a:off x="457200" y="1691640"/>
+            <a:off x="457200" y="1737360"/>
             <a:ext cx="2103120" cy="3977639"/>
           </a:xfrm>
           <a:prstGeom prst="roundRect">
@@ -5961,7 +6520,7 @@
         </p:nvSpPr>
         <p:spPr>
           <a:xfrm>
-            <a:off x="457200" y="1691640"/>
+            <a:off x="457200" y="1737360"/>
             <a:ext cx="2103120" cy="822960"/>
           </a:xfrm>
           <a:prstGeom prst="rect">
@@ -6007,7 +6566,7 @@
         </p:nvSpPr>
         <p:spPr>
           <a:xfrm>
-            <a:off x="566928" y="1801368"/>
+            <a:off x="566928" y="1847088"/>
             <a:ext cx="868680" cy="256032"/>
           </a:xfrm>
           <a:prstGeom prst="roundRect">
@@ -6060,7 +6619,7 @@
         </p:nvSpPr>
         <p:spPr>
           <a:xfrm>
-            <a:off x="566928" y="2121408"/>
+            <a:off x="566928" y="2098548"/>
             <a:ext cx="1883663" cy="411480"/>
           </a:xfrm>
           <a:prstGeom prst="rect">
@@ -6100,7 +6659,7 @@
         </p:nvSpPr>
         <p:spPr>
           <a:xfrm>
-            <a:off x="594360" y="2660904"/>
+            <a:off x="594360" y="2706624"/>
             <a:ext cx="54864" cy="54864"/>
           </a:xfrm>
           <a:prstGeom prst="ellipse">
@@ -6144,7 +6703,7 @@
         </p:nvSpPr>
         <p:spPr>
           <a:xfrm>
-            <a:off x="713232" y="2606040"/>
+            <a:off x="713232" y="2651760"/>
             <a:ext cx="1737360" cy="201168"/>
           </a:xfrm>
           <a:prstGeom prst="rect">
@@ -6180,7 +6739,7 @@
         </p:nvSpPr>
         <p:spPr>
           <a:xfrm>
-            <a:off x="594360" y="2916936"/>
+            <a:off x="594360" y="2962656"/>
             <a:ext cx="54864" cy="54864"/>
           </a:xfrm>
           <a:prstGeom prst="ellipse">
@@ -6224,7 +6783,7 @@
         </p:nvSpPr>
         <p:spPr>
           <a:xfrm>
-            <a:off x="713232" y="2862072"/>
+            <a:off x="713232" y="2907792"/>
             <a:ext cx="1737360" cy="201168"/>
           </a:xfrm>
           <a:prstGeom prst="rect">
@@ -6260,7 +6819,7 @@
         </p:nvSpPr>
         <p:spPr>
           <a:xfrm>
-            <a:off x="594360" y="3172968"/>
+            <a:off x="594360" y="3218688"/>
             <a:ext cx="54864" cy="54864"/>
           </a:xfrm>
           <a:prstGeom prst="ellipse">
@@ -6304,7 +6863,7 @@
         </p:nvSpPr>
         <p:spPr>
           <a:xfrm>
-            <a:off x="713232" y="3118104"/>
+            <a:off x="713232" y="3163824"/>
             <a:ext cx="1737360" cy="201168"/>
           </a:xfrm>
           <a:prstGeom prst="rect">
@@ -6340,7 +6899,7 @@
         </p:nvSpPr>
         <p:spPr>
           <a:xfrm>
-            <a:off x="594360" y="3429000"/>
+            <a:off x="594360" y="3474720"/>
             <a:ext cx="54864" cy="54864"/>
           </a:xfrm>
           <a:prstGeom prst="ellipse">
@@ -6384,7 +6943,7 @@
         </p:nvSpPr>
         <p:spPr>
           <a:xfrm>
-            <a:off x="713232" y="3374136"/>
+            <a:off x="713232" y="3419856"/>
             <a:ext cx="1737360" cy="201168"/>
           </a:xfrm>
           <a:prstGeom prst="rect">
@@ -6420,7 +6979,7 @@
         </p:nvSpPr>
         <p:spPr>
           <a:xfrm>
-            <a:off x="594360" y="3685032"/>
+            <a:off x="594360" y="3730752"/>
             <a:ext cx="54864" cy="54864"/>
           </a:xfrm>
           <a:prstGeom prst="ellipse">
@@ -6464,7 +7023,7 @@
         </p:nvSpPr>
         <p:spPr>
           <a:xfrm>
-            <a:off x="713232" y="3630168"/>
+            <a:off x="713232" y="3675888"/>
             <a:ext cx="1737360" cy="201168"/>
           </a:xfrm>
           <a:prstGeom prst="rect">
@@ -6500,7 +7059,7 @@
         </p:nvSpPr>
         <p:spPr>
           <a:xfrm>
-            <a:off x="594360" y="3941064"/>
+            <a:off x="594360" y="3986784"/>
             <a:ext cx="54864" cy="54864"/>
           </a:xfrm>
           <a:prstGeom prst="ellipse">
@@ -6544,7 +7103,7 @@
         </p:nvSpPr>
         <p:spPr>
           <a:xfrm>
-            <a:off x="713232" y="3886200"/>
+            <a:off x="713232" y="3931920"/>
             <a:ext cx="1737360" cy="201168"/>
           </a:xfrm>
           <a:prstGeom prst="rect">
@@ -6580,7 +7139,7 @@
         </p:nvSpPr>
         <p:spPr>
           <a:xfrm>
-            <a:off x="594360" y="4197096"/>
+            <a:off x="594360" y="4242816"/>
             <a:ext cx="54864" cy="54864"/>
           </a:xfrm>
           <a:prstGeom prst="ellipse">
@@ -6624,7 +7183,7 @@
         </p:nvSpPr>
         <p:spPr>
           <a:xfrm>
-            <a:off x="713232" y="4142232"/>
+            <a:off x="713232" y="4187952"/>
             <a:ext cx="1737360" cy="201168"/>
           </a:xfrm>
           <a:prstGeom prst="rect">
@@ -6660,7 +7219,7 @@
         </p:nvSpPr>
         <p:spPr>
           <a:xfrm>
-            <a:off x="2569463" y="3474720"/>
+            <a:off x="2569463" y="3520440"/>
             <a:ext cx="91440" cy="182880"/>
           </a:xfrm>
           <a:prstGeom prst="rightArrow">
@@ -6704,7 +7263,7 @@
         </p:nvSpPr>
         <p:spPr>
           <a:xfrm>
-            <a:off x="2670048" y="1691640"/>
+            <a:off x="2670048" y="1737360"/>
             <a:ext cx="2103120" cy="3977639"/>
           </a:xfrm>
           <a:prstGeom prst="roundRect">
@@ -6750,7 +7309,7 @@
         </p:nvSpPr>
         <p:spPr>
           <a:xfrm>
-            <a:off x="2670048" y="1691640"/>
+            <a:off x="2670048" y="1737360"/>
             <a:ext cx="2103120" cy="822960"/>
           </a:xfrm>
           <a:prstGeom prst="rect">
@@ -6796,7 +7355,7 @@
         </p:nvSpPr>
         <p:spPr>
           <a:xfrm>
-            <a:off x="2779776" y="1801368"/>
+            <a:off x="2779776" y="1847088"/>
             <a:ext cx="868680" cy="256032"/>
           </a:xfrm>
           <a:prstGeom prst="roundRect">
@@ -6836,8 +7395,14 @@
               </a:defRPr>
             </a:pPr>
             <a:r>
-              <a:t>WEEK 3–4</a:t>
-            </a:r>
+              <a:rPr dirty="0"/>
+              <a:t>WEEK 3–</a:t>
+            </a:r>
+            <a:r>
+              <a:rPr lang="en-US" dirty="0"/>
+              <a:t>5</a:t>
+            </a:r>
+            <a:endParaRPr dirty="0"/>
           </a:p>
         </p:txBody>
       </p:sp>
@@ -6849,7 +7414,7 @@
         </p:nvSpPr>
         <p:spPr>
           <a:xfrm>
-            <a:off x="2779776" y="2121408"/>
+            <a:off x="2779776" y="2098548"/>
             <a:ext cx="1883663" cy="411480"/>
           </a:xfrm>
           <a:prstGeom prst="rect">
@@ -6889,7 +7454,7 @@
         </p:nvSpPr>
         <p:spPr>
           <a:xfrm>
-            <a:off x="2807208" y="2660904"/>
+            <a:off x="2807208" y="2706624"/>
             <a:ext cx="54864" cy="54864"/>
           </a:xfrm>
           <a:prstGeom prst="ellipse">
@@ -6933,7 +7498,7 @@
         </p:nvSpPr>
         <p:spPr>
           <a:xfrm>
-            <a:off x="2926080" y="2606040"/>
+            <a:off x="2926080" y="2651760"/>
             <a:ext cx="1737360" cy="201168"/>
           </a:xfrm>
           <a:prstGeom prst="rect">
@@ -6973,7 +7538,7 @@
         </p:nvSpPr>
         <p:spPr>
           <a:xfrm>
-            <a:off x="2807208" y="2916936"/>
+            <a:off x="2807208" y="2962656"/>
             <a:ext cx="54864" cy="54864"/>
           </a:xfrm>
           <a:prstGeom prst="ellipse">
@@ -7017,7 +7582,7 @@
         </p:nvSpPr>
         <p:spPr>
           <a:xfrm>
-            <a:off x="2926080" y="2862072"/>
+            <a:off x="2926080" y="2907792"/>
             <a:ext cx="1737360" cy="201168"/>
           </a:xfrm>
           <a:prstGeom prst="rect">
@@ -7053,7 +7618,7 @@
         </p:nvSpPr>
         <p:spPr>
           <a:xfrm>
-            <a:off x="2807208" y="3172968"/>
+            <a:off x="2807208" y="3218688"/>
             <a:ext cx="54864" cy="54864"/>
           </a:xfrm>
           <a:prstGeom prst="ellipse">
@@ -7097,7 +7662,7 @@
         </p:nvSpPr>
         <p:spPr>
           <a:xfrm>
-            <a:off x="2926080" y="3118104"/>
+            <a:off x="2926080" y="3163824"/>
             <a:ext cx="1737360" cy="201168"/>
           </a:xfrm>
           <a:prstGeom prst="rect">
@@ -7133,7 +7698,7 @@
         </p:nvSpPr>
         <p:spPr>
           <a:xfrm>
-            <a:off x="2807208" y="3429000"/>
+            <a:off x="2807208" y="3474720"/>
             <a:ext cx="54864" cy="54864"/>
           </a:xfrm>
           <a:prstGeom prst="ellipse">
@@ -7177,7 +7742,7 @@
         </p:nvSpPr>
         <p:spPr>
           <a:xfrm>
-            <a:off x="2926080" y="3374136"/>
+            <a:off x="2926080" y="3419856"/>
             <a:ext cx="1737360" cy="201168"/>
           </a:xfrm>
           <a:prstGeom prst="rect">
@@ -7213,7 +7778,7 @@
         </p:nvSpPr>
         <p:spPr>
           <a:xfrm>
-            <a:off x="2807208" y="3685032"/>
+            <a:off x="2807208" y="3730752"/>
             <a:ext cx="54864" cy="54864"/>
           </a:xfrm>
           <a:prstGeom prst="ellipse">
@@ -7257,7 +7822,7 @@
         </p:nvSpPr>
         <p:spPr>
           <a:xfrm>
-            <a:off x="2926080" y="3630168"/>
+            <a:off x="2926080" y="3675888"/>
             <a:ext cx="1737360" cy="201168"/>
           </a:xfrm>
           <a:prstGeom prst="rect">
@@ -7293,7 +7858,7 @@
         </p:nvSpPr>
         <p:spPr>
           <a:xfrm>
-            <a:off x="2807208" y="3941064"/>
+            <a:off x="2807208" y="3986784"/>
             <a:ext cx="54864" cy="54864"/>
           </a:xfrm>
           <a:prstGeom prst="ellipse">
@@ -7337,7 +7902,7 @@
         </p:nvSpPr>
         <p:spPr>
           <a:xfrm>
-            <a:off x="2926080" y="3886200"/>
+            <a:off x="2926080" y="3931920"/>
             <a:ext cx="1737360" cy="201168"/>
           </a:xfrm>
           <a:prstGeom prst="rect">
@@ -7373,7 +7938,7 @@
         </p:nvSpPr>
         <p:spPr>
           <a:xfrm>
-            <a:off x="4782312" y="3474720"/>
+            <a:off x="6537960" y="3525012"/>
             <a:ext cx="91440" cy="182880"/>
           </a:xfrm>
           <a:prstGeom prst="rightArrow">
@@ -7417,7 +7982,7 @@
         </p:nvSpPr>
         <p:spPr>
           <a:xfrm>
-            <a:off x="4882896" y="1691640"/>
+            <a:off x="6638544" y="1741932"/>
             <a:ext cx="2103120" cy="3977639"/>
           </a:xfrm>
           <a:prstGeom prst="roundRect">
@@ -7463,7 +8028,7 @@
         </p:nvSpPr>
         <p:spPr>
           <a:xfrm>
-            <a:off x="4882896" y="1691640"/>
+            <a:off x="6638544" y="1741932"/>
             <a:ext cx="2103120" cy="822960"/>
           </a:xfrm>
           <a:prstGeom prst="rect">
@@ -7509,7 +8074,7 @@
         </p:nvSpPr>
         <p:spPr>
           <a:xfrm>
-            <a:off x="4992624" y="1801368"/>
+            <a:off x="6748272" y="1851660"/>
             <a:ext cx="868680" cy="256032"/>
           </a:xfrm>
           <a:prstGeom prst="roundRect">
@@ -7549,8 +8114,22 @@
               </a:defRPr>
             </a:pPr>
             <a:r>
-              <a:t>WEEK 5–6</a:t>
-            </a:r>
+              <a:rPr dirty="0"/>
+              <a:t>WEEK </a:t>
+            </a:r>
+            <a:r>
+              <a:rPr lang="en-US" dirty="0"/>
+              <a:t>6</a:t>
+            </a:r>
+            <a:r>
+              <a:rPr dirty="0"/>
+              <a:t>–</a:t>
+            </a:r>
+            <a:r>
+              <a:rPr lang="en-US" dirty="0"/>
+              <a:t>8</a:t>
+            </a:r>
+            <a:endParaRPr dirty="0"/>
           </a:p>
         </p:txBody>
       </p:sp>
@@ -7562,7 +8141,7 @@
         </p:nvSpPr>
         <p:spPr>
           <a:xfrm>
-            <a:off x="4992624" y="2121408"/>
+            <a:off x="6748272" y="2103120"/>
             <a:ext cx="1883663" cy="411480"/>
           </a:xfrm>
           <a:prstGeom prst="rect">
@@ -7602,7 +8181,7 @@
         </p:nvSpPr>
         <p:spPr>
           <a:xfrm>
-            <a:off x="5020056" y="2660904"/>
+            <a:off x="6775704" y="2711196"/>
             <a:ext cx="54864" cy="54864"/>
           </a:xfrm>
           <a:prstGeom prst="ellipse">
@@ -7646,7 +8225,7 @@
         </p:nvSpPr>
         <p:spPr>
           <a:xfrm>
-            <a:off x="5138928" y="2606040"/>
+            <a:off x="6894576" y="2656332"/>
             <a:ext cx="1737360" cy="201168"/>
           </a:xfrm>
           <a:prstGeom prst="rect">
@@ -7682,7 +8261,7 @@
         </p:nvSpPr>
         <p:spPr>
           <a:xfrm>
-            <a:off x="5020056" y="2916936"/>
+            <a:off x="6775704" y="2967228"/>
             <a:ext cx="54864" cy="54864"/>
           </a:xfrm>
           <a:prstGeom prst="ellipse">
@@ -7726,7 +8305,7 @@
         </p:nvSpPr>
         <p:spPr>
           <a:xfrm>
-            <a:off x="5138928" y="2862072"/>
+            <a:off x="6894576" y="2912364"/>
             <a:ext cx="1737360" cy="201168"/>
           </a:xfrm>
           <a:prstGeom prst="rect">
@@ -7762,7 +8341,7 @@
         </p:nvSpPr>
         <p:spPr>
           <a:xfrm>
-            <a:off x="5020056" y="3172968"/>
+            <a:off x="6775704" y="3223260"/>
             <a:ext cx="54864" cy="54864"/>
           </a:xfrm>
           <a:prstGeom prst="ellipse">
@@ -7806,7 +8385,7 @@
         </p:nvSpPr>
         <p:spPr>
           <a:xfrm>
-            <a:off x="5138928" y="3118104"/>
+            <a:off x="6894576" y="3168396"/>
             <a:ext cx="1737360" cy="201168"/>
           </a:xfrm>
           <a:prstGeom prst="rect">
@@ -7842,7 +8421,7 @@
         </p:nvSpPr>
         <p:spPr>
           <a:xfrm>
-            <a:off x="5020056" y="3429000"/>
+            <a:off x="6775704" y="3479292"/>
             <a:ext cx="54864" cy="54864"/>
           </a:xfrm>
           <a:prstGeom prst="ellipse">
@@ -7886,7 +8465,7 @@
         </p:nvSpPr>
         <p:spPr>
           <a:xfrm>
-            <a:off x="5138928" y="3374136"/>
+            <a:off x="6894576" y="3424428"/>
             <a:ext cx="1737360" cy="201168"/>
           </a:xfrm>
           <a:prstGeom prst="rect">
@@ -7922,7 +8501,7 @@
         </p:nvSpPr>
         <p:spPr>
           <a:xfrm>
-            <a:off x="5020056" y="3685032"/>
+            <a:off x="6775704" y="3735324"/>
             <a:ext cx="54864" cy="54864"/>
           </a:xfrm>
           <a:prstGeom prst="ellipse">
@@ -7966,7 +8545,7 @@
         </p:nvSpPr>
         <p:spPr>
           <a:xfrm>
-            <a:off x="5138928" y="3630168"/>
+            <a:off x="6894576" y="3680460"/>
             <a:ext cx="1737360" cy="201168"/>
           </a:xfrm>
           <a:prstGeom prst="rect">
@@ -8002,7 +8581,7 @@
         </p:nvSpPr>
         <p:spPr>
           <a:xfrm>
-            <a:off x="5020056" y="3941064"/>
+            <a:off x="6775704" y="3991356"/>
             <a:ext cx="54864" cy="54864"/>
           </a:xfrm>
           <a:prstGeom prst="ellipse">
@@ -8046,8 +8625,8 @@
         </p:nvSpPr>
         <p:spPr>
           <a:xfrm>
-            <a:off x="5138928" y="3886200"/>
-            <a:ext cx="1737360" cy="201168"/>
+            <a:off x="6894576" y="3936492"/>
+            <a:ext cx="1737360" cy="246221"/>
           </a:xfrm>
           <a:prstGeom prst="rect">
             <a:avLst/>
@@ -8069,7 +8648,8 @@
               </a:defRPr>
             </a:pPr>
             <a:r>
-              <a:t>Webhook &amp; refund handling</a:t>
+              <a:rPr dirty="0"/>
+              <a:t>Webhook</a:t>
             </a:r>
           </a:p>
         </p:txBody>
@@ -8082,7 +8662,7 @@
         </p:nvSpPr>
         <p:spPr>
           <a:xfrm>
-            <a:off x="6995159" y="3474720"/>
+            <a:off x="8750807" y="3525012"/>
             <a:ext cx="91440" cy="182880"/>
           </a:xfrm>
           <a:prstGeom prst="rightArrow">
@@ -8120,13 +8700,13 @@
       </p:sp>
       <p:sp>
         <p:nvSpPr>
-          <p:cNvPr id="62" name="Rounded Rectangle 61"/>
+          <p:cNvPr id="79" name="Rounded Rectangle 78"/>
           <p:cNvSpPr/>
           <p:nvPr/>
         </p:nvSpPr>
         <p:spPr>
           <a:xfrm>
-            <a:off x="7095744" y="1691640"/>
+            <a:off x="8862822" y="1737360"/>
             <a:ext cx="2103120" cy="3977639"/>
           </a:xfrm>
           <a:prstGeom prst="roundRect">
@@ -8166,20 +8746,20 @@
       </p:sp>
       <p:sp>
         <p:nvSpPr>
-          <p:cNvPr id="63" name="Rectangle 62"/>
+          <p:cNvPr id="80" name="Rectangle 79"/>
           <p:cNvSpPr/>
           <p:nvPr/>
         </p:nvSpPr>
         <p:spPr>
           <a:xfrm>
-            <a:off x="7095744" y="1691640"/>
+            <a:off x="8862822" y="1737360"/>
             <a:ext cx="2103120" cy="822960"/>
           </a:xfrm>
           <a:prstGeom prst="rect">
             <a:avLst/>
           </a:prstGeom>
           <a:solidFill>
-            <a:srgbClr val="E9D5FF"/>
+            <a:srgbClr val="FCE7F3"/>
           </a:solidFill>
           <a:ln w="6350">
             <a:solidFill>
@@ -8212,13 +8792,13 @@
       </p:sp>
       <p:sp>
         <p:nvSpPr>
-          <p:cNvPr id="64" name="Rounded Rectangle 63"/>
+          <p:cNvPr id="81" name="Rounded Rectangle 80"/>
           <p:cNvSpPr/>
           <p:nvPr/>
         </p:nvSpPr>
         <p:spPr>
           <a:xfrm>
-            <a:off x="7205472" y="1801368"/>
+            <a:off x="8972549" y="1847088"/>
             <a:ext cx="868680" cy="256032"/>
           </a:xfrm>
           <a:prstGeom prst="roundRect">
@@ -8258,20 +8838,20 @@
               </a:defRPr>
             </a:pPr>
             <a:r>
-              <a:t>WEEK 7–8</a:t>
-            </a:r>
-          </a:p>
-        </p:txBody>
-      </p:sp>
-      <p:sp>
-        <p:nvSpPr>
-          <p:cNvPr id="65" name="TextBox 64"/>
+              <a:t>WEEK 9–10</a:t>
+            </a:r>
+          </a:p>
+        </p:txBody>
+      </p:sp>
+      <p:sp>
+        <p:nvSpPr>
+          <p:cNvPr id="82" name="TextBox 81"/>
           <p:cNvSpPr txBox="1"/>
           <p:nvPr/>
         </p:nvSpPr>
         <p:spPr>
           <a:xfrm>
-            <a:off x="7205472" y="2121408"/>
+            <a:off x="8972549" y="2098548"/>
             <a:ext cx="1883663" cy="411480"/>
           </a:xfrm>
           <a:prstGeom prst="rect">
@@ -8294,68 +8874,24 @@
               </a:defRPr>
             </a:pPr>
             <a:r>
-              <a:t>Spiritual AI</a:t>
+              <a:t>Testing, Polish</a:t>
             </a:r>
             <a:br/>
             <a:r>
-              <a:t>Guru Bot</a:t>
-            </a:r>
-          </a:p>
-        </p:txBody>
-      </p:sp>
-      <p:sp>
-        <p:nvSpPr>
-          <p:cNvPr id="66" name="Oval 65"/>
-          <p:cNvSpPr/>
-          <p:nvPr/>
-        </p:nvSpPr>
-        <p:spPr>
-          <a:xfrm>
-            <a:off x="7232904" y="2660904"/>
-            <a:ext cx="54864" cy="54864"/>
-          </a:xfrm>
-          <a:prstGeom prst="ellipse">
-            <a:avLst/>
-          </a:prstGeom>
-          <a:solidFill>
-            <a:srgbClr val="2563EB"/>
-          </a:solidFill>
-          <a:ln>
-            <a:noFill/>
-          </a:ln>
-        </p:spPr>
-        <p:style>
-          <a:lnRef idx="1">
-            <a:schemeClr val="accent1"/>
-          </a:lnRef>
-          <a:fillRef idx="3">
-            <a:schemeClr val="accent1"/>
-          </a:fillRef>
-          <a:effectRef idx="2">
-            <a:schemeClr val="accent1"/>
-          </a:effectRef>
-          <a:fontRef idx="minor">
-            <a:schemeClr val="lt1"/>
-          </a:fontRef>
-        </p:style>
-        <p:txBody>
-          <a:bodyPr rtlCol="0" anchor="ctr"/>
-          <a:lstStyle/>
-          <a:p>
-            <a:pPr algn="ctr"/>
-            <a:endParaRPr/>
-          </a:p>
-        </p:txBody>
-      </p:sp>
-      <p:sp>
-        <p:nvSpPr>
-          <p:cNvPr id="67" name="TextBox 66"/>
+              <a:t>&amp; Demo</a:t>
+            </a:r>
+          </a:p>
+        </p:txBody>
+      </p:sp>
+      <p:sp>
+        <p:nvSpPr>
+          <p:cNvPr id="84" name="TextBox 83"/>
           <p:cNvSpPr txBox="1"/>
           <p:nvPr/>
         </p:nvSpPr>
         <p:spPr>
           <a:xfrm>
-            <a:off x="7351775" y="2606040"/>
+            <a:off x="9118854" y="2651760"/>
             <a:ext cx="1737360" cy="201168"/>
           </a:xfrm>
           <a:prstGeom prst="rect">
@@ -8378,64 +8914,20 @@
               </a:defRPr>
             </a:pPr>
             <a:r>
-              <a:t>AI model selection &amp; setup</a:t>
-            </a:r>
-          </a:p>
-        </p:txBody>
-      </p:sp>
-      <p:sp>
-        <p:nvSpPr>
-          <p:cNvPr id="68" name="Oval 67"/>
-          <p:cNvSpPr/>
-          <p:nvPr/>
-        </p:nvSpPr>
-        <p:spPr>
-          <a:xfrm>
-            <a:off x="7232904" y="2916936"/>
-            <a:ext cx="54864" cy="54864"/>
-          </a:xfrm>
-          <a:prstGeom prst="ellipse">
-            <a:avLst/>
-          </a:prstGeom>
-          <a:solidFill>
-            <a:srgbClr val="2563EB"/>
-          </a:solidFill>
-          <a:ln>
-            <a:noFill/>
-          </a:ln>
-        </p:spPr>
-        <p:style>
-          <a:lnRef idx="1">
-            <a:schemeClr val="accent1"/>
-          </a:lnRef>
-          <a:fillRef idx="3">
-            <a:schemeClr val="accent1"/>
-          </a:fillRef>
-          <a:effectRef idx="2">
-            <a:schemeClr val="accent1"/>
-          </a:effectRef>
-          <a:fontRef idx="minor">
-            <a:schemeClr val="lt1"/>
-          </a:fontRef>
-        </p:style>
-        <p:txBody>
-          <a:bodyPr rtlCol="0" anchor="ctr"/>
-          <a:lstStyle/>
-          <a:p>
-            <a:pPr algn="ctr"/>
-            <a:endParaRPr/>
-          </a:p>
-        </p:txBody>
-      </p:sp>
-      <p:sp>
-        <p:nvSpPr>
-          <p:cNvPr id="69" name="TextBox 68"/>
+              <a:t>End-to-end testing</a:t>
+            </a:r>
+          </a:p>
+        </p:txBody>
+      </p:sp>
+      <p:sp>
+        <p:nvSpPr>
+          <p:cNvPr id="86" name="TextBox 85"/>
           <p:cNvSpPr txBox="1"/>
           <p:nvPr/>
         </p:nvSpPr>
         <p:spPr>
           <a:xfrm>
-            <a:off x="7351775" y="2862072"/>
+            <a:off x="9118854" y="2907792"/>
             <a:ext cx="1737360" cy="201168"/>
           </a:xfrm>
           <a:prstGeom prst="rect">
@@ -8458,64 +8950,20 @@
               </a:defRPr>
             </a:pPr>
             <a:r>
-              <a:t>Faith-specific training data</a:t>
-            </a:r>
-          </a:p>
-        </p:txBody>
-      </p:sp>
-      <p:sp>
-        <p:nvSpPr>
-          <p:cNvPr id="70" name="Oval 69"/>
-          <p:cNvSpPr/>
-          <p:nvPr/>
-        </p:nvSpPr>
-        <p:spPr>
-          <a:xfrm>
-            <a:off x="7232904" y="3172968"/>
-            <a:ext cx="54864" cy="54864"/>
-          </a:xfrm>
-          <a:prstGeom prst="ellipse">
-            <a:avLst/>
-          </a:prstGeom>
-          <a:solidFill>
-            <a:srgbClr val="2563EB"/>
-          </a:solidFill>
-          <a:ln>
-            <a:noFill/>
-          </a:ln>
-        </p:spPr>
-        <p:style>
-          <a:lnRef idx="1">
-            <a:schemeClr val="accent1"/>
-          </a:lnRef>
-          <a:fillRef idx="3">
-            <a:schemeClr val="accent1"/>
-          </a:fillRef>
-          <a:effectRef idx="2">
-            <a:schemeClr val="accent1"/>
-          </a:effectRef>
-          <a:fontRef idx="minor">
-            <a:schemeClr val="lt1"/>
-          </a:fontRef>
-        </p:style>
-        <p:txBody>
-          <a:bodyPr rtlCol="0" anchor="ctr"/>
-          <a:lstStyle/>
-          <a:p>
-            <a:pPr algn="ctr"/>
-            <a:endParaRPr/>
-          </a:p>
-        </p:txBody>
-      </p:sp>
-      <p:sp>
-        <p:nvSpPr>
-          <p:cNvPr id="71" name="TextBox 70"/>
+              <a:t>Security audit &amp; hardening</a:t>
+            </a:r>
+          </a:p>
+        </p:txBody>
+      </p:sp>
+      <p:sp>
+        <p:nvSpPr>
+          <p:cNvPr id="88" name="TextBox 87"/>
           <p:cNvSpPr txBox="1"/>
           <p:nvPr/>
         </p:nvSpPr>
         <p:spPr>
           <a:xfrm>
-            <a:off x="7351775" y="3118104"/>
+            <a:off x="9118854" y="3163824"/>
             <a:ext cx="1737360" cy="201168"/>
           </a:xfrm>
           <a:prstGeom prst="rect">
@@ -8538,64 +8986,20 @@
               </a:defRPr>
             </a:pPr>
             <a:r>
-              <a:t>Context-aware responses</a:t>
-            </a:r>
-          </a:p>
-        </p:txBody>
-      </p:sp>
-      <p:sp>
-        <p:nvSpPr>
-          <p:cNvPr id="72" name="Oval 71"/>
-          <p:cNvSpPr/>
-          <p:nvPr/>
-        </p:nvSpPr>
-        <p:spPr>
-          <a:xfrm>
-            <a:off x="7232904" y="3429000"/>
-            <a:ext cx="54864" cy="54864"/>
-          </a:xfrm>
-          <a:prstGeom prst="ellipse">
-            <a:avLst/>
-          </a:prstGeom>
-          <a:solidFill>
-            <a:srgbClr val="2563EB"/>
-          </a:solidFill>
-          <a:ln>
-            <a:noFill/>
-          </a:ln>
-        </p:spPr>
-        <p:style>
-          <a:lnRef idx="1">
-            <a:schemeClr val="accent1"/>
-          </a:lnRef>
-          <a:fillRef idx="3">
-            <a:schemeClr val="accent1"/>
-          </a:fillRef>
-          <a:effectRef idx="2">
-            <a:schemeClr val="accent1"/>
-          </a:effectRef>
-          <a:fontRef idx="minor">
-            <a:schemeClr val="lt1"/>
-          </a:fontRef>
-        </p:style>
-        <p:txBody>
-          <a:bodyPr rtlCol="0" anchor="ctr"/>
-          <a:lstStyle/>
-          <a:p>
-            <a:pPr algn="ctr"/>
-            <a:endParaRPr/>
-          </a:p>
-        </p:txBody>
-      </p:sp>
-      <p:sp>
-        <p:nvSpPr>
-          <p:cNvPr id="73" name="TextBox 72"/>
+              <a:t>UI/UX polish to mockup</a:t>
+            </a:r>
+          </a:p>
+        </p:txBody>
+      </p:sp>
+      <p:sp>
+        <p:nvSpPr>
+          <p:cNvPr id="90" name="TextBox 89"/>
           <p:cNvSpPr txBox="1"/>
           <p:nvPr/>
         </p:nvSpPr>
         <p:spPr>
           <a:xfrm>
-            <a:off x="7351775" y="3374136"/>
+            <a:off x="9118854" y="3419856"/>
             <a:ext cx="1737360" cy="201168"/>
           </a:xfrm>
           <a:prstGeom prst="rect">
@@ -8618,64 +9022,20 @@
               </a:defRPr>
             </a:pPr>
             <a:r>
-              <a:t>Scripture reference engine</a:t>
-            </a:r>
-          </a:p>
-        </p:txBody>
-      </p:sp>
-      <p:sp>
-        <p:nvSpPr>
-          <p:cNvPr id="74" name="Oval 73"/>
-          <p:cNvSpPr/>
-          <p:nvPr/>
-        </p:nvSpPr>
-        <p:spPr>
-          <a:xfrm>
-            <a:off x="7232904" y="3685032"/>
-            <a:ext cx="54864" cy="54864"/>
-          </a:xfrm>
-          <a:prstGeom prst="ellipse">
-            <a:avLst/>
-          </a:prstGeom>
-          <a:solidFill>
-            <a:srgbClr val="2563EB"/>
-          </a:solidFill>
-          <a:ln>
-            <a:noFill/>
-          </a:ln>
-        </p:spPr>
-        <p:style>
-          <a:lnRef idx="1">
-            <a:schemeClr val="accent1"/>
-          </a:lnRef>
-          <a:fillRef idx="3">
-            <a:schemeClr val="accent1"/>
-          </a:fillRef>
-          <a:effectRef idx="2">
-            <a:schemeClr val="accent1"/>
-          </a:effectRef>
-          <a:fontRef idx="minor">
-            <a:schemeClr val="lt1"/>
-          </a:fontRef>
-        </p:style>
-        <p:txBody>
-          <a:bodyPr rtlCol="0" anchor="ctr"/>
-          <a:lstStyle/>
-          <a:p>
-            <a:pPr algn="ctr"/>
-            <a:endParaRPr/>
-          </a:p>
-        </p:txBody>
-      </p:sp>
-      <p:sp>
-        <p:nvSpPr>
-          <p:cNvPr id="75" name="TextBox 74"/>
+              <a:t>Production deployment</a:t>
+            </a:r>
+          </a:p>
+        </p:txBody>
+      </p:sp>
+      <p:sp>
+        <p:nvSpPr>
+          <p:cNvPr id="92" name="TextBox 91"/>
           <p:cNvSpPr txBox="1"/>
           <p:nvPr/>
         </p:nvSpPr>
         <p:spPr>
           <a:xfrm>
-            <a:off x="7351775" y="3630168"/>
+            <a:off x="9118854" y="3675888"/>
             <a:ext cx="1737360" cy="201168"/>
           </a:xfrm>
           <a:prstGeom prst="rect">
@@ -8698,64 +9058,20 @@
               </a:defRPr>
             </a:pPr>
             <a:r>
-              <a:t>Chat UI integration</a:t>
-            </a:r>
-          </a:p>
-        </p:txBody>
-      </p:sp>
-      <p:sp>
-        <p:nvSpPr>
-          <p:cNvPr id="76" name="Oval 75"/>
-          <p:cNvSpPr/>
-          <p:nvPr/>
-        </p:nvSpPr>
-        <p:spPr>
-          <a:xfrm>
-            <a:off x="7232904" y="3941064"/>
-            <a:ext cx="54864" cy="54864"/>
-          </a:xfrm>
-          <a:prstGeom prst="ellipse">
-            <a:avLst/>
-          </a:prstGeom>
-          <a:solidFill>
-            <a:srgbClr val="2563EB"/>
-          </a:solidFill>
-          <a:ln>
-            <a:noFill/>
-          </a:ln>
-        </p:spPr>
-        <p:style>
-          <a:lnRef idx="1">
-            <a:schemeClr val="accent1"/>
-          </a:lnRef>
-          <a:fillRef idx="3">
-            <a:schemeClr val="accent1"/>
-          </a:fillRef>
-          <a:effectRef idx="2">
-            <a:schemeClr val="accent1"/>
-          </a:effectRef>
-          <a:fontRef idx="minor">
-            <a:schemeClr val="lt1"/>
-          </a:fontRef>
-        </p:style>
-        <p:txBody>
-          <a:bodyPr rtlCol="0" anchor="ctr"/>
-          <a:lstStyle/>
-          <a:p>
-            <a:pPr algn="ctr"/>
-            <a:endParaRPr/>
-          </a:p>
-        </p:txBody>
-      </p:sp>
-      <p:sp>
-        <p:nvSpPr>
-          <p:cNvPr id="77" name="TextBox 76"/>
+              <a:t>Documentation &amp; handover</a:t>
+            </a:r>
+          </a:p>
+        </p:txBody>
+      </p:sp>
+      <p:sp>
+        <p:nvSpPr>
+          <p:cNvPr id="94" name="TextBox 93"/>
           <p:cNvSpPr txBox="1"/>
           <p:nvPr/>
         </p:nvSpPr>
         <p:spPr>
           <a:xfrm>
-            <a:off x="7351775" y="3886200"/>
+            <a:off x="9118854" y="3931920"/>
             <a:ext cx="1737360" cy="201168"/>
           </a:xfrm>
           <a:prstGeom prst="rect">
@@ -8778,65 +9094,21 @@
               </a:defRPr>
             </a:pPr>
             <a:r>
-              <a:t>Content safety guardrails</a:t>
-            </a:r>
-          </a:p>
-        </p:txBody>
-      </p:sp>
-      <p:sp>
-        <p:nvSpPr>
-          <p:cNvPr id="78" name="Right Arrow 77"/>
+              <a:t>Stakeholder live demo</a:t>
+            </a:r>
+          </a:p>
+        </p:txBody>
+      </p:sp>
+      <p:sp>
+        <p:nvSpPr>
+          <p:cNvPr id="95" name="Rounded Rectangle 94"/>
           <p:cNvSpPr/>
           <p:nvPr/>
         </p:nvSpPr>
         <p:spPr>
           <a:xfrm>
-            <a:off x="9208007" y="3474720"/>
-            <a:ext cx="91440" cy="182880"/>
-          </a:xfrm>
-          <a:prstGeom prst="rightArrow">
-            <a:avLst/>
-          </a:prstGeom>
-          <a:solidFill>
-            <a:srgbClr val="2563EB"/>
-          </a:solidFill>
-          <a:ln>
-            <a:noFill/>
-          </a:ln>
-        </p:spPr>
-        <p:style>
-          <a:lnRef idx="1">
-            <a:schemeClr val="accent1"/>
-          </a:lnRef>
-          <a:fillRef idx="3">
-            <a:schemeClr val="accent1"/>
-          </a:fillRef>
-          <a:effectRef idx="2">
-            <a:schemeClr val="accent1"/>
-          </a:effectRef>
-          <a:fontRef idx="minor">
-            <a:schemeClr val="lt1"/>
-          </a:fontRef>
-        </p:style>
-        <p:txBody>
-          <a:bodyPr rtlCol="0" anchor="ctr"/>
-          <a:lstStyle/>
-          <a:p>
-            <a:pPr algn="ctr"/>
-            <a:endParaRPr/>
-          </a:p>
-        </p:txBody>
-      </p:sp>
-      <p:sp>
-        <p:nvSpPr>
-          <p:cNvPr id="79" name="Rounded Rectangle 78"/>
-          <p:cNvSpPr/>
-          <p:nvPr/>
-        </p:nvSpPr>
-        <p:spPr>
-          <a:xfrm>
-            <a:off x="9308592" y="1691640"/>
-            <a:ext cx="2103120" cy="3977639"/>
+            <a:off x="457200" y="5806440"/>
+            <a:ext cx="11338560" cy="548640"/>
           </a:xfrm>
           <a:prstGeom prst="roundRect">
             <a:avLst/>
@@ -8875,113 +9147,14 @@
       </p:sp>
       <p:sp>
         <p:nvSpPr>
-          <p:cNvPr id="80" name="Rectangle 79"/>
-          <p:cNvSpPr/>
-          <p:nvPr/>
-        </p:nvSpPr>
-        <p:spPr>
-          <a:xfrm>
-            <a:off x="9308592" y="1691640"/>
-            <a:ext cx="2103120" cy="822960"/>
-          </a:xfrm>
-          <a:prstGeom prst="rect">
-            <a:avLst/>
-          </a:prstGeom>
-          <a:solidFill>
-            <a:srgbClr val="FCE7F3"/>
-          </a:solidFill>
-          <a:ln w="6350">
-            <a:solidFill>
-              <a:srgbClr val="E2E8F0"/>
-            </a:solidFill>
-          </a:ln>
-        </p:spPr>
-        <p:style>
-          <a:lnRef idx="1">
-            <a:schemeClr val="accent1"/>
-          </a:lnRef>
-          <a:fillRef idx="3">
-            <a:schemeClr val="accent1"/>
-          </a:fillRef>
-          <a:effectRef idx="2">
-            <a:schemeClr val="accent1"/>
-          </a:effectRef>
-          <a:fontRef idx="minor">
-            <a:schemeClr val="lt1"/>
-          </a:fontRef>
-        </p:style>
-        <p:txBody>
-          <a:bodyPr rtlCol="0" anchor="ctr"/>
-          <a:lstStyle/>
-          <a:p>
-            <a:pPr algn="ctr"/>
-            <a:endParaRPr/>
-          </a:p>
-        </p:txBody>
-      </p:sp>
-      <p:sp>
-        <p:nvSpPr>
-          <p:cNvPr id="81" name="Rounded Rectangle 80"/>
-          <p:cNvSpPr/>
-          <p:nvPr/>
-        </p:nvSpPr>
-        <p:spPr>
-          <a:xfrm>
-            <a:off x="9418319" y="1801368"/>
-            <a:ext cx="868680" cy="256032"/>
-          </a:xfrm>
-          <a:prstGeom prst="roundRect">
-            <a:avLst/>
-          </a:prstGeom>
-          <a:solidFill>
-            <a:srgbClr val="2563EB"/>
-          </a:solidFill>
-          <a:ln>
-            <a:noFill/>
-          </a:ln>
-        </p:spPr>
-        <p:style>
-          <a:lnRef idx="1">
-            <a:schemeClr val="accent1"/>
-          </a:lnRef>
-          <a:fillRef idx="3">
-            <a:schemeClr val="accent1"/>
-          </a:fillRef>
-          <a:effectRef idx="2">
-            <a:schemeClr val="accent1"/>
-          </a:effectRef>
-          <a:fontRef idx="minor">
-            <a:schemeClr val="lt1"/>
-          </a:fontRef>
-        </p:style>
-        <p:txBody>
-          <a:bodyPr rtlCol="0" anchor="ctr"/>
-          <a:lstStyle/>
-          <a:p>
-            <a:pPr algn="ctr">
-              <a:defRPr sz="900" b="1">
-                <a:solidFill>
-                  <a:srgbClr val="FFFFFF"/>
-                </a:solidFill>
-                <a:latin typeface="Segoe UI"/>
-              </a:defRPr>
-            </a:pPr>
-            <a:r>
-              <a:t>WEEK 9–10</a:t>
-            </a:r>
-          </a:p>
-        </p:txBody>
-      </p:sp>
-      <p:sp>
-        <p:nvSpPr>
-          <p:cNvPr id="82" name="TextBox 81"/>
+          <p:cNvPr id="96" name="TextBox 95"/>
           <p:cNvSpPr txBox="1"/>
           <p:nvPr/>
         </p:nvSpPr>
         <p:spPr>
           <a:xfrm>
-            <a:off x="9418319" y="2121408"/>
-            <a:ext cx="1883663" cy="411480"/>
+            <a:off x="731520" y="5852160"/>
+            <a:ext cx="1828800" cy="228600"/>
           </a:xfrm>
           <a:prstGeom prst="rect">
             <a:avLst/>
@@ -8995,77 +9168,29 @@
           <a:lstStyle/>
           <a:p>
             <a:pPr algn="l">
-              <a:defRPr sz="1300" b="1">
-                <a:solidFill>
-                  <a:srgbClr val="1F2937"/>
+              <a:defRPr sz="1000" b="1">
+                <a:solidFill>
+                  <a:srgbClr val="2563EB"/>
                 </a:solidFill>
                 <a:latin typeface="Segoe UI"/>
               </a:defRPr>
             </a:pPr>
             <a:r>
-              <a:t>Testing, Polish</a:t>
-            </a:r>
-            <a:br/>
-            <a:r>
-              <a:t>&amp; Demo</a:t>
-            </a:r>
-          </a:p>
-        </p:txBody>
-      </p:sp>
-      <p:sp>
-        <p:nvSpPr>
-          <p:cNvPr id="83" name="Oval 82"/>
-          <p:cNvSpPr/>
-          <p:nvPr/>
-        </p:nvSpPr>
-        <p:spPr>
-          <a:xfrm>
-            <a:off x="9445752" y="2660904"/>
-            <a:ext cx="54864" cy="54864"/>
-          </a:xfrm>
-          <a:prstGeom prst="ellipse">
-            <a:avLst/>
-          </a:prstGeom>
-          <a:solidFill>
-            <a:srgbClr val="2563EB"/>
-          </a:solidFill>
-          <a:ln>
-            <a:noFill/>
-          </a:ln>
-        </p:spPr>
-        <p:style>
-          <a:lnRef idx="1">
-            <a:schemeClr val="accent1"/>
-          </a:lnRef>
-          <a:fillRef idx="3">
-            <a:schemeClr val="accent1"/>
-          </a:fillRef>
-          <a:effectRef idx="2">
-            <a:schemeClr val="accent1"/>
-          </a:effectRef>
-          <a:fontRef idx="minor">
-            <a:schemeClr val="lt1"/>
-          </a:fontRef>
-        </p:style>
-        <p:txBody>
-          <a:bodyPr rtlCol="0" anchor="ctr"/>
-          <a:lstStyle/>
-          <a:p>
-            <a:pPr algn="ctr"/>
-            <a:endParaRPr/>
-          </a:p>
-        </p:txBody>
-      </p:sp>
-      <p:sp>
-        <p:nvSpPr>
-          <p:cNvPr id="84" name="TextBox 83"/>
+              <a:t>KEY MILESTONES</a:t>
+            </a:r>
+          </a:p>
+        </p:txBody>
+      </p:sp>
+      <p:sp>
+        <p:nvSpPr>
+          <p:cNvPr id="97" name="TextBox 96"/>
           <p:cNvSpPr txBox="1"/>
           <p:nvPr/>
         </p:nvSpPr>
         <p:spPr>
           <a:xfrm>
-            <a:off x="9564624" y="2606040"/>
-            <a:ext cx="1737360" cy="201168"/>
+            <a:off x="731520" y="6053328"/>
+            <a:ext cx="2103120" cy="228600"/>
           </a:xfrm>
           <a:prstGeom prst="rect">
             <a:avLst/>
@@ -9078,74 +9203,37 @@
           </a:bodyPr>
           <a:lstStyle/>
           <a:p>
-            <a:pPr algn="l">
-              <a:defRPr sz="1000" b="0">
-                <a:solidFill>
-                  <a:srgbClr val="374151"/>
-                </a:solidFill>
-                <a:latin typeface="Segoe UI"/>
-              </a:defRPr>
-            </a:pPr>
-            <a:r>
-              <a:t>End-to-end testing</a:t>
-            </a:r>
-          </a:p>
-        </p:txBody>
-      </p:sp>
-      <p:sp>
-        <p:nvSpPr>
-          <p:cNvPr id="85" name="Oval 84"/>
-          <p:cNvSpPr/>
-          <p:nvPr/>
-        </p:nvSpPr>
-        <p:spPr>
-          <a:xfrm>
-            <a:off x="9445752" y="2916936"/>
-            <a:ext cx="54864" cy="54864"/>
-          </a:xfrm>
-          <a:prstGeom prst="ellipse">
-            <a:avLst/>
-          </a:prstGeom>
-          <a:solidFill>
-            <a:srgbClr val="2563EB"/>
-          </a:solidFill>
-          <a:ln>
-            <a:noFill/>
-          </a:ln>
-        </p:spPr>
-        <p:style>
-          <a:lnRef idx="1">
-            <a:schemeClr val="accent1"/>
-          </a:lnRef>
-          <a:fillRef idx="3">
-            <a:schemeClr val="accent1"/>
-          </a:fillRef>
-          <a:effectRef idx="2">
-            <a:schemeClr val="accent1"/>
-          </a:effectRef>
-          <a:fontRef idx="minor">
-            <a:schemeClr val="lt1"/>
-          </a:fontRef>
-        </p:style>
-        <p:txBody>
-          <a:bodyPr rtlCol="0" anchor="ctr"/>
-          <a:lstStyle/>
-          <a:p>
-            <a:pPr algn="ctr"/>
-            <a:endParaRPr/>
-          </a:p>
-        </p:txBody>
-      </p:sp>
-      <p:sp>
-        <p:nvSpPr>
-          <p:cNvPr id="86" name="TextBox 85"/>
+            <a:r>
+              <a:rPr sz="1000" b="1">
+                <a:solidFill>
+                  <a:srgbClr val="1F2937"/>
+                </a:solidFill>
+                <a:latin typeface="Segoe UI"/>
+              </a:rPr>
+              <a:t>Week 2:</a:t>
+            </a:r>
+            <a:r>
+              <a:rPr sz="1000" b="0">
+                <a:solidFill>
+                  <a:srgbClr val="6B7280"/>
+                </a:solidFill>
+                <a:latin typeface="Segoe UI"/>
+              </a:rPr>
+              <a:t> VPS live, auth working</a:t>
+            </a:r>
+          </a:p>
+        </p:txBody>
+      </p:sp>
+      <p:sp>
+        <p:nvSpPr>
+          <p:cNvPr id="98" name="TextBox 97"/>
           <p:cNvSpPr txBox="1"/>
           <p:nvPr/>
         </p:nvSpPr>
         <p:spPr>
           <a:xfrm>
-            <a:off x="9564624" y="2862072"/>
-            <a:ext cx="1737360" cy="201168"/>
+            <a:off x="2971800" y="6053328"/>
+            <a:ext cx="2103120" cy="246221"/>
           </a:xfrm>
           <a:prstGeom prst="rect">
             <a:avLst/>
@@ -9158,74 +9246,55 @@
           </a:bodyPr>
           <a:lstStyle/>
           <a:p>
-            <a:pPr algn="l">
-              <a:defRPr sz="1000" b="0">
-                <a:solidFill>
-                  <a:srgbClr val="374151"/>
-                </a:solidFill>
-                <a:latin typeface="Segoe UI"/>
-              </a:defRPr>
-            </a:pPr>
-            <a:r>
-              <a:t>Security audit &amp; hardening</a:t>
-            </a:r>
-          </a:p>
-        </p:txBody>
-      </p:sp>
-      <p:sp>
-        <p:nvSpPr>
-          <p:cNvPr id="87" name="Oval 86"/>
-          <p:cNvSpPr/>
-          <p:nvPr/>
-        </p:nvSpPr>
-        <p:spPr>
-          <a:xfrm>
-            <a:off x="9445752" y="3172968"/>
-            <a:ext cx="54864" cy="54864"/>
-          </a:xfrm>
-          <a:prstGeom prst="ellipse">
-            <a:avLst/>
-          </a:prstGeom>
-          <a:solidFill>
-            <a:srgbClr val="2563EB"/>
-          </a:solidFill>
-          <a:ln>
-            <a:noFill/>
-          </a:ln>
-        </p:spPr>
-        <p:style>
-          <a:lnRef idx="1">
-            <a:schemeClr val="accent1"/>
-          </a:lnRef>
-          <a:fillRef idx="3">
-            <a:schemeClr val="accent1"/>
-          </a:fillRef>
-          <a:effectRef idx="2">
-            <a:schemeClr val="accent1"/>
-          </a:effectRef>
-          <a:fontRef idx="minor">
-            <a:schemeClr val="lt1"/>
-          </a:fontRef>
-        </p:style>
-        <p:txBody>
-          <a:bodyPr rtlCol="0" anchor="ctr"/>
-          <a:lstStyle/>
-          <a:p>
-            <a:pPr algn="ctr"/>
-            <a:endParaRPr/>
-          </a:p>
-        </p:txBody>
-      </p:sp>
-      <p:sp>
-        <p:nvSpPr>
-          <p:cNvPr id="88" name="TextBox 87"/>
+            <a:r>
+              <a:rPr sz="1000" b="1" dirty="0">
+                <a:solidFill>
+                  <a:srgbClr val="1F2937"/>
+                </a:solidFill>
+                <a:latin typeface="Segoe UI"/>
+              </a:rPr>
+              <a:t>Week </a:t>
+            </a:r>
+            <a:r>
+              <a:rPr lang="en-US" sz="1000" b="1" dirty="0">
+                <a:solidFill>
+                  <a:srgbClr val="1F2937"/>
+                </a:solidFill>
+                <a:latin typeface="Segoe UI"/>
+              </a:rPr>
+              <a:t>5</a:t>
+            </a:r>
+            <a:r>
+              <a:rPr sz="1000" b="1" dirty="0">
+                <a:solidFill>
+                  <a:srgbClr val="1F2937"/>
+                </a:solidFill>
+                <a:latin typeface="Segoe UI"/>
+              </a:rPr>
+              <a:t>:</a:t>
+            </a:r>
+            <a:r>
+              <a:rPr sz="1000" b="0" dirty="0">
+                <a:solidFill>
+                  <a:srgbClr val="6B7280"/>
+                </a:solidFill>
+                <a:latin typeface="Segoe UI"/>
+              </a:rPr>
+              <a:t> All 3 portals functional</a:t>
+            </a:r>
+          </a:p>
+        </p:txBody>
+      </p:sp>
+      <p:sp>
+        <p:nvSpPr>
+          <p:cNvPr id="99" name="TextBox 98"/>
           <p:cNvSpPr txBox="1"/>
           <p:nvPr/>
         </p:nvSpPr>
         <p:spPr>
           <a:xfrm>
-            <a:off x="9564624" y="3118104"/>
-            <a:ext cx="1737360" cy="201168"/>
+            <a:off x="6967728" y="6057900"/>
+            <a:ext cx="2103120" cy="228600"/>
           </a:xfrm>
           <a:prstGeom prst="rect">
             <a:avLst/>
@@ -9238,74 +9307,37 @@
           </a:bodyPr>
           <a:lstStyle/>
           <a:p>
-            <a:pPr algn="l">
-              <a:defRPr sz="1000" b="0">
-                <a:solidFill>
-                  <a:srgbClr val="374151"/>
-                </a:solidFill>
-                <a:latin typeface="Segoe UI"/>
-              </a:defRPr>
-            </a:pPr>
-            <a:r>
-              <a:t>UI/UX polish to mockup</a:t>
-            </a:r>
-          </a:p>
-        </p:txBody>
-      </p:sp>
-      <p:sp>
-        <p:nvSpPr>
-          <p:cNvPr id="89" name="Oval 88"/>
-          <p:cNvSpPr/>
-          <p:nvPr/>
-        </p:nvSpPr>
-        <p:spPr>
-          <a:xfrm>
-            <a:off x="9445752" y="3429000"/>
-            <a:ext cx="54864" cy="54864"/>
-          </a:xfrm>
-          <a:prstGeom prst="ellipse">
-            <a:avLst/>
-          </a:prstGeom>
-          <a:solidFill>
-            <a:srgbClr val="2563EB"/>
-          </a:solidFill>
-          <a:ln>
-            <a:noFill/>
-          </a:ln>
-        </p:spPr>
-        <p:style>
-          <a:lnRef idx="1">
-            <a:schemeClr val="accent1"/>
-          </a:lnRef>
-          <a:fillRef idx="3">
-            <a:schemeClr val="accent1"/>
-          </a:fillRef>
-          <a:effectRef idx="2">
-            <a:schemeClr val="accent1"/>
-          </a:effectRef>
-          <a:fontRef idx="minor">
-            <a:schemeClr val="lt1"/>
-          </a:fontRef>
-        </p:style>
-        <p:txBody>
-          <a:bodyPr rtlCol="0" anchor="ctr"/>
-          <a:lstStyle/>
-          <a:p>
-            <a:pPr algn="ctr"/>
-            <a:endParaRPr/>
-          </a:p>
-        </p:txBody>
-      </p:sp>
-      <p:sp>
-        <p:nvSpPr>
-          <p:cNvPr id="90" name="TextBox 89"/>
+            <a:r>
+              <a:rPr sz="1000" b="1">
+                <a:solidFill>
+                  <a:srgbClr val="1F2937"/>
+                </a:solidFill>
+                <a:latin typeface="Segoe UI"/>
+              </a:rPr>
+              <a:t>Week 6:</a:t>
+            </a:r>
+            <a:r>
+              <a:rPr sz="1000" b="0">
+                <a:solidFill>
+                  <a:srgbClr val="6B7280"/>
+                </a:solidFill>
+                <a:latin typeface="Segoe UI"/>
+              </a:rPr>
+              <a:t> Payments end-to-end</a:t>
+            </a:r>
+          </a:p>
+        </p:txBody>
+      </p:sp>
+      <p:sp>
+        <p:nvSpPr>
+          <p:cNvPr id="101" name="TextBox 100"/>
           <p:cNvSpPr txBox="1"/>
           <p:nvPr/>
         </p:nvSpPr>
         <p:spPr>
           <a:xfrm>
-            <a:off x="9564624" y="3374136"/>
-            <a:ext cx="1737360" cy="201168"/>
+            <a:off x="8862822" y="6005322"/>
+            <a:ext cx="2103120" cy="228600"/>
           </a:xfrm>
           <a:prstGeom prst="rect">
             <a:avLst/>
@@ -9318,458 +9350,8 @@
           </a:bodyPr>
           <a:lstStyle/>
           <a:p>
-            <a:pPr algn="l">
-              <a:defRPr sz="1000" b="0">
-                <a:solidFill>
-                  <a:srgbClr val="374151"/>
-                </a:solidFill>
-                <a:latin typeface="Segoe UI"/>
-              </a:defRPr>
-            </a:pPr>
-            <a:r>
-              <a:t>Production deployment</a:t>
-            </a:r>
-          </a:p>
-        </p:txBody>
-      </p:sp>
-      <p:sp>
-        <p:nvSpPr>
-          <p:cNvPr id="91" name="Oval 90"/>
-          <p:cNvSpPr/>
-          <p:nvPr/>
-        </p:nvSpPr>
-        <p:spPr>
-          <a:xfrm>
-            <a:off x="9445752" y="3685032"/>
-            <a:ext cx="54864" cy="54864"/>
-          </a:xfrm>
-          <a:prstGeom prst="ellipse">
-            <a:avLst/>
-          </a:prstGeom>
-          <a:solidFill>
-            <a:srgbClr val="2563EB"/>
-          </a:solidFill>
-          <a:ln>
-            <a:noFill/>
-          </a:ln>
-        </p:spPr>
-        <p:style>
-          <a:lnRef idx="1">
-            <a:schemeClr val="accent1"/>
-          </a:lnRef>
-          <a:fillRef idx="3">
-            <a:schemeClr val="accent1"/>
-          </a:fillRef>
-          <a:effectRef idx="2">
-            <a:schemeClr val="accent1"/>
-          </a:effectRef>
-          <a:fontRef idx="minor">
-            <a:schemeClr val="lt1"/>
-          </a:fontRef>
-        </p:style>
-        <p:txBody>
-          <a:bodyPr rtlCol="0" anchor="ctr"/>
-          <a:lstStyle/>
-          <a:p>
-            <a:pPr algn="ctr"/>
-            <a:endParaRPr/>
-          </a:p>
-        </p:txBody>
-      </p:sp>
-      <p:sp>
-        <p:nvSpPr>
-          <p:cNvPr id="92" name="TextBox 91"/>
-          <p:cNvSpPr txBox="1"/>
-          <p:nvPr/>
-        </p:nvSpPr>
-        <p:spPr>
-          <a:xfrm>
-            <a:off x="9564624" y="3630168"/>
-            <a:ext cx="1737360" cy="201168"/>
-          </a:xfrm>
-          <a:prstGeom prst="rect">
-            <a:avLst/>
-          </a:prstGeom>
-          <a:noFill/>
-        </p:spPr>
-        <p:txBody>
-          <a:bodyPr wrap="square">
-            <a:spAutoFit/>
-          </a:bodyPr>
-          <a:lstStyle/>
-          <a:p>
-            <a:pPr algn="l">
-              <a:defRPr sz="1000" b="0">
-                <a:solidFill>
-                  <a:srgbClr val="374151"/>
-                </a:solidFill>
-                <a:latin typeface="Segoe UI"/>
-              </a:defRPr>
-            </a:pPr>
-            <a:r>
-              <a:t>Documentation &amp; handover</a:t>
-            </a:r>
-          </a:p>
-        </p:txBody>
-      </p:sp>
-      <p:sp>
-        <p:nvSpPr>
-          <p:cNvPr id="93" name="Oval 92"/>
-          <p:cNvSpPr/>
-          <p:nvPr/>
-        </p:nvSpPr>
-        <p:spPr>
-          <a:xfrm>
-            <a:off x="9445752" y="3941064"/>
-            <a:ext cx="54864" cy="54864"/>
-          </a:xfrm>
-          <a:prstGeom prst="ellipse">
-            <a:avLst/>
-          </a:prstGeom>
-          <a:solidFill>
-            <a:srgbClr val="2563EB"/>
-          </a:solidFill>
-          <a:ln>
-            <a:noFill/>
-          </a:ln>
-        </p:spPr>
-        <p:style>
-          <a:lnRef idx="1">
-            <a:schemeClr val="accent1"/>
-          </a:lnRef>
-          <a:fillRef idx="3">
-            <a:schemeClr val="accent1"/>
-          </a:fillRef>
-          <a:effectRef idx="2">
-            <a:schemeClr val="accent1"/>
-          </a:effectRef>
-          <a:fontRef idx="minor">
-            <a:schemeClr val="lt1"/>
-          </a:fontRef>
-        </p:style>
-        <p:txBody>
-          <a:bodyPr rtlCol="0" anchor="ctr"/>
-          <a:lstStyle/>
-          <a:p>
-            <a:pPr algn="ctr"/>
-            <a:endParaRPr/>
-          </a:p>
-        </p:txBody>
-      </p:sp>
-      <p:sp>
-        <p:nvSpPr>
-          <p:cNvPr id="94" name="TextBox 93"/>
-          <p:cNvSpPr txBox="1"/>
-          <p:nvPr/>
-        </p:nvSpPr>
-        <p:spPr>
-          <a:xfrm>
-            <a:off x="9564624" y="3886200"/>
-            <a:ext cx="1737360" cy="201168"/>
-          </a:xfrm>
-          <a:prstGeom prst="rect">
-            <a:avLst/>
-          </a:prstGeom>
-          <a:noFill/>
-        </p:spPr>
-        <p:txBody>
-          <a:bodyPr wrap="square">
-            <a:spAutoFit/>
-          </a:bodyPr>
-          <a:lstStyle/>
-          <a:p>
-            <a:pPr algn="l">
-              <a:defRPr sz="1000" b="0">
-                <a:solidFill>
-                  <a:srgbClr val="374151"/>
-                </a:solidFill>
-                <a:latin typeface="Segoe UI"/>
-              </a:defRPr>
-            </a:pPr>
-            <a:r>
-              <a:t>Stakeholder live demo</a:t>
-            </a:r>
-          </a:p>
-        </p:txBody>
-      </p:sp>
-      <p:sp>
-        <p:nvSpPr>
-          <p:cNvPr id="95" name="Rounded Rectangle 94"/>
-          <p:cNvSpPr/>
-          <p:nvPr/>
-        </p:nvSpPr>
-        <p:spPr>
-          <a:xfrm>
-            <a:off x="457200" y="5806440"/>
-            <a:ext cx="11338560" cy="548640"/>
-          </a:xfrm>
-          <a:prstGeom prst="roundRect">
-            <a:avLst/>
-          </a:prstGeom>
-          <a:solidFill>
-            <a:srgbClr val="FFFFFF"/>
-          </a:solidFill>
-          <a:ln w="9525">
-            <a:solidFill>
-              <a:srgbClr val="E2E8F0"/>
-            </a:solidFill>
-          </a:ln>
-        </p:spPr>
-        <p:style>
-          <a:lnRef idx="1">
-            <a:schemeClr val="accent1"/>
-          </a:lnRef>
-          <a:fillRef idx="3">
-            <a:schemeClr val="accent1"/>
-          </a:fillRef>
-          <a:effectRef idx="2">
-            <a:schemeClr val="accent1"/>
-          </a:effectRef>
-          <a:fontRef idx="minor">
-            <a:schemeClr val="lt1"/>
-          </a:fontRef>
-        </p:style>
-        <p:txBody>
-          <a:bodyPr rtlCol="0" anchor="ctr"/>
-          <a:lstStyle/>
-          <a:p>
-            <a:pPr algn="ctr"/>
-            <a:endParaRPr/>
-          </a:p>
-        </p:txBody>
-      </p:sp>
-      <p:sp>
-        <p:nvSpPr>
-          <p:cNvPr id="96" name="TextBox 95"/>
-          <p:cNvSpPr txBox="1"/>
-          <p:nvPr/>
-        </p:nvSpPr>
-        <p:spPr>
-          <a:xfrm>
-            <a:off x="731520" y="5852160"/>
-            <a:ext cx="1828800" cy="228600"/>
-          </a:xfrm>
-          <a:prstGeom prst="rect">
-            <a:avLst/>
-          </a:prstGeom>
-          <a:noFill/>
-        </p:spPr>
-        <p:txBody>
-          <a:bodyPr wrap="square">
-            <a:spAutoFit/>
-          </a:bodyPr>
-          <a:lstStyle/>
-          <a:p>
-            <a:pPr algn="l">
-              <a:defRPr sz="1000" b="1">
-                <a:solidFill>
-                  <a:srgbClr val="2563EB"/>
-                </a:solidFill>
-                <a:latin typeface="Segoe UI"/>
-              </a:defRPr>
-            </a:pPr>
-            <a:r>
-              <a:t>KEY MILESTONES</a:t>
-            </a:r>
-          </a:p>
-        </p:txBody>
-      </p:sp>
-      <p:sp>
-        <p:nvSpPr>
-          <p:cNvPr id="97" name="TextBox 96"/>
-          <p:cNvSpPr txBox="1"/>
-          <p:nvPr/>
-        </p:nvSpPr>
-        <p:spPr>
-          <a:xfrm>
-            <a:off x="731520" y="6053328"/>
-            <a:ext cx="2103120" cy="228600"/>
-          </a:xfrm>
-          <a:prstGeom prst="rect">
-            <a:avLst/>
-          </a:prstGeom>
-          <a:noFill/>
-        </p:spPr>
-        <p:txBody>
-          <a:bodyPr wrap="square">
-            <a:spAutoFit/>
-          </a:bodyPr>
-          <a:lstStyle/>
-          <a:p>
-            <a:r>
-              <a:rPr sz="1000" b="1">
-                <a:solidFill>
-                  <a:srgbClr val="1F2937"/>
-                </a:solidFill>
-                <a:latin typeface="Segoe UI"/>
-              </a:rPr>
-              <a:t>Week 2:</a:t>
-            </a:r>
-            <a:r>
-              <a:rPr sz="1000" b="0">
-                <a:solidFill>
-                  <a:srgbClr val="6B7280"/>
-                </a:solidFill>
-                <a:latin typeface="Segoe UI"/>
-              </a:rPr>
-              <a:t> VPS live, auth working</a:t>
-            </a:r>
-          </a:p>
-        </p:txBody>
-      </p:sp>
-      <p:sp>
-        <p:nvSpPr>
-          <p:cNvPr id="98" name="TextBox 97"/>
-          <p:cNvSpPr txBox="1"/>
-          <p:nvPr/>
-        </p:nvSpPr>
-        <p:spPr>
-          <a:xfrm>
-            <a:off x="2971800" y="6053328"/>
-            <a:ext cx="2103120" cy="228600"/>
-          </a:xfrm>
-          <a:prstGeom prst="rect">
-            <a:avLst/>
-          </a:prstGeom>
-          <a:noFill/>
-        </p:spPr>
-        <p:txBody>
-          <a:bodyPr wrap="square">
-            <a:spAutoFit/>
-          </a:bodyPr>
-          <a:lstStyle/>
-          <a:p>
-            <a:r>
-              <a:rPr sz="1000" b="1">
-                <a:solidFill>
-                  <a:srgbClr val="1F2937"/>
-                </a:solidFill>
-                <a:latin typeface="Segoe UI"/>
-              </a:rPr>
-              <a:t>Week 4:</a:t>
-            </a:r>
-            <a:r>
-              <a:rPr sz="1000" b="0">
-                <a:solidFill>
-                  <a:srgbClr val="6B7280"/>
-                </a:solidFill>
-                <a:latin typeface="Segoe UI"/>
-              </a:rPr>
-              <a:t> All 3 portals functional</a:t>
-            </a:r>
-          </a:p>
-        </p:txBody>
-      </p:sp>
-      <p:sp>
-        <p:nvSpPr>
-          <p:cNvPr id="99" name="TextBox 98"/>
-          <p:cNvSpPr txBox="1"/>
-          <p:nvPr/>
-        </p:nvSpPr>
-        <p:spPr>
-          <a:xfrm>
-            <a:off x="5212080" y="6053328"/>
-            <a:ext cx="2103120" cy="228600"/>
-          </a:xfrm>
-          <a:prstGeom prst="rect">
-            <a:avLst/>
-          </a:prstGeom>
-          <a:noFill/>
-        </p:spPr>
-        <p:txBody>
-          <a:bodyPr wrap="square">
-            <a:spAutoFit/>
-          </a:bodyPr>
-          <a:lstStyle/>
-          <a:p>
-            <a:r>
-              <a:rPr sz="1000" b="1">
-                <a:solidFill>
-                  <a:srgbClr val="1F2937"/>
-                </a:solidFill>
-                <a:latin typeface="Segoe UI"/>
-              </a:rPr>
-              <a:t>Week 6:</a:t>
-            </a:r>
-            <a:r>
-              <a:rPr sz="1000" b="0">
-                <a:solidFill>
-                  <a:srgbClr val="6B7280"/>
-                </a:solidFill>
-                <a:latin typeface="Segoe UI"/>
-              </a:rPr>
-              <a:t> Payments end-to-end</a:t>
-            </a:r>
-          </a:p>
-        </p:txBody>
-      </p:sp>
-      <p:sp>
-        <p:nvSpPr>
-          <p:cNvPr id="100" name="TextBox 99"/>
-          <p:cNvSpPr txBox="1"/>
-          <p:nvPr/>
-        </p:nvSpPr>
-        <p:spPr>
-          <a:xfrm>
-            <a:off x="7452360" y="6053328"/>
-            <a:ext cx="2103120" cy="228600"/>
-          </a:xfrm>
-          <a:prstGeom prst="rect">
-            <a:avLst/>
-          </a:prstGeom>
-          <a:noFill/>
-        </p:spPr>
-        <p:txBody>
-          <a:bodyPr wrap="square">
-            <a:spAutoFit/>
-          </a:bodyPr>
-          <a:lstStyle/>
-          <a:p>
-            <a:r>
-              <a:rPr sz="1000" b="1">
-                <a:solidFill>
-                  <a:srgbClr val="1F2937"/>
-                </a:solidFill>
-                <a:latin typeface="Segoe UI"/>
-              </a:rPr>
-              <a:t>Week 8:</a:t>
-            </a:r>
-            <a:r>
-              <a:rPr sz="1000" b="0">
-                <a:solidFill>
-                  <a:srgbClr val="6B7280"/>
-                </a:solidFill>
-                <a:latin typeface="Segoe UI"/>
-              </a:rPr>
-              <a:t> AI Guru Bot integrated</a:t>
-            </a:r>
-          </a:p>
-        </p:txBody>
-      </p:sp>
-      <p:sp>
-        <p:nvSpPr>
-          <p:cNvPr id="101" name="TextBox 100"/>
-          <p:cNvSpPr txBox="1"/>
-          <p:nvPr/>
-        </p:nvSpPr>
-        <p:spPr>
-          <a:xfrm>
-            <a:off x="9692640" y="6053328"/>
-            <a:ext cx="2103120" cy="228600"/>
-          </a:xfrm>
-          <a:prstGeom prst="rect">
-            <a:avLst/>
-          </a:prstGeom>
-          <a:noFill/>
-        </p:spPr>
-        <p:txBody>
-          <a:bodyPr wrap="square">
-            <a:spAutoFit/>
-          </a:bodyPr>
-          <a:lstStyle/>
-          <a:p>
-            <a:r>
-              <a:rPr sz="1000" b="1">
+            <a:r>
+              <a:rPr sz="1000" b="1" dirty="0">
                 <a:solidFill>
                   <a:srgbClr val="1F2937"/>
                 </a:solidFill>
@@ -9778,7 +9360,7 @@
               <a:t>Week 10:</a:t>
             </a:r>
             <a:r>
-              <a:rPr sz="1000" b="0">
+              <a:rPr sz="1000" b="0" dirty="0">
                 <a:solidFill>
                   <a:srgbClr val="6B7280"/>
                 </a:solidFill>
@@ -9984,7 +9566,7 @@
         </p:nvSpPr>
         <p:spPr>
           <a:xfrm>
-            <a:off x="914400" y="274320"/>
+            <a:off x="964692" y="274320"/>
             <a:ext cx="1097280" cy="457200"/>
           </a:xfrm>
           <a:prstGeom prst="rect">
@@ -10007,6 +9589,7 @@
               </a:defRPr>
             </a:pPr>
             <a:r>
+              <a:rPr dirty="0"/>
               <a:t>D.A.K</a:t>
             </a:r>
           </a:p>
@@ -10092,8 +9675,8 @@
         </p:nvSpPr>
         <p:spPr>
           <a:xfrm>
-            <a:off x="731520" y="1344168"/>
-            <a:ext cx="1645920" cy="32004"/>
+            <a:off x="731520" y="1344167"/>
+            <a:ext cx="2560320" cy="45719"/>
           </a:xfrm>
           <a:prstGeom prst="rect">
             <a:avLst/>
@@ -10172,7 +9755,7 @@
         </p:nvSpPr>
         <p:spPr>
           <a:xfrm>
-            <a:off x="457200" y="1703070"/>
+            <a:off x="457200" y="1748790"/>
             <a:ext cx="3566160" cy="2788920"/>
           </a:xfrm>
           <a:prstGeom prst="roundRect">
@@ -10218,7 +9801,7 @@
         </p:nvSpPr>
         <p:spPr>
           <a:xfrm>
-            <a:off x="457200" y="1703070"/>
+            <a:off x="457200" y="1748790"/>
             <a:ext cx="3566160" cy="411480"/>
           </a:xfrm>
           <a:prstGeom prst="rect">
@@ -10264,7 +9847,7 @@
         </p:nvSpPr>
         <p:spPr>
           <a:xfrm>
-            <a:off x="640080" y="1776222"/>
+            <a:off x="640080" y="1821942"/>
             <a:ext cx="3200400" cy="274320"/>
           </a:xfrm>
           <a:prstGeom prst="rect">
@@ -10300,7 +9883,7 @@
         </p:nvSpPr>
         <p:spPr>
           <a:xfrm>
-            <a:off x="640080" y="2205990"/>
+            <a:off x="640080" y="2251710"/>
             <a:ext cx="2068372" cy="228600"/>
           </a:xfrm>
           <a:prstGeom prst="rect">
@@ -10336,7 +9919,7 @@
         </p:nvSpPr>
         <p:spPr>
           <a:xfrm>
-            <a:off x="2311603" y="2205990"/>
+            <a:off x="2311603" y="2251710"/>
             <a:ext cx="1497787" cy="228600"/>
           </a:xfrm>
           <a:prstGeom prst="rect">
@@ -10372,7 +9955,7 @@
         </p:nvSpPr>
         <p:spPr>
           <a:xfrm>
-            <a:off x="640080" y="2452878"/>
+            <a:off x="640080" y="2498598"/>
             <a:ext cx="3200400" cy="4572"/>
           </a:xfrm>
           <a:prstGeom prst="rect">
@@ -10416,8 +9999,8 @@
         </p:nvSpPr>
         <p:spPr>
           <a:xfrm>
-            <a:off x="640080" y="2498597"/>
-            <a:ext cx="2068372" cy="228600"/>
+            <a:off x="640080" y="2544317"/>
+            <a:ext cx="2068372" cy="261610"/>
           </a:xfrm>
           <a:prstGeom prst="rect">
             <a:avLst/>
@@ -10439,7 +10022,20 @@
               </a:defRPr>
             </a:pPr>
             <a:r>
-              <a:t>Wk 3-4: Core Platform Dev</a:t>
+              <a:rPr dirty="0" err="1"/>
+              <a:t>Wk</a:t>
+            </a:r>
+            <a:r>
+              <a:rPr dirty="0"/>
+              <a:t> 3-</a:t>
+            </a:r>
+            <a:r>
+              <a:rPr lang="en-US" dirty="0"/>
+              <a:t>5</a:t>
+            </a:r>
+            <a:r>
+              <a:rPr dirty="0"/>
+              <a:t>: Core Platform Dev</a:t>
             </a:r>
           </a:p>
         </p:txBody>
@@ -10452,8 +10048,8 @@
         </p:nvSpPr>
         <p:spPr>
           <a:xfrm>
-            <a:off x="2311603" y="2498597"/>
-            <a:ext cx="1497787" cy="228600"/>
+            <a:off x="2311603" y="2544317"/>
+            <a:ext cx="1497787" cy="261610"/>
           </a:xfrm>
           <a:prstGeom prst="rect">
             <a:avLst/>
@@ -10475,7 +10071,16 @@
               </a:defRPr>
             </a:pPr>
             <a:r>
-              <a:t>$2,500</a:t>
+              <a:rPr dirty="0"/>
+              <a:t>$</a:t>
+            </a:r>
+            <a:r>
+              <a:rPr lang="en-US" dirty="0"/>
+              <a:t>4</a:t>
+            </a:r>
+            <a:r>
+              <a:rPr dirty="0"/>
+              <a:t>,500</a:t>
             </a:r>
           </a:p>
         </p:txBody>
@@ -10488,7 +10093,7 @@
         </p:nvSpPr>
         <p:spPr>
           <a:xfrm>
-            <a:off x="640080" y="2745485"/>
+            <a:off x="640080" y="2791205"/>
             <a:ext cx="3200400" cy="4572"/>
           </a:xfrm>
           <a:prstGeom prst="rect">
@@ -10532,8 +10137,8 @@
         </p:nvSpPr>
         <p:spPr>
           <a:xfrm>
-            <a:off x="640080" y="2791205"/>
-            <a:ext cx="2068372" cy="228600"/>
+            <a:off x="640080" y="2836925"/>
+            <a:ext cx="2068372" cy="261610"/>
           </a:xfrm>
           <a:prstGeom prst="rect">
             <a:avLst/>
@@ -10555,7 +10160,28 @@
               </a:defRPr>
             </a:pPr>
             <a:r>
-              <a:t>Wk 5-6: Payments &amp; Access</a:t>
+              <a:rPr dirty="0" err="1"/>
+              <a:t>Wk</a:t>
+            </a:r>
+            <a:r>
+              <a:rPr dirty="0"/>
+              <a:t> </a:t>
+            </a:r>
+            <a:r>
+              <a:rPr lang="en-US" dirty="0"/>
+              <a:t>6</a:t>
+            </a:r>
+            <a:r>
+              <a:rPr dirty="0"/>
+              <a:t>-</a:t>
+            </a:r>
+            <a:r>
+              <a:rPr lang="en-US" dirty="0"/>
+              <a:t>8</a:t>
+            </a:r>
+            <a:r>
+              <a:rPr dirty="0"/>
+              <a:t>: Payments &amp; Access</a:t>
             </a:r>
           </a:p>
         </p:txBody>
@@ -10568,7 +10194,7 @@
         </p:nvSpPr>
         <p:spPr>
           <a:xfrm>
-            <a:off x="2311603" y="2791205"/>
+            <a:off x="2311603" y="2836925"/>
             <a:ext cx="1497787" cy="228600"/>
           </a:xfrm>
           <a:prstGeom prst="rect">
@@ -10604,7 +10230,7 @@
         </p:nvSpPr>
         <p:spPr>
           <a:xfrm>
-            <a:off x="640080" y="3038093"/>
+            <a:off x="640080" y="3083813"/>
             <a:ext cx="3200400" cy="4572"/>
           </a:xfrm>
           <a:prstGeom prst="rect">
@@ -10642,85 +10268,13 @@
       </p:sp>
       <p:sp>
         <p:nvSpPr>
-          <p:cNvPr id="21" name="TextBox 20"/>
-          <p:cNvSpPr txBox="1"/>
-          <p:nvPr/>
-        </p:nvSpPr>
-        <p:spPr>
-          <a:xfrm>
-            <a:off x="640080" y="3083813"/>
-            <a:ext cx="2068372" cy="228600"/>
-          </a:xfrm>
-          <a:prstGeom prst="rect">
-            <a:avLst/>
-          </a:prstGeom>
-          <a:noFill/>
-        </p:spPr>
-        <p:txBody>
-          <a:bodyPr wrap="square">
-            <a:spAutoFit/>
-          </a:bodyPr>
-          <a:lstStyle/>
-          <a:p>
-            <a:pPr algn="l">
-              <a:defRPr sz="1100" b="0">
-                <a:solidFill>
-                  <a:srgbClr val="374151"/>
-                </a:solidFill>
-                <a:latin typeface="Segoe UI"/>
-              </a:defRPr>
-            </a:pPr>
-            <a:r>
-              <a:t>Wk 7-8: Spiritual AI Guru Bot</a:t>
-            </a:r>
-          </a:p>
-        </p:txBody>
-      </p:sp>
-      <p:sp>
-        <p:nvSpPr>
-          <p:cNvPr id="22" name="TextBox 21"/>
-          <p:cNvSpPr txBox="1"/>
-          <p:nvPr/>
-        </p:nvSpPr>
-        <p:spPr>
-          <a:xfrm>
-            <a:off x="2311603" y="3083813"/>
-            <a:ext cx="1497787" cy="228600"/>
-          </a:xfrm>
-          <a:prstGeom prst="rect">
-            <a:avLst/>
-          </a:prstGeom>
-          <a:noFill/>
-        </p:spPr>
-        <p:txBody>
-          <a:bodyPr wrap="square">
-            <a:spAutoFit/>
-          </a:bodyPr>
-          <a:lstStyle/>
-          <a:p>
-            <a:pPr algn="r">
-              <a:defRPr sz="1100" b="1">
-                <a:solidFill>
-                  <a:srgbClr val="1F2937"/>
-                </a:solidFill>
-                <a:latin typeface="Segoe UI"/>
-              </a:defRPr>
-            </a:pPr>
-            <a:r>
-              <a:t>$2,000</a:t>
-            </a:r>
-          </a:p>
-        </p:txBody>
-      </p:sp>
-      <p:sp>
-        <p:nvSpPr>
           <p:cNvPr id="23" name="Rectangle 22"/>
           <p:cNvSpPr/>
           <p:nvPr/>
         </p:nvSpPr>
         <p:spPr>
           <a:xfrm>
-            <a:off x="640080" y="3330701"/>
+            <a:off x="640080" y="3376421"/>
             <a:ext cx="3200400" cy="4572"/>
           </a:xfrm>
           <a:prstGeom prst="rect">
@@ -10764,7 +10318,7 @@
         </p:nvSpPr>
         <p:spPr>
           <a:xfrm>
-            <a:off x="640080" y="3376421"/>
+            <a:off x="644652" y="3113531"/>
             <a:ext cx="2068372" cy="228600"/>
           </a:xfrm>
           <a:prstGeom prst="rect">
@@ -10800,7 +10354,7 @@
         </p:nvSpPr>
         <p:spPr>
           <a:xfrm>
-            <a:off x="2311603" y="3376421"/>
+            <a:off x="2316175" y="3113531"/>
             <a:ext cx="1497787" cy="228600"/>
           </a:xfrm>
           <a:prstGeom prst="rect">
@@ -10836,7 +10390,7 @@
         </p:nvSpPr>
         <p:spPr>
           <a:xfrm>
-            <a:off x="640080" y="3623309"/>
+            <a:off x="644652" y="3360419"/>
             <a:ext cx="3200400" cy="4572"/>
           </a:xfrm>
           <a:prstGeom prst="rect">
@@ -10880,7 +10434,7 @@
         </p:nvSpPr>
         <p:spPr>
           <a:xfrm>
-            <a:off x="640080" y="3714749"/>
+            <a:off x="640080" y="3760469"/>
             <a:ext cx="3200400" cy="18288"/>
           </a:xfrm>
           <a:prstGeom prst="rect">
@@ -10924,7 +10478,7 @@
         </p:nvSpPr>
         <p:spPr>
           <a:xfrm>
-            <a:off x="640080" y="3787901"/>
+            <a:off x="640080" y="3833621"/>
             <a:ext cx="1783080" cy="274320"/>
           </a:xfrm>
           <a:prstGeom prst="rect">
@@ -10960,7 +10514,7 @@
         </p:nvSpPr>
         <p:spPr>
           <a:xfrm>
-            <a:off x="2061972" y="3787901"/>
+            <a:off x="2061972" y="3833621"/>
             <a:ext cx="1783080" cy="274320"/>
           </a:xfrm>
           <a:prstGeom prst="rect">
@@ -10996,7 +10550,7 @@
         </p:nvSpPr>
         <p:spPr>
           <a:xfrm>
-            <a:off x="4297680" y="1703070"/>
+            <a:off x="4297680" y="1748790"/>
             <a:ext cx="3566160" cy="2788920"/>
           </a:xfrm>
           <a:prstGeom prst="roundRect">
@@ -11042,7 +10596,7 @@
         </p:nvSpPr>
         <p:spPr>
           <a:xfrm>
-            <a:off x="4297680" y="1703070"/>
+            <a:off x="4297680" y="1748790"/>
             <a:ext cx="3566160" cy="411480"/>
           </a:xfrm>
           <a:prstGeom prst="rect">
@@ -11088,7 +10642,7 @@
         </p:nvSpPr>
         <p:spPr>
           <a:xfrm>
-            <a:off x="4480560" y="1776222"/>
+            <a:off x="4480560" y="1821942"/>
             <a:ext cx="3200400" cy="274320"/>
           </a:xfrm>
           <a:prstGeom prst="rect">
@@ -11124,7 +10678,7 @@
         </p:nvSpPr>
         <p:spPr>
           <a:xfrm>
-            <a:off x="4480560" y="2205990"/>
+            <a:off x="4480560" y="2251710"/>
             <a:ext cx="2068372" cy="228600"/>
           </a:xfrm>
           <a:prstGeom prst="rect">
@@ -11160,7 +10714,7 @@
         </p:nvSpPr>
         <p:spPr>
           <a:xfrm>
-            <a:off x="6152083" y="2205990"/>
+            <a:off x="6152083" y="2251710"/>
             <a:ext cx="1497787" cy="228600"/>
           </a:xfrm>
           <a:prstGeom prst="rect">
@@ -11196,7 +10750,7 @@
         </p:nvSpPr>
         <p:spPr>
           <a:xfrm>
-            <a:off x="4480560" y="2452878"/>
+            <a:off x="4480560" y="2498598"/>
             <a:ext cx="3200400" cy="4572"/>
           </a:xfrm>
           <a:prstGeom prst="rect">
@@ -11240,7 +10794,7 @@
         </p:nvSpPr>
         <p:spPr>
           <a:xfrm>
-            <a:off x="4480560" y="2498597"/>
+            <a:off x="4480560" y="2544317"/>
             <a:ext cx="2068372" cy="228600"/>
           </a:xfrm>
           <a:prstGeom prst="rect">
@@ -11276,7 +10830,7 @@
         </p:nvSpPr>
         <p:spPr>
           <a:xfrm>
-            <a:off x="6152083" y="2498597"/>
+            <a:off x="6152083" y="2544317"/>
             <a:ext cx="1497787" cy="228600"/>
           </a:xfrm>
           <a:prstGeom prst="rect">
@@ -11312,7 +10866,7 @@
         </p:nvSpPr>
         <p:spPr>
           <a:xfrm>
-            <a:off x="4480560" y="2745485"/>
+            <a:off x="4480560" y="2791205"/>
             <a:ext cx="3200400" cy="4572"/>
           </a:xfrm>
           <a:prstGeom prst="rect">
@@ -11356,7 +10910,7 @@
         </p:nvSpPr>
         <p:spPr>
           <a:xfrm>
-            <a:off x="4480560" y="2791205"/>
+            <a:off x="4480560" y="2836925"/>
             <a:ext cx="2068372" cy="228600"/>
           </a:xfrm>
           <a:prstGeom prst="rect">
@@ -11392,7 +10946,7 @@
         </p:nvSpPr>
         <p:spPr>
           <a:xfrm>
-            <a:off x="6152083" y="2791205"/>
+            <a:off x="6152083" y="2836925"/>
             <a:ext cx="1497787" cy="228600"/>
           </a:xfrm>
           <a:prstGeom prst="rect">
@@ -11428,7 +10982,7 @@
         </p:nvSpPr>
         <p:spPr>
           <a:xfrm>
-            <a:off x="4480560" y="3038093"/>
+            <a:off x="4480560" y="3083813"/>
             <a:ext cx="3200400" cy="4572"/>
           </a:xfrm>
           <a:prstGeom prst="rect">
@@ -11472,7 +11026,7 @@
         </p:nvSpPr>
         <p:spPr>
           <a:xfrm>
-            <a:off x="4480560" y="3083813"/>
+            <a:off x="4480560" y="3129533"/>
             <a:ext cx="2068372" cy="228600"/>
           </a:xfrm>
           <a:prstGeom prst="rect">
@@ -11508,7 +11062,7 @@
         </p:nvSpPr>
         <p:spPr>
           <a:xfrm>
-            <a:off x="6152083" y="3083813"/>
+            <a:off x="6152083" y="3129533"/>
             <a:ext cx="1497787" cy="228600"/>
           </a:xfrm>
           <a:prstGeom prst="rect">
@@ -11544,7 +11098,7 @@
         </p:nvSpPr>
         <p:spPr>
           <a:xfrm>
-            <a:off x="4480560" y="3330701"/>
+            <a:off x="4480560" y="3376421"/>
             <a:ext cx="3200400" cy="4572"/>
           </a:xfrm>
           <a:prstGeom prst="rect">
@@ -11588,7 +11142,7 @@
         </p:nvSpPr>
         <p:spPr>
           <a:xfrm>
-            <a:off x="4480560" y="3376421"/>
+            <a:off x="4480560" y="3422141"/>
             <a:ext cx="2068372" cy="228600"/>
           </a:xfrm>
           <a:prstGeom prst="rect">
@@ -11624,7 +11178,7 @@
         </p:nvSpPr>
         <p:spPr>
           <a:xfrm>
-            <a:off x="6152083" y="3376421"/>
+            <a:off x="6152083" y="3422141"/>
             <a:ext cx="1497787" cy="228600"/>
           </a:xfrm>
           <a:prstGeom prst="rect">
@@ -11660,7 +11214,7 @@
         </p:nvSpPr>
         <p:spPr>
           <a:xfrm>
-            <a:off x="4480560" y="3623309"/>
+            <a:off x="4480560" y="3669029"/>
             <a:ext cx="3200400" cy="4572"/>
           </a:xfrm>
           <a:prstGeom prst="rect">
@@ -11704,7 +11258,7 @@
         </p:nvSpPr>
         <p:spPr>
           <a:xfrm>
-            <a:off x="4480560" y="3669029"/>
+            <a:off x="4480560" y="3714749"/>
             <a:ext cx="2068372" cy="228600"/>
           </a:xfrm>
           <a:prstGeom prst="rect">
@@ -11740,7 +11294,7 @@
         </p:nvSpPr>
         <p:spPr>
           <a:xfrm>
-            <a:off x="6152083" y="3669029"/>
+            <a:off x="6152083" y="3714749"/>
             <a:ext cx="1497787" cy="228600"/>
           </a:xfrm>
           <a:prstGeom prst="rect">
@@ -11776,7 +11330,7 @@
         </p:nvSpPr>
         <p:spPr>
           <a:xfrm>
-            <a:off x="4480560" y="3915917"/>
+            <a:off x="4480560" y="3961637"/>
             <a:ext cx="3200400" cy="4572"/>
           </a:xfrm>
           <a:prstGeom prst="rect">
@@ -11820,7 +11374,7 @@
         </p:nvSpPr>
         <p:spPr>
           <a:xfrm>
-            <a:off x="4480560" y="4007357"/>
+            <a:off x="4480560" y="4053077"/>
             <a:ext cx="3200400" cy="18288"/>
           </a:xfrm>
           <a:prstGeom prst="rect">
@@ -11864,7 +11418,7 @@
         </p:nvSpPr>
         <p:spPr>
           <a:xfrm>
-            <a:off x="4480560" y="4080509"/>
+            <a:off x="4480560" y="4126229"/>
             <a:ext cx="1783080" cy="274320"/>
           </a:xfrm>
           <a:prstGeom prst="rect">
@@ -11900,7 +11454,7 @@
         </p:nvSpPr>
         <p:spPr>
           <a:xfrm>
-            <a:off x="5902452" y="4080509"/>
+            <a:off x="5902452" y="4126229"/>
             <a:ext cx="1783080" cy="274320"/>
           </a:xfrm>
           <a:prstGeom prst="rect">
@@ -11936,7 +11490,7 @@
         </p:nvSpPr>
         <p:spPr>
           <a:xfrm>
-            <a:off x="8138160" y="1703070"/>
+            <a:off x="8138160" y="1748790"/>
             <a:ext cx="3566160" cy="2788920"/>
           </a:xfrm>
           <a:prstGeom prst="roundRect">
@@ -11982,7 +11536,7 @@
         </p:nvSpPr>
         <p:spPr>
           <a:xfrm>
-            <a:off x="8138160" y="1703070"/>
+            <a:off x="8138160" y="1748790"/>
             <a:ext cx="3566160" cy="411480"/>
           </a:xfrm>
           <a:prstGeom prst="rect">
@@ -12028,7 +11582,7 @@
         </p:nvSpPr>
         <p:spPr>
           <a:xfrm>
-            <a:off x="8321040" y="1776222"/>
+            <a:off x="8321040" y="1821942"/>
             <a:ext cx="3200400" cy="274320"/>
           </a:xfrm>
           <a:prstGeom prst="rect">
@@ -12064,7 +11618,7 @@
         </p:nvSpPr>
         <p:spPr>
           <a:xfrm>
-            <a:off x="8321040" y="2205990"/>
+            <a:off x="8321040" y="2251710"/>
             <a:ext cx="2068372" cy="228600"/>
           </a:xfrm>
           <a:prstGeom prst="rect">
@@ -12100,7 +11654,7 @@
         </p:nvSpPr>
         <p:spPr>
           <a:xfrm>
-            <a:off x="9992563" y="2205990"/>
+            <a:off x="9992563" y="2251710"/>
             <a:ext cx="1497787" cy="228600"/>
           </a:xfrm>
           <a:prstGeom prst="rect">
@@ -12136,7 +11690,7 @@
         </p:nvSpPr>
         <p:spPr>
           <a:xfrm>
-            <a:off x="8321040" y="2452878"/>
+            <a:off x="8321040" y="2498598"/>
             <a:ext cx="3200400" cy="4572"/>
           </a:xfrm>
           <a:prstGeom prst="rect">
@@ -12180,7 +11734,7 @@
         </p:nvSpPr>
         <p:spPr>
           <a:xfrm>
-            <a:off x="8321040" y="2498597"/>
+            <a:off x="8321040" y="2544317"/>
             <a:ext cx="2068372" cy="228600"/>
           </a:xfrm>
           <a:prstGeom prst="rect">
@@ -12216,7 +11770,7 @@
         </p:nvSpPr>
         <p:spPr>
           <a:xfrm>
-            <a:off x="9992563" y="2498597"/>
+            <a:off x="9992563" y="2544317"/>
             <a:ext cx="1497787" cy="228600"/>
           </a:xfrm>
           <a:prstGeom prst="rect">
@@ -12252,7 +11806,7 @@
         </p:nvSpPr>
         <p:spPr>
           <a:xfrm>
-            <a:off x="8321040" y="2745485"/>
+            <a:off x="8321040" y="2791205"/>
             <a:ext cx="3200400" cy="4572"/>
           </a:xfrm>
           <a:prstGeom prst="rect">
@@ -12296,7 +11850,7 @@
         </p:nvSpPr>
         <p:spPr>
           <a:xfrm>
-            <a:off x="8321040" y="2791205"/>
+            <a:off x="8321040" y="2836925"/>
             <a:ext cx="2068372" cy="228600"/>
           </a:xfrm>
           <a:prstGeom prst="rect">
@@ -12332,7 +11886,7 @@
         </p:nvSpPr>
         <p:spPr>
           <a:xfrm>
-            <a:off x="9992563" y="2791205"/>
+            <a:off x="9992563" y="2836925"/>
             <a:ext cx="1497787" cy="228600"/>
           </a:xfrm>
           <a:prstGeom prst="rect">
@@ -12368,7 +11922,7 @@
         </p:nvSpPr>
         <p:spPr>
           <a:xfrm>
-            <a:off x="8321040" y="3038093"/>
+            <a:off x="8321040" y="3083813"/>
             <a:ext cx="3200400" cy="4572"/>
           </a:xfrm>
           <a:prstGeom prst="rect">
@@ -12412,7 +11966,7 @@
         </p:nvSpPr>
         <p:spPr>
           <a:xfrm>
-            <a:off x="8321040" y="3083813"/>
+            <a:off x="8321040" y="3129533"/>
             <a:ext cx="2068372" cy="228600"/>
           </a:xfrm>
           <a:prstGeom prst="rect">
@@ -12448,7 +12002,7 @@
         </p:nvSpPr>
         <p:spPr>
           <a:xfrm>
-            <a:off x="9992563" y="3083813"/>
+            <a:off x="9992563" y="3129533"/>
             <a:ext cx="1497787" cy="228600"/>
           </a:xfrm>
           <a:prstGeom prst="rect">
@@ -12484,7 +12038,7 @@
         </p:nvSpPr>
         <p:spPr>
           <a:xfrm>
-            <a:off x="8321040" y="3330701"/>
+            <a:off x="8321040" y="3376421"/>
             <a:ext cx="3200400" cy="4572"/>
           </a:xfrm>
           <a:prstGeom prst="rect">
@@ -12528,7 +12082,7 @@
         </p:nvSpPr>
         <p:spPr>
           <a:xfrm>
-            <a:off x="8321040" y="3376421"/>
+            <a:off x="8321040" y="3422141"/>
             <a:ext cx="2068372" cy="228600"/>
           </a:xfrm>
           <a:prstGeom prst="rect">
@@ -12564,7 +12118,7 @@
         </p:nvSpPr>
         <p:spPr>
           <a:xfrm>
-            <a:off x="9992563" y="3376421"/>
+            <a:off x="9992563" y="3422141"/>
             <a:ext cx="1497787" cy="228600"/>
           </a:xfrm>
           <a:prstGeom prst="rect">
@@ -12600,7 +12154,7 @@
         </p:nvSpPr>
         <p:spPr>
           <a:xfrm>
-            <a:off x="8321040" y="3623309"/>
+            <a:off x="8321040" y="3669029"/>
             <a:ext cx="3200400" cy="4572"/>
           </a:xfrm>
           <a:prstGeom prst="rect">
@@ -12644,7 +12198,7 @@
         </p:nvSpPr>
         <p:spPr>
           <a:xfrm>
-            <a:off x="8321040" y="3714749"/>
+            <a:off x="8321040" y="3760469"/>
             <a:ext cx="3200400" cy="18288"/>
           </a:xfrm>
           <a:prstGeom prst="rect">
@@ -12688,7 +12242,7 @@
         </p:nvSpPr>
         <p:spPr>
           <a:xfrm>
-            <a:off x="8321040" y="3787901"/>
+            <a:off x="8321040" y="3833621"/>
             <a:ext cx="1783080" cy="274320"/>
           </a:xfrm>
           <a:prstGeom prst="rect">
@@ -12724,7 +12278,7 @@
         </p:nvSpPr>
         <p:spPr>
           <a:xfrm>
-            <a:off x="9742932" y="3787901"/>
+            <a:off x="9742932" y="3833621"/>
             <a:ext cx="1783080" cy="274320"/>
           </a:xfrm>
           <a:prstGeom prst="rect">
@@ -12760,7 +12314,7 @@
         </p:nvSpPr>
         <p:spPr>
           <a:xfrm>
-            <a:off x="457200" y="4697729"/>
+            <a:off x="457200" y="4743449"/>
             <a:ext cx="5303520" cy="1618487"/>
           </a:xfrm>
           <a:prstGeom prst="roundRect">
@@ -12806,7 +12360,7 @@
         </p:nvSpPr>
         <p:spPr>
           <a:xfrm>
-            <a:off x="457200" y="4697730"/>
+            <a:off x="457200" y="4743450"/>
             <a:ext cx="5303520" cy="411480"/>
           </a:xfrm>
           <a:prstGeom prst="rect">
@@ -12852,7 +12406,7 @@
         </p:nvSpPr>
         <p:spPr>
           <a:xfrm>
-            <a:off x="640080" y="4770882"/>
+            <a:off x="640080" y="4816602"/>
             <a:ext cx="4937759" cy="274320"/>
           </a:xfrm>
           <a:prstGeom prst="rect">
@@ -12888,7 +12442,7 @@
         </p:nvSpPr>
         <p:spPr>
           <a:xfrm>
-            <a:off x="640080" y="5200650"/>
+            <a:off x="640080" y="5246370"/>
             <a:ext cx="3076041" cy="228600"/>
           </a:xfrm>
           <a:prstGeom prst="rect">
@@ -12924,7 +12478,7 @@
         </p:nvSpPr>
         <p:spPr>
           <a:xfrm>
-            <a:off x="3215030" y="5200650"/>
+            <a:off x="3215030" y="5246370"/>
             <a:ext cx="2227478" cy="228600"/>
           </a:xfrm>
           <a:prstGeom prst="rect">
@@ -12960,7 +12514,7 @@
         </p:nvSpPr>
         <p:spPr>
           <a:xfrm>
-            <a:off x="640080" y="5447538"/>
+            <a:off x="640080" y="5493258"/>
             <a:ext cx="4937759" cy="4572"/>
           </a:xfrm>
           <a:prstGeom prst="rect">
@@ -13004,7 +12558,7 @@
         </p:nvSpPr>
         <p:spPr>
           <a:xfrm>
-            <a:off x="640080" y="5493258"/>
+            <a:off x="640080" y="5538978"/>
             <a:ext cx="3076041" cy="228600"/>
           </a:xfrm>
           <a:prstGeom prst="rect">
@@ -13040,7 +12594,7 @@
         </p:nvSpPr>
         <p:spPr>
           <a:xfrm>
-            <a:off x="3215030" y="5493258"/>
+            <a:off x="3215030" y="5538978"/>
             <a:ext cx="2227478" cy="228600"/>
           </a:xfrm>
           <a:prstGeom prst="rect">
@@ -13076,7 +12630,7 @@
         </p:nvSpPr>
         <p:spPr>
           <a:xfrm>
-            <a:off x="640080" y="5740146"/>
+            <a:off x="640080" y="5785866"/>
             <a:ext cx="4937759" cy="4572"/>
           </a:xfrm>
           <a:prstGeom prst="rect">
@@ -13120,7 +12674,7 @@
         </p:nvSpPr>
         <p:spPr>
           <a:xfrm>
-            <a:off x="640080" y="5831586"/>
+            <a:off x="640080" y="5877306"/>
             <a:ext cx="4937759" cy="18288"/>
           </a:xfrm>
           <a:prstGeom prst="rect">
@@ -13164,7 +12718,7 @@
         </p:nvSpPr>
         <p:spPr>
           <a:xfrm>
-            <a:off x="640080" y="5904738"/>
+            <a:off x="640080" y="5950458"/>
             <a:ext cx="2651760" cy="274320"/>
           </a:xfrm>
           <a:prstGeom prst="rect">
@@ -13201,7 +12755,7 @@
         </p:nvSpPr>
         <p:spPr>
           <a:xfrm>
-            <a:off x="2843784" y="5904738"/>
+            <a:off x="2843784" y="5950458"/>
             <a:ext cx="2651760" cy="274320"/>
           </a:xfrm>
           <a:prstGeom prst="rect">
@@ -13237,7 +12791,7 @@
         </p:nvSpPr>
         <p:spPr>
           <a:xfrm>
-            <a:off x="6035040" y="4697730"/>
+            <a:off x="6035040" y="4743450"/>
             <a:ext cx="5669280" cy="1618486"/>
           </a:xfrm>
           <a:prstGeom prst="roundRect">
@@ -13283,7 +12837,7 @@
         </p:nvSpPr>
         <p:spPr>
           <a:xfrm>
-            <a:off x="6035040" y="4697730"/>
+            <a:off x="6035040" y="4743450"/>
             <a:ext cx="5669280" cy="365760"/>
           </a:xfrm>
           <a:prstGeom prst="rect">
@@ -13329,7 +12883,7 @@
         </p:nvSpPr>
         <p:spPr>
           <a:xfrm>
-            <a:off x="6263640" y="4761738"/>
+            <a:off x="6263640" y="4807458"/>
             <a:ext cx="4572000" cy="256032"/>
           </a:xfrm>
           <a:prstGeom prst="rect">
@@ -13365,7 +12919,7 @@
         </p:nvSpPr>
         <p:spPr>
           <a:xfrm>
-            <a:off x="6309360" y="5182362"/>
+            <a:off x="6309360" y="5228082"/>
             <a:ext cx="45720" cy="45720"/>
           </a:xfrm>
           <a:prstGeom prst="ellipse">
@@ -13409,7 +12963,7 @@
         </p:nvSpPr>
         <p:spPr>
           <a:xfrm>
-            <a:off x="6446520" y="5136642"/>
+            <a:off x="6446520" y="5182362"/>
             <a:ext cx="5029200" cy="182880"/>
           </a:xfrm>
           <a:prstGeom prst="rect">
@@ -13445,7 +12999,7 @@
         </p:nvSpPr>
         <p:spPr>
           <a:xfrm>
-            <a:off x="6309360" y="5365242"/>
+            <a:off x="6309360" y="5410962"/>
             <a:ext cx="45720" cy="45720"/>
           </a:xfrm>
           <a:prstGeom prst="ellipse">
@@ -13489,7 +13043,7 @@
         </p:nvSpPr>
         <p:spPr>
           <a:xfrm>
-            <a:off x="6446520" y="5319522"/>
+            <a:off x="6446520" y="5365242"/>
             <a:ext cx="5029200" cy="182880"/>
           </a:xfrm>
           <a:prstGeom prst="rect">
@@ -13519,13 +13073,13 @@
       </p:sp>
       <p:sp>
         <p:nvSpPr>
-          <p:cNvPr id="94" name="Oval 93"/>
+          <p:cNvPr id="96" name="Oval 95"/>
           <p:cNvSpPr/>
           <p:nvPr/>
         </p:nvSpPr>
         <p:spPr>
           <a:xfrm>
-            <a:off x="6309360" y="5548122"/>
+            <a:off x="6309360" y="5628132"/>
             <a:ext cx="45720" cy="45720"/>
           </a:xfrm>
           <a:prstGeom prst="ellipse">
@@ -13563,13 +13117,13 @@
       </p:sp>
       <p:sp>
         <p:nvSpPr>
-          <p:cNvPr id="95" name="TextBox 94"/>
+          <p:cNvPr id="97" name="TextBox 96"/>
           <p:cNvSpPr txBox="1"/>
           <p:nvPr/>
         </p:nvSpPr>
         <p:spPr>
           <a:xfrm>
-            <a:off x="6446520" y="5502402"/>
+            <a:off x="6446520" y="5582412"/>
             <a:ext cx="5029200" cy="182880"/>
           </a:xfrm>
           <a:prstGeom prst="rect">
@@ -13592,20 +13146,20 @@
               </a:defRPr>
             </a:pPr>
             <a:r>
-              <a:t>AI Guru Bot uses LLM API (e.g. Claude/OpenAI) with faith-specific prompts</a:t>
-            </a:r>
-          </a:p>
-        </p:txBody>
-      </p:sp>
-      <p:sp>
-        <p:nvSpPr>
-          <p:cNvPr id="96" name="Oval 95"/>
+              <a:t>Excludes: Mobile apps, dedicated support, multi-region deployment</a:t>
+            </a:r>
+          </a:p>
+        </p:txBody>
+      </p:sp>
+      <p:sp>
+        <p:nvSpPr>
+          <p:cNvPr id="98" name="Oval 97"/>
           <p:cNvSpPr/>
           <p:nvPr/>
         </p:nvSpPr>
         <p:spPr>
           <a:xfrm>
-            <a:off x="6309360" y="5731002"/>
+            <a:off x="6309360" y="5811012"/>
             <a:ext cx="45720" cy="45720"/>
           </a:xfrm>
           <a:prstGeom prst="ellipse">
@@ -13643,13 +13197,13 @@
       </p:sp>
       <p:sp>
         <p:nvSpPr>
-          <p:cNvPr id="97" name="TextBox 96"/>
+          <p:cNvPr id="99" name="TextBox 98"/>
           <p:cNvSpPr txBox="1"/>
           <p:nvPr/>
         </p:nvSpPr>
         <p:spPr>
           <a:xfrm>
-            <a:off x="6446520" y="5685282"/>
+            <a:off x="6446520" y="5765292"/>
             <a:ext cx="5029200" cy="182880"/>
           </a:xfrm>
           <a:prstGeom prst="rect">
@@ -13672,65 +13226,21 @@
               </a:defRPr>
             </a:pPr>
             <a:r>
-              <a:t>Excludes: Mobile apps, dedicated support, multi-region deployment</a:t>
-            </a:r>
-          </a:p>
-        </p:txBody>
-      </p:sp>
-      <p:sp>
-        <p:nvSpPr>
-          <p:cNvPr id="98" name="Oval 97"/>
-          <p:cNvSpPr/>
-          <p:nvPr/>
-        </p:nvSpPr>
-        <p:spPr>
-          <a:xfrm>
-            <a:off x="6309360" y="5913882"/>
-            <a:ext cx="45720" cy="45720"/>
-          </a:xfrm>
-          <a:prstGeom prst="ellipse">
-            <a:avLst/>
-          </a:prstGeom>
-          <a:solidFill>
-            <a:srgbClr val="2563EB"/>
-          </a:solidFill>
-          <a:ln>
-            <a:noFill/>
-          </a:ln>
-        </p:spPr>
-        <p:style>
-          <a:lnRef idx="1">
-            <a:schemeClr val="accent1"/>
-          </a:lnRef>
-          <a:fillRef idx="3">
-            <a:schemeClr val="accent1"/>
-          </a:fillRef>
-          <a:effectRef idx="2">
-            <a:schemeClr val="accent1"/>
-          </a:effectRef>
-          <a:fontRef idx="minor">
-            <a:schemeClr val="lt1"/>
-          </a:fontRef>
-        </p:style>
-        <p:txBody>
-          <a:bodyPr rtlCol="0" anchor="ctr"/>
-          <a:lstStyle/>
-          <a:p>
-            <a:pPr algn="ctr"/>
-            <a:endParaRPr/>
-          </a:p>
-        </p:txBody>
-      </p:sp>
-      <p:sp>
-        <p:nvSpPr>
-          <p:cNvPr id="99" name="TextBox 98"/>
+              <a:t>Timeline assumes single developer, can accelerate with team</a:t>
+            </a:r>
+          </a:p>
+        </p:txBody>
+      </p:sp>
+      <p:sp>
+        <p:nvSpPr>
+          <p:cNvPr id="100" name="TextBox 99"/>
           <p:cNvSpPr txBox="1"/>
           <p:nvPr/>
         </p:nvSpPr>
         <p:spPr>
           <a:xfrm>
-            <a:off x="6446520" y="5868162"/>
-            <a:ext cx="5029200" cy="182880"/>
+            <a:off x="731520" y="6537960"/>
+            <a:ext cx="2743200" cy="274320"/>
           </a:xfrm>
           <a:prstGeom prst="rect">
             <a:avLst/>
@@ -13746,42 +13256,6 @@
             <a:pPr algn="l">
               <a:defRPr sz="900" b="0">
                 <a:solidFill>
-                  <a:srgbClr val="6B7280"/>
-                </a:solidFill>
-                <a:latin typeface="Segoe UI"/>
-              </a:defRPr>
-            </a:pPr>
-            <a:r>
-              <a:t>Timeline assumes single developer, can accelerate with team</a:t>
-            </a:r>
-          </a:p>
-        </p:txBody>
-      </p:sp>
-      <p:sp>
-        <p:nvSpPr>
-          <p:cNvPr id="100" name="TextBox 99"/>
-          <p:cNvSpPr txBox="1"/>
-          <p:nvPr/>
-        </p:nvSpPr>
-        <p:spPr>
-          <a:xfrm>
-            <a:off x="731520" y="6492240"/>
-            <a:ext cx="2743200" cy="274320"/>
-          </a:xfrm>
-          <a:prstGeom prst="rect">
-            <a:avLst/>
-          </a:prstGeom>
-          <a:noFill/>
-        </p:spPr>
-        <p:txBody>
-          <a:bodyPr wrap="square">
-            <a:spAutoFit/>
-          </a:bodyPr>
-          <a:lstStyle/>
-          <a:p>
-            <a:pPr algn="l">
-              <a:defRPr sz="900" b="0">
-                <a:solidFill>
                   <a:srgbClr val="9CA3AF"/>
                 </a:solidFill>
                 <a:latin typeface="Segoe UI"/>
@@ -13801,7 +13275,7 @@
         </p:nvSpPr>
         <p:spPr>
           <a:xfrm>
-            <a:off x="9144000" y="6492240"/>
+            <a:off x="9144000" y="6537960"/>
             <a:ext cx="2560320" cy="274320"/>
           </a:xfrm>
           <a:prstGeom prst="rect">
@@ -13838,6 +13312,259 @@
 </file>
 
 <file path=ppt/theme/theme1.xml><?xml version="1.0" encoding="utf-8"?>
+<a:theme xmlns:a="http://schemas.openxmlformats.org/drawingml/2006/main" name="View">
+  <a:themeElements>
+    <a:clrScheme name="View">
+      <a:dk1>
+        <a:srgbClr val="000000"/>
+      </a:dk1>
+      <a:lt1>
+        <a:srgbClr val="FFFFFF"/>
+      </a:lt1>
+      <a:dk2>
+        <a:srgbClr val="46464A"/>
+      </a:dk2>
+      <a:lt2>
+        <a:srgbClr val="D6D3CC"/>
+      </a:lt2>
+      <a:accent1>
+        <a:srgbClr val="6F6F74"/>
+      </a:accent1>
+      <a:accent2>
+        <a:srgbClr val="92A9B9"/>
+      </a:accent2>
+      <a:accent3>
+        <a:srgbClr val="A7B789"/>
+      </a:accent3>
+      <a:accent4>
+        <a:srgbClr val="B9A489"/>
+      </a:accent4>
+      <a:accent5>
+        <a:srgbClr val="8D6374"/>
+      </a:accent5>
+      <a:accent6>
+        <a:srgbClr val="9B7362"/>
+      </a:accent6>
+      <a:hlink>
+        <a:srgbClr val="67AABF"/>
+      </a:hlink>
+      <a:folHlink>
+        <a:srgbClr val="ABAFA5"/>
+      </a:folHlink>
+    </a:clrScheme>
+    <a:fontScheme name="View">
+      <a:majorFont>
+        <a:latin typeface="Century Schoolbook" panose="02040604050505020304"/>
+        <a:ea typeface=""/>
+        <a:cs typeface=""/>
+        <a:font script="Jpan" typeface="ＭＳ ゴシック"/>
+        <a:font script="Hang" typeface="맑은 고딕"/>
+        <a:font script="Hans" typeface="宋体"/>
+        <a:font script="Hant" typeface="新細明體"/>
+        <a:font script="Arab" typeface="Tahoma"/>
+        <a:font script="Hebr" typeface="Gisha"/>
+        <a:font script="Thai" typeface="DilleniaUPC"/>
+        <a:font script="Ethi" typeface="Nyala"/>
+        <a:font script="Beng" typeface="Vrinda"/>
+        <a:font script="Gujr" typeface="Shruti"/>
+        <a:font script="Khmr" typeface="DaunPenh"/>
+        <a:font script="Knda" typeface="Tunga"/>
+        <a:font script="Guru" typeface="Raavi"/>
+        <a:font script="Cans" typeface="Euphemia"/>
+        <a:font script="Cher" typeface="Plantagenet Cherokee"/>
+        <a:font script="Yiii" typeface="Microsoft Yi Baiti"/>
+        <a:font script="Tibt" typeface="Microsoft Himalaya"/>
+        <a:font script="Thaa" typeface="MV Boli"/>
+        <a:font script="Deva" typeface="Mangal"/>
+        <a:font script="Telu" typeface="Gautami"/>
+        <a:font script="Taml" typeface="Latha"/>
+        <a:font script="Syrc" typeface="Estrangelo Edessa"/>
+        <a:font script="Orya" typeface="Kalinga"/>
+        <a:font script="Mlym" typeface="Kartika"/>
+        <a:font script="Laoo" typeface="DokChampa"/>
+        <a:font script="Sinh" typeface="Iskoola Pota"/>
+        <a:font script="Mong" typeface="Mongolian Baiti"/>
+        <a:font script="Viet" typeface="Tahoma"/>
+        <a:font script="Uigh" typeface="Microsoft Uighur"/>
+        <a:font script="Geor" typeface="Sylfaen"/>
+      </a:majorFont>
+      <a:minorFont>
+        <a:latin typeface="Century Schoolbook" panose="02040604050505020304"/>
+        <a:ea typeface=""/>
+        <a:cs typeface=""/>
+        <a:font script="Jpan" typeface="ＭＳ ゴシック"/>
+        <a:font script="Hang" typeface="맑은 고딕"/>
+        <a:font script="Hans" typeface="宋体"/>
+        <a:font script="Hant" typeface="新細明體"/>
+        <a:font script="Arab" typeface="Tahoma"/>
+        <a:font script="Hebr" typeface="Gisha"/>
+        <a:font script="Thai" typeface="DilleniaUPC"/>
+        <a:font script="Ethi" typeface="Nyala"/>
+        <a:font script="Beng" typeface="Vrinda"/>
+        <a:font script="Gujr" typeface="Shruti"/>
+        <a:font script="Khmr" typeface="DaunPenh"/>
+        <a:font script="Knda" typeface="Tunga"/>
+        <a:font script="Guru" typeface="Raavi"/>
+        <a:font script="Cans" typeface="Euphemia"/>
+        <a:font script="Cher" typeface="Plantagenet Cherokee"/>
+        <a:font script="Yiii" typeface="Microsoft Yi Baiti"/>
+        <a:font script="Tibt" typeface="Microsoft Himalaya"/>
+        <a:font script="Thaa" typeface="MV Boli"/>
+        <a:font script="Deva" typeface="Mangal"/>
+        <a:font script="Telu" typeface="Gautami"/>
+        <a:font script="Taml" typeface="Latha"/>
+        <a:font script="Syrc" typeface="Estrangelo Edessa"/>
+        <a:font script="Orya" typeface="Kalinga"/>
+        <a:font script="Mlym" typeface="Kartika"/>
+        <a:font script="Laoo" typeface="DokChampa"/>
+        <a:font script="Sinh" typeface="Iskoola Pota"/>
+        <a:font script="Mong" typeface="Mongolian Baiti"/>
+        <a:font script="Viet" typeface="Verdana"/>
+        <a:font script="Uigh" typeface="Microsoft Uighur"/>
+        <a:font script="Geor" typeface="Sylfaen"/>
+      </a:minorFont>
+    </a:fontScheme>
+    <a:fmtScheme name="View">
+      <a:fillStyleLst>
+        <a:solidFill>
+          <a:schemeClr val="phClr"/>
+        </a:solidFill>
+        <a:solidFill>
+          <a:schemeClr val="phClr">
+            <a:tint val="60000"/>
+            <a:satMod val="120000"/>
+          </a:schemeClr>
+        </a:solidFill>
+        <a:solidFill>
+          <a:schemeClr val="phClr">
+            <a:shade val="75000"/>
+            <a:satMod val="160000"/>
+          </a:schemeClr>
+        </a:solidFill>
+      </a:fillStyleLst>
+      <a:lnStyleLst>
+        <a:ln w="9525" cap="flat" cmpd="sng" algn="ctr">
+          <a:solidFill>
+            <a:schemeClr val="phClr"/>
+          </a:solidFill>
+          <a:prstDash val="solid"/>
+        </a:ln>
+        <a:ln w="13970" cap="flat" cmpd="sng" algn="ctr">
+          <a:solidFill>
+            <a:schemeClr val="phClr"/>
+          </a:solidFill>
+          <a:prstDash val="solid"/>
+        </a:ln>
+        <a:ln w="17145" cap="flat" cmpd="sng" algn="ctr">
+          <a:solidFill>
+            <a:schemeClr val="phClr">
+              <a:shade val="95000"/>
+              <a:alpha val="95000"/>
+              <a:satMod val="150000"/>
+            </a:schemeClr>
+          </a:solidFill>
+          <a:prstDash val="solid"/>
+        </a:ln>
+      </a:lnStyleLst>
+      <a:effectStyleLst>
+        <a:effectStyle>
+          <a:effectLst/>
+        </a:effectStyle>
+        <a:effectStyle>
+          <a:effectLst>
+            <a:outerShdw blurRad="50800" dist="15240" dir="5400000" algn="tl" rotWithShape="0">
+              <a:srgbClr val="000000">
+                <a:alpha val="75000"/>
+              </a:srgbClr>
+            </a:outerShdw>
+          </a:effectLst>
+          <a:scene3d>
+            <a:camera prst="orthographicFront">
+              <a:rot lat="0" lon="0" rev="0"/>
+            </a:camera>
+            <a:lightRig rig="brightRoom" dir="tl"/>
+          </a:scene3d>
+          <a:sp3d contourW="9525" prstMaterial="flat">
+            <a:bevelT w="0" h="0" prst="coolSlant"/>
+            <a:contourClr>
+              <a:schemeClr val="phClr">
+                <a:shade val="35000"/>
+                <a:satMod val="130000"/>
+              </a:schemeClr>
+            </a:contourClr>
+          </a:sp3d>
+        </a:effectStyle>
+        <a:effectStyle>
+          <a:effectLst>
+            <a:outerShdw blurRad="76200" dist="25400" dir="5400000" algn="tl" rotWithShape="0">
+              <a:srgbClr val="000000">
+                <a:alpha val="55000"/>
+              </a:srgbClr>
+            </a:outerShdw>
+          </a:effectLst>
+          <a:scene3d>
+            <a:camera prst="orthographicFront">
+              <a:rot lat="0" lon="0" rev="0"/>
+            </a:camera>
+            <a:lightRig rig="brightRoom" dir="tl"/>
+          </a:scene3d>
+          <a:sp3d contourW="19050" prstMaterial="flat">
+            <a:bevelT w="0" h="0" prst="coolSlant"/>
+            <a:contourClr>
+              <a:schemeClr val="phClr">
+                <a:shade val="25000"/>
+                <a:satMod val="140000"/>
+              </a:schemeClr>
+            </a:contourClr>
+          </a:sp3d>
+        </a:effectStyle>
+      </a:effectStyleLst>
+      <a:bgFillStyleLst>
+        <a:solidFill>
+          <a:schemeClr val="phClr"/>
+        </a:solidFill>
+        <a:solidFill>
+          <a:schemeClr val="phClr">
+            <a:tint val="95000"/>
+            <a:satMod val="170000"/>
+          </a:schemeClr>
+        </a:solidFill>
+        <a:gradFill rotWithShape="1">
+          <a:gsLst>
+            <a:gs pos="0">
+              <a:schemeClr val="phClr">
+                <a:tint val="94000"/>
+                <a:shade val="98000"/>
+                <a:satMod val="130000"/>
+                <a:lumMod val="102000"/>
+              </a:schemeClr>
+            </a:gs>
+            <a:gs pos="100000">
+              <a:schemeClr val="phClr">
+                <a:tint val="98000"/>
+                <a:shade val="78000"/>
+                <a:satMod val="140000"/>
+              </a:schemeClr>
+            </a:gs>
+          </a:gsLst>
+          <a:path path="circle">
+            <a:fillToRect l="100000" t="100000" r="100000" b="100000"/>
+          </a:path>
+        </a:gradFill>
+      </a:bgFillStyleLst>
+    </a:fmtScheme>
+  </a:themeElements>
+  <a:objectDefaults/>
+  <a:extraClrSchemeLst/>
+  <a:extLst>
+    <a:ext uri="{05A4C25C-085E-4340-85A3-A5531E510DB2}">
+      <thm15:themeFamily xmlns:thm15="http://schemas.microsoft.com/office/thememl/2012/main" name="View" id="{BA0EB5A6-F2D4-4F82-977B-64ADEE4A2A69}" vid="{3969A8A2-35DB-4E3B-8885-16FD20568674}"/>
+    </a:ext>
+  </a:extLst>
+</a:theme>
+</file>
+
+<file path=ppt/theme/theme2.xml><?xml version="1.0" encoding="utf-8"?>
 <a:theme xmlns:a="http://schemas.openxmlformats.org/drawingml/2006/main" name="Office Theme">
   <a:themeElements>
     <a:clrScheme name="Office">
@@ -13848,44 +13575,44 @@
         <a:sysClr val="window" lastClr="FFFFFF"/>
       </a:lt1>
       <a:dk2>
-        <a:srgbClr val="1F497D"/>
+        <a:srgbClr val="44546A"/>
       </a:dk2>
       <a:lt2>
-        <a:srgbClr val="EEECE1"/>
+        <a:srgbClr val="E7E6E6"/>
       </a:lt2>
       <a:accent1>
-        <a:srgbClr val="4F81BD"/>
+        <a:srgbClr val="4472C4"/>
       </a:accent1>
       <a:accent2>
-        <a:srgbClr val="C0504D"/>
+        <a:srgbClr val="ED7D31"/>
       </a:accent2>
       <a:accent3>
-        <a:srgbClr val="9BBB59"/>
+        <a:srgbClr val="A5A5A5"/>
       </a:accent3>
       <a:accent4>
-        <a:srgbClr val="8064A2"/>
+        <a:srgbClr val="FFC000"/>
       </a:accent4>
       <a:accent5>
-        <a:srgbClr val="4BACC6"/>
+        <a:srgbClr val="5B9BD5"/>
       </a:accent5>
       <a:accent6>
-        <a:srgbClr val="F79646"/>
+        <a:srgbClr val="70AD47"/>
       </a:accent6>
       <a:hlink>
-        <a:srgbClr val="0000FF"/>
+        <a:srgbClr val="0563C1"/>
       </a:hlink>
       <a:folHlink>
-        <a:srgbClr val="800080"/>
+        <a:srgbClr val="954F72"/>
       </a:folHlink>
     </a:clrScheme>
     <a:fontScheme name="Office">
       <a:majorFont>
-        <a:latin typeface="Calibri"/>
+        <a:latin typeface="Calibri Light" panose="020F0302020204030204"/>
         <a:ea typeface=""/>
         <a:cs typeface=""/>
-        <a:font script="Jpan" typeface="ＭＳ Ｐゴシック"/>
+        <a:font script="Jpan" typeface="游ゴシック Light"/>
         <a:font script="Hang" typeface="맑은 고딕"/>
-        <a:font script="Hans" typeface="宋体"/>
+        <a:font script="Hans" typeface="等线 Light"/>
         <a:font script="Hant" typeface="新細明體"/>
         <a:font script="Arab" typeface="Times New Roman"/>
         <a:font script="Hebr" typeface="Times New Roman"/>
@@ -13913,14 +13640,31 @@
         <a:font script="Viet" typeface="Times New Roman"/>
         <a:font script="Uigh" typeface="Microsoft Uighur"/>
         <a:font script="Geor" typeface="Sylfaen"/>
+        <a:font script="Armn" typeface="Arial"/>
+        <a:font script="Bugi" typeface="Leelawadee UI"/>
+        <a:font script="Bopo" typeface="Microsoft JhengHei"/>
+        <a:font script="Java" typeface="Javanese Text"/>
+        <a:font script="Lisu" typeface="Segoe UI"/>
+        <a:font script="Mymr" typeface="Myanmar Text"/>
+        <a:font script="Nkoo" typeface="Ebrima"/>
+        <a:font script="Olck" typeface="Nirmala UI"/>
+        <a:font script="Osma" typeface="Ebrima"/>
+        <a:font script="Phag" typeface="Phagspa"/>
+        <a:font script="Syrn" typeface="Estrangelo Edessa"/>
+        <a:font script="Syrj" typeface="Estrangelo Edessa"/>
+        <a:font script="Syre" typeface="Estrangelo Edessa"/>
+        <a:font script="Sora" typeface="Nirmala UI"/>
+        <a:font script="Tale" typeface="Microsoft Tai Le"/>
+        <a:font script="Talu" typeface="Microsoft New Tai Lue"/>
+        <a:font script="Tfng" typeface="Ebrima"/>
       </a:majorFont>
       <a:minorFont>
-        <a:latin typeface="Calibri"/>
+        <a:latin typeface="Calibri" panose="020F0502020204030204"/>
         <a:ea typeface=""/>
         <a:cs typeface=""/>
-        <a:font script="Jpan" typeface="ＭＳ Ｐゴシック"/>
+        <a:font script="Jpan" typeface="游ゴシック"/>
         <a:font script="Hang" typeface="맑은 고딕"/>
-        <a:font script="Hans" typeface="宋体"/>
+        <a:font script="Hans" typeface="等线"/>
         <a:font script="Hant" typeface="新細明體"/>
         <a:font script="Arab" typeface="Arial"/>
         <a:font script="Hebr" typeface="Arial"/>
@@ -13948,6 +13692,23 @@
         <a:font script="Viet" typeface="Arial"/>
         <a:font script="Uigh" typeface="Microsoft Uighur"/>
         <a:font script="Geor" typeface="Sylfaen"/>
+        <a:font script="Armn" typeface="Arial"/>
+        <a:font script="Bugi" typeface="Leelawadee UI"/>
+        <a:font script="Bopo" typeface="Microsoft JhengHei"/>
+        <a:font script="Java" typeface="Javanese Text"/>
+        <a:font script="Lisu" typeface="Segoe UI"/>
+        <a:font script="Mymr" typeface="Myanmar Text"/>
+        <a:font script="Nkoo" typeface="Ebrima"/>
+        <a:font script="Olck" typeface="Nirmala UI"/>
+        <a:font script="Osma" typeface="Ebrima"/>
+        <a:font script="Phag" typeface="Phagspa"/>
+        <a:font script="Syrn" typeface="Estrangelo Edessa"/>
+        <a:font script="Syrj" typeface="Estrangelo Edessa"/>
+        <a:font script="Syre" typeface="Estrangelo Edessa"/>
+        <a:font script="Sora" typeface="Nirmala UI"/>
+        <a:font script="Tale" typeface="Microsoft Tai Le"/>
+        <a:font script="Talu" typeface="Microsoft New Tai Lue"/>
+        <a:font script="Tfng" typeface="Ebrima"/>
       </a:minorFont>
     </a:fontScheme>
     <a:fmtScheme name="Office">
@@ -13959,200 +13720,141 @@
           <a:gsLst>
             <a:gs pos="0">
               <a:schemeClr val="phClr">
-                <a:tint val="50000"/>
-                <a:satMod val="300000"/>
+                <a:lumMod val="110000"/>
+                <a:satMod val="105000"/>
+                <a:tint val="67000"/>
               </a:schemeClr>
             </a:gs>
-            <a:gs pos="35000">
+            <a:gs pos="50000">
               <a:schemeClr val="phClr">
-                <a:tint val="37000"/>
-                <a:satMod val="300000"/>
+                <a:lumMod val="105000"/>
+                <a:satMod val="103000"/>
+                <a:tint val="73000"/>
               </a:schemeClr>
             </a:gs>
             <a:gs pos="100000">
               <a:schemeClr val="phClr">
-                <a:tint val="15000"/>
-                <a:satMod val="350000"/>
+                <a:lumMod val="105000"/>
+                <a:satMod val="109000"/>
+                <a:tint val="81000"/>
               </a:schemeClr>
             </a:gs>
           </a:gsLst>
-          <a:lin ang="16200000" scaled="1"/>
+          <a:lin ang="5400000" scaled="0"/>
         </a:gradFill>
         <a:gradFill rotWithShape="1">
           <a:gsLst>
             <a:gs pos="0">
               <a:schemeClr val="phClr">
-                <a:tint val="100000"/>
+                <a:satMod val="103000"/>
+                <a:lumMod val="102000"/>
+                <a:tint val="94000"/>
+              </a:schemeClr>
+            </a:gs>
+            <a:gs pos="50000">
+              <a:schemeClr val="phClr">
+                <a:satMod val="110000"/>
+                <a:lumMod val="100000"/>
                 <a:shade val="100000"/>
-                <a:satMod val="130000"/>
               </a:schemeClr>
             </a:gs>
             <a:gs pos="100000">
               <a:schemeClr val="phClr">
-                <a:tint val="50000"/>
-                <a:shade val="100000"/>
-                <a:satMod val="350000"/>
+                <a:lumMod val="99000"/>
+                <a:satMod val="120000"/>
+                <a:shade val="78000"/>
               </a:schemeClr>
             </a:gs>
           </a:gsLst>
-          <a:lin ang="16200000" scaled="0"/>
+          <a:lin ang="5400000" scaled="0"/>
         </a:gradFill>
       </a:fillStyleLst>
       <a:lnStyleLst>
-        <a:ln w="9525" cap="flat" cmpd="sng" algn="ctr">
-          <a:solidFill>
-            <a:schemeClr val="phClr">
-              <a:shade val="95000"/>
-              <a:satMod val="105000"/>
-            </a:schemeClr>
-          </a:solidFill>
-          <a:prstDash val="solid"/>
-        </a:ln>
-        <a:ln w="25400" cap="flat" cmpd="sng" algn="ctr">
+        <a:ln w="6350" cap="flat" cmpd="sng" algn="ctr">
           <a:solidFill>
             <a:schemeClr val="phClr"/>
           </a:solidFill>
           <a:prstDash val="solid"/>
+          <a:miter lim="800000"/>
         </a:ln>
-        <a:ln w="38100" cap="flat" cmpd="sng" algn="ctr">
+        <a:ln w="12700" cap="flat" cmpd="sng" algn="ctr">
           <a:solidFill>
             <a:schemeClr val="phClr"/>
           </a:solidFill>
           <a:prstDash val="solid"/>
+          <a:miter lim="800000"/>
+        </a:ln>
+        <a:ln w="19050" cap="flat" cmpd="sng" algn="ctr">
+          <a:solidFill>
+            <a:schemeClr val="phClr"/>
+          </a:solidFill>
+          <a:prstDash val="solid"/>
+          <a:miter lim="800000"/>
         </a:ln>
       </a:lnStyleLst>
       <a:effectStyleLst>
         <a:effectStyle>
+          <a:effectLst/>
+        </a:effectStyle>
+        <a:effectStyle>
+          <a:effectLst/>
+        </a:effectStyle>
+        <a:effectStyle>
           <a:effectLst>
-            <a:outerShdw blurRad="40000" dist="20000" dir="5400000" rotWithShape="0">
+            <a:outerShdw blurRad="57150" dist="19050" dir="5400000" algn="ctr" rotWithShape="0">
               <a:srgbClr val="000000">
-                <a:alpha val="38000"/>
+                <a:alpha val="63000"/>
               </a:srgbClr>
             </a:outerShdw>
           </a:effectLst>
-        </a:effectStyle>
-        <a:effectStyle>
-          <a:effectLst>
-            <a:outerShdw blurRad="40000" dist="23000" dir="5400000" rotWithShape="0">
-              <a:srgbClr val="000000">
-                <a:alpha val="35000"/>
-              </a:srgbClr>
-            </a:outerShdw>
-          </a:effectLst>
-        </a:effectStyle>
-        <a:effectStyle>
-          <a:effectLst>
-            <a:outerShdw blurRad="40000" dist="23000" dir="5400000" rotWithShape="0">
-              <a:srgbClr val="000000">
-                <a:alpha val="35000"/>
-              </a:srgbClr>
-            </a:outerShdw>
-          </a:effectLst>
-          <a:scene3d>
-            <a:camera prst="orthographicFront">
-              <a:rot lat="0" lon="0" rev="0"/>
-            </a:camera>
-            <a:lightRig rig="threePt" dir="t">
-              <a:rot lat="0" lon="0" rev="1200000"/>
-            </a:lightRig>
-          </a:scene3d>
-          <a:sp3d>
-            <a:bevelT w="63500" h="25400"/>
-          </a:sp3d>
         </a:effectStyle>
       </a:effectStyleLst>
       <a:bgFillStyleLst>
         <a:solidFill>
           <a:schemeClr val="phClr"/>
         </a:solidFill>
+        <a:solidFill>
+          <a:schemeClr val="phClr">
+            <a:tint val="95000"/>
+            <a:satMod val="170000"/>
+          </a:schemeClr>
+        </a:solidFill>
         <a:gradFill rotWithShape="1">
           <a:gsLst>
             <a:gs pos="0">
               <a:schemeClr val="phClr">
-                <a:tint val="40000"/>
-                <a:satMod val="350000"/>
+                <a:tint val="93000"/>
+                <a:satMod val="150000"/>
+                <a:shade val="98000"/>
+                <a:lumMod val="102000"/>
               </a:schemeClr>
             </a:gs>
-            <a:gs pos="40000">
+            <a:gs pos="50000">
               <a:schemeClr val="phClr">
-                <a:tint val="45000"/>
-                <a:shade val="99000"/>
-                <a:satMod val="350000"/>
+                <a:tint val="98000"/>
+                <a:satMod val="130000"/>
+                <a:shade val="90000"/>
+                <a:lumMod val="103000"/>
               </a:schemeClr>
             </a:gs>
             <a:gs pos="100000">
               <a:schemeClr val="phClr">
-                <a:shade val="20000"/>
-                <a:satMod val="255000"/>
+                <a:shade val="63000"/>
+                <a:satMod val="120000"/>
               </a:schemeClr>
             </a:gs>
           </a:gsLst>
-          <a:path path="circle">
-            <a:fillToRect l="50000" t="-80000" r="50000" b="180000"/>
-          </a:path>
-        </a:gradFill>
-        <a:gradFill rotWithShape="1">
-          <a:gsLst>
-            <a:gs pos="0">
-              <a:schemeClr val="phClr">
-                <a:tint val="80000"/>
-                <a:satMod val="300000"/>
-              </a:schemeClr>
-            </a:gs>
-            <a:gs pos="100000">
-              <a:schemeClr val="phClr">
-                <a:shade val="30000"/>
-                <a:satMod val="200000"/>
-              </a:schemeClr>
-            </a:gs>
-          </a:gsLst>
-          <a:path path="circle">
-            <a:fillToRect l="50000" t="50000" r="50000" b="50000"/>
-          </a:path>
+          <a:lin ang="5400000" scaled="0"/>
         </a:gradFill>
       </a:bgFillStyleLst>
     </a:fmtScheme>
   </a:themeElements>
-  <a:objectDefaults>
-    <a:spDef>
-      <a:spPr/>
-      <a:bodyPr/>
-      <a:lstStyle/>
-      <a:style>
-        <a:lnRef idx="1">
-          <a:schemeClr val="accent1"/>
-        </a:lnRef>
-        <a:fillRef idx="3">
-          <a:schemeClr val="accent1"/>
-        </a:fillRef>
-        <a:effectRef idx="2">
-          <a:schemeClr val="accent1"/>
-        </a:effectRef>
-        <a:fontRef idx="minor">
-          <a:schemeClr val="lt1"/>
-        </a:fontRef>
-      </a:style>
-    </a:spDef>
-    <a:lnDef>
-      <a:spPr/>
-      <a:bodyPr/>
-      <a:lstStyle/>
-      <a:style>
-        <a:lnRef idx="2">
-          <a:schemeClr val="accent1"/>
-        </a:lnRef>
-        <a:fillRef idx="0">
-          <a:schemeClr val="accent1"/>
-        </a:fillRef>
-        <a:effectRef idx="1">
-          <a:schemeClr val="accent1"/>
-        </a:effectRef>
-        <a:fontRef idx="minor">
-          <a:schemeClr val="tx1"/>
-        </a:fontRef>
-      </a:style>
-    </a:lnDef>
-  </a:objectDefaults>
+  <a:objectDefaults/>
   <a:extraClrSchemeLst/>
+  <a:extLst>
+    <a:ext uri="{05A4C25C-085E-4340-85A3-A5531E510DB2}">
+      <thm15:themeFamily xmlns:thm15="http://schemas.microsoft.com/office/thememl/2012/main" name="Office Theme" id="{62F939B6-93AF-4DB8-9C6B-D6C7DFDC589F}" vid="{4A3C46E8-61CC-4603-A589-7422A47A8E4A}"/>
+    </a:ext>
+  </a:extLst>
 </a:theme>
 </file>